--- a/Documents/Slides/Obscuration de contenu numérique dans une image.pptx
+++ b/Documents/Slides/Obscuration de contenu numérique dans une image.pptx
@@ -8,21 +8,31 @@
     <p:sldId id="256" r:id="rId2"/>
     <p:sldId id="257" r:id="rId3"/>
     <p:sldId id="275" r:id="rId4"/>
-    <p:sldId id="259" r:id="rId5"/>
+    <p:sldId id="280" r:id="rId5"/>
     <p:sldId id="278" r:id="rId6"/>
     <p:sldId id="277" r:id="rId7"/>
     <p:sldId id="261" r:id="rId8"/>
     <p:sldId id="276" r:id="rId9"/>
-    <p:sldId id="262" r:id="rId10"/>
+    <p:sldId id="282" r:id="rId10"/>
     <p:sldId id="274" r:id="rId11"/>
-    <p:sldId id="264" r:id="rId12"/>
-    <p:sldId id="271" r:id="rId13"/>
-    <p:sldId id="270" r:id="rId14"/>
-    <p:sldId id="263" r:id="rId15"/>
-    <p:sldId id="265" r:id="rId16"/>
-    <p:sldId id="266" r:id="rId17"/>
-    <p:sldId id="267" r:id="rId18"/>
-    <p:sldId id="268" r:id="rId19"/>
+    <p:sldId id="281" r:id="rId12"/>
+    <p:sldId id="279" r:id="rId13"/>
+    <p:sldId id="287" r:id="rId14"/>
+    <p:sldId id="264" r:id="rId15"/>
+    <p:sldId id="271" r:id="rId16"/>
+    <p:sldId id="284" r:id="rId17"/>
+    <p:sldId id="270" r:id="rId18"/>
+    <p:sldId id="286" r:id="rId19"/>
+    <p:sldId id="285" r:id="rId20"/>
+    <p:sldId id="263" r:id="rId21"/>
+    <p:sldId id="289" r:id="rId22"/>
+    <p:sldId id="291" r:id="rId23"/>
+    <p:sldId id="293" r:id="rId24"/>
+    <p:sldId id="295" r:id="rId25"/>
+    <p:sldId id="288" r:id="rId26"/>
+    <p:sldId id="265" r:id="rId27"/>
+    <p:sldId id="296" r:id="rId28"/>
+    <p:sldId id="268" r:id="rId29"/>
   </p:sldIdLst>
   <p:sldSz cx="12192000" cy="6858000"/>
   <p:notesSz cx="6858000" cy="9144000"/>
@@ -121,6 +131,11 @@
       </a:defRPr>
     </a:lvl9pPr>
   </p:defaultTextStyle>
+  <p:extLst>
+    <p:ext uri="{EFAFB233-063F-42B5-8137-9DF3F51BA10A}">
+      <p15:sldGuideLst xmlns:p15="http://schemas.microsoft.com/office/powerpoint/2012/main"/>
+    </p:ext>
+  </p:extLst>
 </p:presentation>
 </file>
 
@@ -271,7 +286,7 @@
           <a:p>
             <a:fld id="{38B83883-7D35-4165-90D1-08F5B397DD95}" type="datetimeFigureOut">
               <a:rPr lang="fr-FR" smtClean="0"/>
-              <a:t>28/02/2025</a:t>
+              <a:t>03/03/2025</a:t>
             </a:fld>
             <a:endParaRPr lang="fr-FR"/>
           </a:p>
@@ -469,7 +484,7 @@
           <a:p>
             <a:fld id="{38B83883-7D35-4165-90D1-08F5B397DD95}" type="datetimeFigureOut">
               <a:rPr lang="fr-FR" smtClean="0"/>
-              <a:t>28/02/2025</a:t>
+              <a:t>03/03/2025</a:t>
             </a:fld>
             <a:endParaRPr lang="fr-FR"/>
           </a:p>
@@ -677,7 +692,7 @@
           <a:p>
             <a:fld id="{38B83883-7D35-4165-90D1-08F5B397DD95}" type="datetimeFigureOut">
               <a:rPr lang="fr-FR" smtClean="0"/>
-              <a:t>28/02/2025</a:t>
+              <a:t>03/03/2025</a:t>
             </a:fld>
             <a:endParaRPr lang="fr-FR"/>
           </a:p>
@@ -875,7 +890,7 @@
           <a:p>
             <a:fld id="{38B83883-7D35-4165-90D1-08F5B397DD95}" type="datetimeFigureOut">
               <a:rPr lang="fr-FR" smtClean="0"/>
-              <a:t>28/02/2025</a:t>
+              <a:t>03/03/2025</a:t>
             </a:fld>
             <a:endParaRPr lang="fr-FR"/>
           </a:p>
@@ -1150,7 +1165,7 @@
           <a:p>
             <a:fld id="{38B83883-7D35-4165-90D1-08F5B397DD95}" type="datetimeFigureOut">
               <a:rPr lang="fr-FR" smtClean="0"/>
-              <a:t>28/02/2025</a:t>
+              <a:t>03/03/2025</a:t>
             </a:fld>
             <a:endParaRPr lang="fr-FR"/>
           </a:p>
@@ -1415,7 +1430,7 @@
           <a:p>
             <a:fld id="{38B83883-7D35-4165-90D1-08F5B397DD95}" type="datetimeFigureOut">
               <a:rPr lang="fr-FR" smtClean="0"/>
-              <a:t>28/02/2025</a:t>
+              <a:t>03/03/2025</a:t>
             </a:fld>
             <a:endParaRPr lang="fr-FR"/>
           </a:p>
@@ -1827,7 +1842,7 @@
           <a:p>
             <a:fld id="{38B83883-7D35-4165-90D1-08F5B397DD95}" type="datetimeFigureOut">
               <a:rPr lang="fr-FR" smtClean="0"/>
-              <a:t>28/02/2025</a:t>
+              <a:t>03/03/2025</a:t>
             </a:fld>
             <a:endParaRPr lang="fr-FR"/>
           </a:p>
@@ -1968,7 +1983,7 @@
           <a:p>
             <a:fld id="{38B83883-7D35-4165-90D1-08F5B397DD95}" type="datetimeFigureOut">
               <a:rPr lang="fr-FR" smtClean="0"/>
-              <a:t>28/02/2025</a:t>
+              <a:t>03/03/2025</a:t>
             </a:fld>
             <a:endParaRPr lang="fr-FR"/>
           </a:p>
@@ -2081,7 +2096,7 @@
           <a:p>
             <a:fld id="{38B83883-7D35-4165-90D1-08F5B397DD95}" type="datetimeFigureOut">
               <a:rPr lang="fr-FR" smtClean="0"/>
-              <a:t>28/02/2025</a:t>
+              <a:t>03/03/2025</a:t>
             </a:fld>
             <a:endParaRPr lang="fr-FR"/>
           </a:p>
@@ -2392,7 +2407,7 @@
           <a:p>
             <a:fld id="{38B83883-7D35-4165-90D1-08F5B397DD95}" type="datetimeFigureOut">
               <a:rPr lang="fr-FR" smtClean="0"/>
-              <a:t>28/02/2025</a:t>
+              <a:t>03/03/2025</a:t>
             </a:fld>
             <a:endParaRPr lang="fr-FR"/>
           </a:p>
@@ -2680,7 +2695,7 @@
           <a:p>
             <a:fld id="{38B83883-7D35-4165-90D1-08F5B397DD95}" type="datetimeFigureOut">
               <a:rPr lang="fr-FR" smtClean="0"/>
-              <a:t>28/02/2025</a:t>
+              <a:t>03/03/2025</a:t>
             </a:fld>
             <a:endParaRPr lang="fr-FR"/>
           </a:p>
@@ -2921,7 +2936,7 @@
           <a:p>
             <a:fld id="{38B83883-7D35-4165-90D1-08F5B397DD95}" type="datetimeFigureOut">
               <a:rPr lang="fr-FR" smtClean="0"/>
-              <a:t>28/02/2025</a:t>
+              <a:t>03/03/2025</a:t>
             </a:fld>
             <a:endParaRPr lang="fr-FR"/>
           </a:p>
@@ -3453,8 +3468,23 @@
           <a:p>
             <a:r>
               <a:rPr lang="fr-FR" dirty="0"/>
+              <a:t>Évaluation de l’obscuration</a:t>
+            </a:r>
+            <a:br>
+              <a:rPr lang="fr-FR" dirty="0"/>
+            </a:br>
+            <a:r>
+              <a:rPr lang="fr-FR" sz="2400" dirty="0">
+                <a:solidFill>
+                  <a:schemeClr val="tx1">
+                    <a:lumMod val="65000"/>
+                    <a:lumOff val="35000"/>
+                  </a:schemeClr>
+                </a:solidFill>
+              </a:rPr>
               <a:t>Classification</a:t>
             </a:r>
+            <a:endParaRPr lang="fr-FR" dirty="0"/>
           </a:p>
         </p:txBody>
       </p:sp>
@@ -3939,6 +3969,511 @@
 </file>
 
 <file path=ppt/slides/slide11.xml><?xml version="1.0" encoding="utf-8"?>
+<p:sld xmlns:a="http://schemas.openxmlformats.org/drawingml/2006/main" xmlns:r="http://schemas.openxmlformats.org/officeDocument/2006/relationships" xmlns:p="http://schemas.openxmlformats.org/presentationml/2006/main">
+  <p:cSld>
+    <p:spTree>
+      <p:nvGrpSpPr>
+        <p:cNvPr id="1" name="">
+          <a:extLst>
+            <a:ext uri="{FF2B5EF4-FFF2-40B4-BE49-F238E27FC236}">
+              <a16:creationId xmlns:a16="http://schemas.microsoft.com/office/drawing/2014/main" id="{A3915A70-F51A-A3DD-806B-C24B5E3C75B5}"/>
+            </a:ext>
+          </a:extLst>
+        </p:cNvPr>
+        <p:cNvGrpSpPr/>
+        <p:nvPr/>
+      </p:nvGrpSpPr>
+      <p:grpSpPr>
+        <a:xfrm>
+          <a:off x="0" y="0"/>
+          <a:ext cx="0" cy="0"/>
+          <a:chOff x="0" y="0"/>
+          <a:chExt cx="0" cy="0"/>
+        </a:xfrm>
+      </p:grpSpPr>
+      <p:sp>
+        <p:nvSpPr>
+          <p:cNvPr id="4" name="Titre 3">
+            <a:extLst>
+              <a:ext uri="{FF2B5EF4-FFF2-40B4-BE49-F238E27FC236}">
+                <a16:creationId xmlns:a16="http://schemas.microsoft.com/office/drawing/2014/main" id="{389C2B19-0189-B16D-9774-E40E4084FF9C}"/>
+              </a:ext>
+            </a:extLst>
+          </p:cNvPr>
+          <p:cNvSpPr>
+            <a:spLocks noGrp="1"/>
+          </p:cNvSpPr>
+          <p:nvPr>
+            <p:ph type="title"/>
+          </p:nvPr>
+        </p:nvSpPr>
+        <p:spPr/>
+        <p:txBody>
+          <a:bodyPr/>
+          <a:lstStyle/>
+          <a:p>
+            <a:r>
+              <a:rPr lang="fr-FR" dirty="0"/>
+              <a:t>Résultats expérimentaux</a:t>
+            </a:r>
+          </a:p>
+        </p:txBody>
+      </p:sp>
+      <p:sp>
+        <p:nvSpPr>
+          <p:cNvPr id="3" name="Espace réservé du texte 2">
+            <a:extLst>
+              <a:ext uri="{FF2B5EF4-FFF2-40B4-BE49-F238E27FC236}">
+                <a16:creationId xmlns:a16="http://schemas.microsoft.com/office/drawing/2014/main" id="{6AE65E78-158A-BCDB-F109-B7550E8E1EFC}"/>
+              </a:ext>
+            </a:extLst>
+          </p:cNvPr>
+          <p:cNvSpPr>
+            <a:spLocks noGrp="1"/>
+          </p:cNvSpPr>
+          <p:nvPr>
+            <p:ph type="body" idx="1"/>
+          </p:nvPr>
+        </p:nvSpPr>
+        <p:spPr/>
+        <p:txBody>
+          <a:bodyPr/>
+          <a:lstStyle/>
+          <a:p>
+            <a:endParaRPr lang="fr-FR"/>
+          </a:p>
+        </p:txBody>
+      </p:sp>
+    </p:spTree>
+    <p:extLst>
+      <p:ext uri="{BB962C8B-B14F-4D97-AF65-F5344CB8AC3E}">
+        <p14:creationId xmlns:p14="http://schemas.microsoft.com/office/powerpoint/2010/main" val="3511341144"/>
+      </p:ext>
+    </p:extLst>
+  </p:cSld>
+  <p:clrMapOvr>
+    <a:masterClrMapping/>
+  </p:clrMapOvr>
+</p:sld>
+</file>
+
+<file path=ppt/slides/slide12.xml><?xml version="1.0" encoding="utf-8"?>
+<p:sld xmlns:a="http://schemas.openxmlformats.org/drawingml/2006/main" xmlns:r="http://schemas.openxmlformats.org/officeDocument/2006/relationships" xmlns:p="http://schemas.openxmlformats.org/presentationml/2006/main">
+  <p:cSld>
+    <p:spTree>
+      <p:nvGrpSpPr>
+        <p:cNvPr id="1" name="">
+          <a:extLst>
+            <a:ext uri="{FF2B5EF4-FFF2-40B4-BE49-F238E27FC236}">
+              <a16:creationId xmlns:a16="http://schemas.microsoft.com/office/drawing/2014/main" id="{ECC6C49A-C6F9-B677-4832-DC6F1926A7A5}"/>
+            </a:ext>
+          </a:extLst>
+        </p:cNvPr>
+        <p:cNvGrpSpPr/>
+        <p:nvPr/>
+      </p:nvGrpSpPr>
+      <p:grpSpPr>
+        <a:xfrm>
+          <a:off x="0" y="0"/>
+          <a:ext cx="0" cy="0"/>
+          <a:chOff x="0" y="0"/>
+          <a:chExt cx="0" cy="0"/>
+        </a:xfrm>
+      </p:grpSpPr>
+      <p:sp>
+        <p:nvSpPr>
+          <p:cNvPr id="4" name="Titre 3">
+            <a:extLst>
+              <a:ext uri="{FF2B5EF4-FFF2-40B4-BE49-F238E27FC236}">
+                <a16:creationId xmlns:a16="http://schemas.microsoft.com/office/drawing/2014/main" id="{B4A149B1-B6BD-3636-74DA-07679F15B69E}"/>
+              </a:ext>
+            </a:extLst>
+          </p:cNvPr>
+          <p:cNvSpPr>
+            <a:spLocks noGrp="1"/>
+          </p:cNvSpPr>
+          <p:nvPr>
+            <p:ph type="title"/>
+          </p:nvPr>
+        </p:nvSpPr>
+        <p:spPr/>
+        <p:txBody>
+          <a:bodyPr/>
+          <a:lstStyle/>
+          <a:p>
+            <a:r>
+              <a:rPr lang="fr-FR" dirty="0"/>
+              <a:t>Résultats expérimentaux</a:t>
+            </a:r>
+            <a:br>
+              <a:rPr lang="fr-FR" dirty="0"/>
+            </a:br>
+            <a:r>
+              <a:rPr lang="fr-FR" sz="2400" dirty="0" err="1">
+                <a:solidFill>
+                  <a:schemeClr val="tx1">
+                    <a:lumMod val="65000"/>
+                    <a:lumOff val="35000"/>
+                  </a:schemeClr>
+                </a:solidFill>
+              </a:rPr>
+              <a:t>Dataset</a:t>
+            </a:r>
+            <a:endParaRPr lang="fr-FR" dirty="0"/>
+          </a:p>
+        </p:txBody>
+      </p:sp>
+      <p:pic>
+        <p:nvPicPr>
+          <p:cNvPr id="1026" name="Picture 2" descr="MNIST database - Wikipedia">
+            <a:extLst>
+              <a:ext uri="{FF2B5EF4-FFF2-40B4-BE49-F238E27FC236}">
+                <a16:creationId xmlns:a16="http://schemas.microsoft.com/office/drawing/2014/main" id="{158A396B-2B90-A0E8-1680-67114EB84AF3}"/>
+              </a:ext>
+            </a:extLst>
+          </p:cNvPr>
+          <p:cNvPicPr>
+            <a:picLocks noChangeAspect="1" noChangeArrowheads="1"/>
+          </p:cNvPicPr>
+          <p:nvPr/>
+        </p:nvPicPr>
+        <p:blipFill>
+          <a:blip r:embed="rId2">
+            <a:extLst>
+              <a:ext uri="{28A0092B-C50C-407E-A947-70E740481C1C}">
+                <a14:useLocalDpi xmlns:a14="http://schemas.microsoft.com/office/drawing/2010/main" val="0"/>
+              </a:ext>
+            </a:extLst>
+          </a:blip>
+          <a:srcRect/>
+          <a:stretch>
+            <a:fillRect/>
+          </a:stretch>
+        </p:blipFill>
+        <p:spPr bwMode="auto">
+          <a:xfrm>
+            <a:off x="2006278" y="1690688"/>
+            <a:ext cx="8179443" cy="4064161"/>
+          </a:xfrm>
+          <a:prstGeom prst="rect">
+            <a:avLst/>
+          </a:prstGeom>
+          <a:noFill/>
+          <a:extLst>
+            <a:ext uri="{909E8E84-426E-40DD-AFC4-6F175D3DCCD1}">
+              <a14:hiddenFill xmlns:a14="http://schemas.microsoft.com/office/drawing/2010/main">
+                <a:solidFill>
+                  <a:srgbClr val="FFFFFF"/>
+                </a:solidFill>
+              </a14:hiddenFill>
+            </a:ext>
+          </a:extLst>
+        </p:spPr>
+      </p:pic>
+      <p:sp>
+        <p:nvSpPr>
+          <p:cNvPr id="9" name="Titre 3">
+            <a:extLst>
+              <a:ext uri="{FF2B5EF4-FFF2-40B4-BE49-F238E27FC236}">
+                <a16:creationId xmlns:a16="http://schemas.microsoft.com/office/drawing/2014/main" id="{3D883461-67E4-B7F6-552F-903F4BD85A0C}"/>
+              </a:ext>
+            </a:extLst>
+          </p:cNvPr>
+          <p:cNvSpPr txBox="1">
+            <a:spLocks/>
+          </p:cNvSpPr>
+          <p:nvPr/>
+        </p:nvSpPr>
+        <p:spPr>
+          <a:xfrm>
+            <a:off x="838200" y="5375194"/>
+            <a:ext cx="10515600" cy="1325563"/>
+          </a:xfrm>
+          <a:prstGeom prst="rect">
+            <a:avLst/>
+          </a:prstGeom>
+        </p:spPr>
+        <p:txBody>
+          <a:bodyPr vert="horz" lIns="91440" tIns="45720" rIns="91440" bIns="45720" rtlCol="0" anchor="ctr">
+            <a:normAutofit/>
+          </a:bodyPr>
+          <a:lstStyle>
+            <a:lvl1pPr algn="l" defTabSz="914400" rtl="0" eaLnBrk="1" latinLnBrk="0" hangingPunct="1">
+              <a:lnSpc>
+                <a:spcPct val="90000"/>
+              </a:lnSpc>
+              <a:spcBef>
+                <a:spcPct val="0"/>
+              </a:spcBef>
+              <a:buNone/>
+              <a:defRPr sz="4400" kern="1200">
+                <a:solidFill>
+                  <a:schemeClr val="tx1"/>
+                </a:solidFill>
+                <a:latin typeface="+mj-lt"/>
+                <a:ea typeface="+mj-ea"/>
+                <a:cs typeface="+mj-cs"/>
+              </a:defRPr>
+            </a:lvl1pPr>
+          </a:lstStyle>
+          <a:p>
+            <a:pPr algn="ctr"/>
+            <a:r>
+              <a:rPr lang="fr-FR" sz="1800" dirty="0"/>
+              <a:t>MNIST</a:t>
+            </a:r>
+          </a:p>
+        </p:txBody>
+      </p:sp>
+    </p:spTree>
+    <p:extLst>
+      <p:ext uri="{BB962C8B-B14F-4D97-AF65-F5344CB8AC3E}">
+        <p14:creationId xmlns:p14="http://schemas.microsoft.com/office/powerpoint/2010/main" val="210848320"/>
+      </p:ext>
+    </p:extLst>
+  </p:cSld>
+  <p:clrMapOvr>
+    <a:masterClrMapping/>
+  </p:clrMapOvr>
+</p:sld>
+</file>
+
+<file path=ppt/slides/slide13.xml><?xml version="1.0" encoding="utf-8"?>
+<p:sld xmlns:a="http://schemas.openxmlformats.org/drawingml/2006/main" xmlns:r="http://schemas.openxmlformats.org/officeDocument/2006/relationships" xmlns:p="http://schemas.openxmlformats.org/presentationml/2006/main">
+  <p:cSld>
+    <p:spTree>
+      <p:nvGrpSpPr>
+        <p:cNvPr id="1" name="">
+          <a:extLst>
+            <a:ext uri="{FF2B5EF4-FFF2-40B4-BE49-F238E27FC236}">
+              <a16:creationId xmlns:a16="http://schemas.microsoft.com/office/drawing/2014/main" id="{E786D82E-A0A0-56BC-E9C1-ECEE8BD88898}"/>
+            </a:ext>
+          </a:extLst>
+        </p:cNvPr>
+        <p:cNvGrpSpPr/>
+        <p:nvPr/>
+      </p:nvGrpSpPr>
+      <p:grpSpPr>
+        <a:xfrm>
+          <a:off x="0" y="0"/>
+          <a:ext cx="0" cy="0"/>
+          <a:chOff x="0" y="0"/>
+          <a:chExt cx="0" cy="0"/>
+        </a:xfrm>
+      </p:grpSpPr>
+      <p:sp>
+        <p:nvSpPr>
+          <p:cNvPr id="4" name="Titre 3">
+            <a:extLst>
+              <a:ext uri="{FF2B5EF4-FFF2-40B4-BE49-F238E27FC236}">
+                <a16:creationId xmlns:a16="http://schemas.microsoft.com/office/drawing/2014/main" id="{7935BD9F-62E9-6D9E-BB8D-11C39B7E2EA3}"/>
+              </a:ext>
+            </a:extLst>
+          </p:cNvPr>
+          <p:cNvSpPr>
+            <a:spLocks noGrp="1"/>
+          </p:cNvSpPr>
+          <p:nvPr>
+            <p:ph type="title"/>
+          </p:nvPr>
+        </p:nvSpPr>
+        <p:spPr/>
+        <p:txBody>
+          <a:bodyPr/>
+          <a:lstStyle/>
+          <a:p>
+            <a:r>
+              <a:rPr lang="fr-FR" dirty="0"/>
+              <a:t>Résultats expérimentaux</a:t>
+            </a:r>
+            <a:br>
+              <a:rPr lang="fr-FR" dirty="0"/>
+            </a:br>
+            <a:r>
+              <a:rPr lang="fr-FR" sz="2400" dirty="0">
+                <a:solidFill>
+                  <a:schemeClr val="tx1">
+                    <a:lumMod val="65000"/>
+                    <a:lumOff val="35000"/>
+                  </a:schemeClr>
+                </a:solidFill>
+              </a:rPr>
+              <a:t>Modèles</a:t>
+            </a:r>
+            <a:endParaRPr lang="fr-FR" dirty="0"/>
+          </a:p>
+        </p:txBody>
+      </p:sp>
+      <p:pic>
+        <p:nvPicPr>
+          <p:cNvPr id="2050" name="Picture 2" descr="Model Architecture">
+            <a:extLst>
+              <a:ext uri="{FF2B5EF4-FFF2-40B4-BE49-F238E27FC236}">
+                <a16:creationId xmlns:a16="http://schemas.microsoft.com/office/drawing/2014/main" id="{BE8E17DF-7993-DAAB-9953-EB22713418D0}"/>
+              </a:ext>
+            </a:extLst>
+          </p:cNvPr>
+          <p:cNvPicPr>
+            <a:picLocks noChangeAspect="1" noChangeArrowheads="1"/>
+          </p:cNvPicPr>
+          <p:nvPr/>
+        </p:nvPicPr>
+        <p:blipFill>
+          <a:blip r:embed="rId2">
+            <a:extLst>
+              <a:ext uri="{28A0092B-C50C-407E-A947-70E740481C1C}">
+                <a14:useLocalDpi xmlns:a14="http://schemas.microsoft.com/office/drawing/2010/main" val="0"/>
+              </a:ext>
+            </a:extLst>
+          </a:blip>
+          <a:srcRect/>
+          <a:stretch>
+            <a:fillRect/>
+          </a:stretch>
+        </p:blipFill>
+        <p:spPr bwMode="auto">
+          <a:xfrm>
+            <a:off x="778397" y="2025296"/>
+            <a:ext cx="10635205" cy="2442773"/>
+          </a:xfrm>
+          <a:prstGeom prst="rect">
+            <a:avLst/>
+          </a:prstGeom>
+          <a:noFill/>
+          <a:extLst>
+            <a:ext uri="{909E8E84-426E-40DD-AFC4-6F175D3DCCD1}">
+              <a14:hiddenFill xmlns:a14="http://schemas.microsoft.com/office/drawing/2010/main">
+                <a:solidFill>
+                  <a:srgbClr val="FFFFFF"/>
+                </a:solidFill>
+              </a14:hiddenFill>
+            </a:ext>
+          </a:extLst>
+        </p:spPr>
+      </p:pic>
+      <p:sp>
+        <p:nvSpPr>
+          <p:cNvPr id="2" name="ZoneTexte 1">
+            <a:extLst>
+              <a:ext uri="{FF2B5EF4-FFF2-40B4-BE49-F238E27FC236}">
+                <a16:creationId xmlns:a16="http://schemas.microsoft.com/office/drawing/2014/main" id="{A180E98E-E274-C067-DFA3-13D53DE00762}"/>
+              </a:ext>
+            </a:extLst>
+          </p:cNvPr>
+          <p:cNvSpPr txBox="1"/>
+          <p:nvPr/>
+        </p:nvSpPr>
+        <p:spPr>
+          <a:xfrm>
+            <a:off x="838200" y="1655964"/>
+            <a:ext cx="2511706" cy="461665"/>
+          </a:xfrm>
+          <a:prstGeom prst="rect">
+            <a:avLst/>
+          </a:prstGeom>
+          <a:noFill/>
+        </p:spPr>
+        <p:txBody>
+          <a:bodyPr wrap="square" rtlCol="0">
+            <a:spAutoFit/>
+          </a:bodyPr>
+          <a:lstStyle/>
+          <a:p>
+            <a:r>
+              <a:rPr lang="fr-FR" sz="2400" b="1" dirty="0"/>
+              <a:t>VAE</a:t>
+            </a:r>
+            <a:endParaRPr lang="fr-FR" b="1" dirty="0"/>
+          </a:p>
+        </p:txBody>
+      </p:sp>
+      <p:sp>
+        <p:nvSpPr>
+          <p:cNvPr id="3" name="ZoneTexte 2">
+            <a:extLst>
+              <a:ext uri="{FF2B5EF4-FFF2-40B4-BE49-F238E27FC236}">
+                <a16:creationId xmlns:a16="http://schemas.microsoft.com/office/drawing/2014/main" id="{F7FAD1C3-24CB-6347-4925-D0285CBA49E7}"/>
+              </a:ext>
+            </a:extLst>
+          </p:cNvPr>
+          <p:cNvSpPr txBox="1"/>
+          <p:nvPr/>
+        </p:nvSpPr>
+        <p:spPr>
+          <a:xfrm>
+            <a:off x="838200" y="4491474"/>
+            <a:ext cx="5257800" cy="2123658"/>
+          </a:xfrm>
+          <a:prstGeom prst="rect">
+            <a:avLst/>
+          </a:prstGeom>
+          <a:noFill/>
+        </p:spPr>
+        <p:txBody>
+          <a:bodyPr wrap="square" rtlCol="0">
+            <a:spAutoFit/>
+          </a:bodyPr>
+          <a:lstStyle/>
+          <a:p>
+            <a:r>
+              <a:rPr lang="fr-FR" sz="2000" dirty="0"/>
+              <a:t>• </a:t>
+            </a:r>
+            <a:r>
+              <a:rPr lang="fr-FR" sz="2000" dirty="0" err="1"/>
+              <a:t>Autoencodeur</a:t>
+            </a:r>
+            <a:r>
+              <a:rPr lang="fr-FR" sz="2000" dirty="0"/>
+              <a:t> </a:t>
+            </a:r>
+            <a:r>
+              <a:rPr lang="fr-FR" sz="2000" dirty="0" err="1"/>
+              <a:t>variationnel</a:t>
+            </a:r>
+            <a:endParaRPr lang="fr-FR" sz="2000" dirty="0"/>
+          </a:p>
+          <a:p>
+            <a:r>
+              <a:rPr lang="fr-FR" sz="2000" dirty="0"/>
+              <a:t>• Vecteur latent de taille 128</a:t>
+            </a:r>
+          </a:p>
+          <a:p>
+            <a:endParaRPr lang="fr-FR" sz="2800" b="1" dirty="0"/>
+          </a:p>
+          <a:p>
+            <a:r>
+              <a:rPr lang="fr-FR" sz="2800" b="1" dirty="0"/>
+              <a:t>Classifieur</a:t>
+            </a:r>
+            <a:endParaRPr lang="fr-FR" b="1" dirty="0"/>
+          </a:p>
+          <a:p>
+            <a:endParaRPr lang="fr-FR" dirty="0"/>
+          </a:p>
+          <a:p>
+            <a:r>
+              <a:rPr lang="fr-FR" dirty="0"/>
+              <a:t>99,29% de précision</a:t>
+            </a:r>
+          </a:p>
+        </p:txBody>
+      </p:sp>
+    </p:spTree>
+    <p:extLst>
+      <p:ext uri="{BB962C8B-B14F-4D97-AF65-F5344CB8AC3E}">
+        <p14:creationId xmlns:p14="http://schemas.microsoft.com/office/powerpoint/2010/main" val="334144386"/>
+      </p:ext>
+    </p:extLst>
+  </p:cSld>
+  <p:clrMapOvr>
+    <a:masterClrMapping/>
+  </p:clrMapOvr>
+</p:sld>
+</file>
+
+<file path=ppt/slides/slide14.xml><?xml version="1.0" encoding="utf-8"?>
 <p:sld xmlns:a="http://schemas.openxmlformats.org/drawingml/2006/main" xmlns:r="http://schemas.openxmlformats.org/officeDocument/2006/relationships" xmlns:p="http://schemas.openxmlformats.org/presentationml/2006/main">
   <p:cSld>
     <p:spTree>
@@ -3984,17 +4519,32 @@
           <a:p>
             <a:r>
               <a:rPr lang="fr-FR" dirty="0"/>
-              <a:t>Résultats</a:t>
-            </a:r>
+              <a:t>Résultats expérimentaux</a:t>
+            </a:r>
+            <a:br>
+              <a:rPr lang="fr-FR" dirty="0"/>
+            </a:br>
+            <a:r>
+              <a:rPr lang="fr-FR" sz="2400" dirty="0">
+                <a:solidFill>
+                  <a:schemeClr val="tx1">
+                    <a:lumMod val="65000"/>
+                    <a:lumOff val="35000"/>
+                  </a:schemeClr>
+                </a:solidFill>
+              </a:rPr>
+              <a:t>Obscuration</a:t>
+            </a:r>
+            <a:endParaRPr lang="fr-FR" dirty="0"/>
           </a:p>
         </p:txBody>
       </p:sp>
       <p:pic>
         <p:nvPicPr>
-          <p:cNvPr id="11" name="Image 10">
-            <a:extLst>
-              <a:ext uri="{FF2B5EF4-FFF2-40B4-BE49-F238E27FC236}">
-                <a16:creationId xmlns:a16="http://schemas.microsoft.com/office/drawing/2014/main" id="{77EEE994-67AA-F807-904A-81D4C1F1110B}"/>
+          <p:cNvPr id="3" name="Image 2">
+            <a:extLst>
+              <a:ext uri="{FF2B5EF4-FFF2-40B4-BE49-F238E27FC236}">
+                <a16:creationId xmlns:a16="http://schemas.microsoft.com/office/drawing/2014/main" id="{AB41073E-4ED0-C54F-3725-A7C9D8AB72B6}"/>
               </a:ext>
             </a:extLst>
           </p:cNvPr>
@@ -4011,8 +4561,98 @@
         </p:blipFill>
         <p:spPr>
           <a:xfrm>
-            <a:off x="476250" y="1724025"/>
-            <a:ext cx="11239500" cy="3409950"/>
+            <a:off x="161925" y="1912415"/>
+            <a:ext cx="11868150" cy="1019175"/>
+          </a:xfrm>
+          <a:prstGeom prst="rect">
+            <a:avLst/>
+          </a:prstGeom>
+        </p:spPr>
+      </p:pic>
+      <p:pic>
+        <p:nvPicPr>
+          <p:cNvPr id="6" name="Image 5">
+            <a:extLst>
+              <a:ext uri="{FF2B5EF4-FFF2-40B4-BE49-F238E27FC236}">
+                <a16:creationId xmlns:a16="http://schemas.microsoft.com/office/drawing/2014/main" id="{C744BAF1-BAAB-B62B-2AAF-46C6520DE9F0}"/>
+              </a:ext>
+            </a:extLst>
+          </p:cNvPr>
+          <p:cNvPicPr>
+            <a:picLocks noChangeAspect="1"/>
+          </p:cNvPicPr>
+          <p:nvPr/>
+        </p:nvPicPr>
+        <p:blipFill>
+          <a:blip r:embed="rId3"/>
+          <a:stretch>
+            <a:fillRect/>
+          </a:stretch>
+        </p:blipFill>
+        <p:spPr>
+          <a:xfrm>
+            <a:off x="161925" y="2931590"/>
+            <a:ext cx="11868150" cy="990461"/>
+          </a:xfrm>
+          <a:prstGeom prst="rect">
+            <a:avLst/>
+          </a:prstGeom>
+        </p:spPr>
+      </p:pic>
+      <p:pic>
+        <p:nvPicPr>
+          <p:cNvPr id="8" name="Image 7">
+            <a:extLst>
+              <a:ext uri="{FF2B5EF4-FFF2-40B4-BE49-F238E27FC236}">
+                <a16:creationId xmlns:a16="http://schemas.microsoft.com/office/drawing/2014/main" id="{177C0B56-5833-E798-BC1D-A0B3C58F33D2}"/>
+              </a:ext>
+            </a:extLst>
+          </p:cNvPr>
+          <p:cNvPicPr>
+            <a:picLocks noChangeAspect="1"/>
+          </p:cNvPicPr>
+          <p:nvPr/>
+        </p:nvPicPr>
+        <p:blipFill>
+          <a:blip r:embed="rId4"/>
+          <a:stretch>
+            <a:fillRect/>
+          </a:stretch>
+        </p:blipFill>
+        <p:spPr>
+          <a:xfrm>
+            <a:off x="161925" y="3950765"/>
+            <a:ext cx="11868150" cy="989013"/>
+          </a:xfrm>
+          <a:prstGeom prst="rect">
+            <a:avLst/>
+          </a:prstGeom>
+        </p:spPr>
+      </p:pic>
+      <p:pic>
+        <p:nvPicPr>
+          <p:cNvPr id="10" name="Image 9">
+            <a:extLst>
+              <a:ext uri="{FF2B5EF4-FFF2-40B4-BE49-F238E27FC236}">
+                <a16:creationId xmlns:a16="http://schemas.microsoft.com/office/drawing/2014/main" id="{1AAD889D-1A6A-E63C-DFC1-A0C4CA94B279}"/>
+              </a:ext>
+            </a:extLst>
+          </p:cNvPr>
+          <p:cNvPicPr>
+            <a:picLocks noChangeAspect="1"/>
+          </p:cNvPicPr>
+          <p:nvPr/>
+        </p:nvPicPr>
+        <p:blipFill>
+          <a:blip r:embed="rId5"/>
+          <a:stretch>
+            <a:fillRect/>
+          </a:stretch>
+        </p:blipFill>
+        <p:spPr>
+          <a:xfrm>
+            <a:off x="161925" y="4968493"/>
+            <a:ext cx="11868150" cy="990448"/>
           </a:xfrm>
           <a:prstGeom prst="rect">
             <a:avLst/>
@@ -4032,7 +4672,7 @@
 </p:sld>
 </file>
 
-<file path=ppt/slides/slide12.xml><?xml version="1.0" encoding="utf-8"?>
+<file path=ppt/slides/slide15.xml><?xml version="1.0" encoding="utf-8"?>
 <p:sld xmlns:a="http://schemas.openxmlformats.org/drawingml/2006/main" xmlns:r="http://schemas.openxmlformats.org/officeDocument/2006/relationships" xmlns:p="http://schemas.openxmlformats.org/presentationml/2006/main">
   <p:cSld>
     <p:spTree>
@@ -4078,8 +4718,23 @@
           <a:p>
             <a:r>
               <a:rPr lang="fr-FR" dirty="0"/>
-              <a:t>Résultats</a:t>
-            </a:r>
+              <a:t>Résultats expérimentaux</a:t>
+            </a:r>
+            <a:br>
+              <a:rPr lang="fr-FR" dirty="0"/>
+            </a:br>
+            <a:r>
+              <a:rPr lang="fr-FR" sz="2400" dirty="0">
+                <a:solidFill>
+                  <a:schemeClr val="tx1">
+                    <a:lumMod val="65000"/>
+                    <a:lumOff val="35000"/>
+                  </a:schemeClr>
+                </a:solidFill>
+              </a:rPr>
+              <a:t>Translation des chiffres</a:t>
+            </a:r>
+            <a:endParaRPr lang="fr-FR" dirty="0"/>
           </a:p>
         </p:txBody>
       </p:sp>
@@ -4105,8 +4760,188 @@
         </p:blipFill>
         <p:spPr>
           <a:xfrm>
-            <a:off x="213890" y="1331088"/>
-            <a:ext cx="5422739" cy="5422739"/>
+            <a:off x="6105114" y="1027906"/>
+            <a:ext cx="5735527" cy="5735527"/>
+          </a:xfrm>
+          <a:prstGeom prst="rect">
+            <a:avLst/>
+          </a:prstGeom>
+        </p:spPr>
+      </p:pic>
+      <p:pic>
+        <p:nvPicPr>
+          <p:cNvPr id="7" name="Image 6">
+            <a:extLst>
+              <a:ext uri="{FF2B5EF4-FFF2-40B4-BE49-F238E27FC236}">
+                <a16:creationId xmlns:a16="http://schemas.microsoft.com/office/drawing/2014/main" id="{008DA01C-99C3-C526-22DA-4F389250EF6D}"/>
+              </a:ext>
+            </a:extLst>
+          </p:cNvPr>
+          <p:cNvPicPr>
+            <a:picLocks noChangeAspect="1"/>
+          </p:cNvPicPr>
+          <p:nvPr/>
+        </p:nvPicPr>
+        <p:blipFill>
+          <a:blip r:embed="rId3"/>
+          <a:stretch>
+            <a:fillRect/>
+          </a:stretch>
+        </p:blipFill>
+        <p:spPr>
+          <a:xfrm>
+            <a:off x="2404538" y="2220560"/>
+            <a:ext cx="823306" cy="3743377"/>
+          </a:xfrm>
+          <a:prstGeom prst="rect">
+            <a:avLst/>
+          </a:prstGeom>
+        </p:spPr>
+      </p:pic>
+      <p:pic>
+        <p:nvPicPr>
+          <p:cNvPr id="9" name="Image 8">
+            <a:extLst>
+              <a:ext uri="{FF2B5EF4-FFF2-40B4-BE49-F238E27FC236}">
+                <a16:creationId xmlns:a16="http://schemas.microsoft.com/office/drawing/2014/main" id="{28F9146F-C01F-9577-BD1A-0573767EC015}"/>
+              </a:ext>
+            </a:extLst>
+          </p:cNvPr>
+          <p:cNvPicPr>
+            <a:picLocks noChangeAspect="1"/>
+          </p:cNvPicPr>
+          <p:nvPr/>
+        </p:nvPicPr>
+        <p:blipFill>
+          <a:blip r:embed="rId4"/>
+          <a:stretch>
+            <a:fillRect/>
+          </a:stretch>
+        </p:blipFill>
+        <p:spPr>
+          <a:xfrm>
+            <a:off x="351359" y="2220941"/>
+            <a:ext cx="844106" cy="2793872"/>
+          </a:xfrm>
+          <a:prstGeom prst="rect">
+            <a:avLst/>
+          </a:prstGeom>
+        </p:spPr>
+      </p:pic>
+      <p:pic>
+        <p:nvPicPr>
+          <p:cNvPr id="11" name="Image 10">
+            <a:extLst>
+              <a:ext uri="{FF2B5EF4-FFF2-40B4-BE49-F238E27FC236}">
+                <a16:creationId xmlns:a16="http://schemas.microsoft.com/office/drawing/2014/main" id="{D2FF76F3-277F-3ECD-1067-3F757A44D617}"/>
+              </a:ext>
+            </a:extLst>
+          </p:cNvPr>
+          <p:cNvPicPr>
+            <a:picLocks noChangeAspect="1"/>
+          </p:cNvPicPr>
+          <p:nvPr/>
+        </p:nvPicPr>
+        <p:blipFill>
+          <a:blip r:embed="rId5"/>
+          <a:stretch>
+            <a:fillRect/>
+          </a:stretch>
+        </p:blipFill>
+        <p:spPr>
+          <a:xfrm>
+            <a:off x="4436917" y="2220941"/>
+            <a:ext cx="820328" cy="2793871"/>
+          </a:xfrm>
+          <a:prstGeom prst="rect">
+            <a:avLst/>
+          </a:prstGeom>
+        </p:spPr>
+      </p:pic>
+      <p:pic>
+        <p:nvPicPr>
+          <p:cNvPr id="3" name="Image 2">
+            <a:extLst>
+              <a:ext uri="{FF2B5EF4-FFF2-40B4-BE49-F238E27FC236}">
+                <a16:creationId xmlns:a16="http://schemas.microsoft.com/office/drawing/2014/main" id="{95A8BF8B-26EC-711D-F222-A7F138DB8A73}"/>
+              </a:ext>
+            </a:extLst>
+          </p:cNvPr>
+          <p:cNvPicPr>
+            <a:picLocks noChangeAspect="1"/>
+          </p:cNvPicPr>
+          <p:nvPr/>
+        </p:nvPicPr>
+        <p:blipFill>
+          <a:blip r:embed="rId6"/>
+          <a:stretch>
+            <a:fillRect/>
+          </a:stretch>
+        </p:blipFill>
+        <p:spPr>
+          <a:xfrm>
+            <a:off x="1173329" y="2220560"/>
+            <a:ext cx="789717" cy="2793871"/>
+          </a:xfrm>
+          <a:prstGeom prst="rect">
+            <a:avLst/>
+          </a:prstGeom>
+        </p:spPr>
+      </p:pic>
+      <p:pic>
+        <p:nvPicPr>
+          <p:cNvPr id="8" name="Image 7">
+            <a:extLst>
+              <a:ext uri="{FF2B5EF4-FFF2-40B4-BE49-F238E27FC236}">
+                <a16:creationId xmlns:a16="http://schemas.microsoft.com/office/drawing/2014/main" id="{50492D19-2751-841F-7CE4-112A356B0FEA}"/>
+              </a:ext>
+            </a:extLst>
+          </p:cNvPr>
+          <p:cNvPicPr>
+            <a:picLocks noChangeAspect="1"/>
+          </p:cNvPicPr>
+          <p:nvPr/>
+        </p:nvPicPr>
+        <p:blipFill>
+          <a:blip r:embed="rId7"/>
+          <a:stretch>
+            <a:fillRect/>
+          </a:stretch>
+        </p:blipFill>
+        <p:spPr>
+          <a:xfrm>
+            <a:off x="3207843" y="2202994"/>
+            <a:ext cx="783189" cy="3743377"/>
+          </a:xfrm>
+          <a:prstGeom prst="rect">
+            <a:avLst/>
+          </a:prstGeom>
+        </p:spPr>
+      </p:pic>
+      <p:pic>
+        <p:nvPicPr>
+          <p:cNvPr id="12" name="Image 11">
+            <a:extLst>
+              <a:ext uri="{FF2B5EF4-FFF2-40B4-BE49-F238E27FC236}">
+                <a16:creationId xmlns:a16="http://schemas.microsoft.com/office/drawing/2014/main" id="{7519000F-52B8-CD03-65D4-90CC72B337B8}"/>
+              </a:ext>
+            </a:extLst>
+          </p:cNvPr>
+          <p:cNvPicPr>
+            <a:picLocks noChangeAspect="1"/>
+          </p:cNvPicPr>
+          <p:nvPr/>
+        </p:nvPicPr>
+        <p:blipFill>
+          <a:blip r:embed="rId8"/>
+          <a:stretch>
+            <a:fillRect/>
+          </a:stretch>
+        </p:blipFill>
+        <p:spPr>
+          <a:xfrm>
+            <a:off x="5257246" y="2220560"/>
+            <a:ext cx="799192" cy="2793871"/>
           </a:xfrm>
           <a:prstGeom prst="rect">
             <a:avLst/>
@@ -4126,7 +4961,296 @@
 </p:sld>
 </file>
 
-<file path=ppt/slides/slide13.xml><?xml version="1.0" encoding="utf-8"?>
+<file path=ppt/slides/slide16.xml><?xml version="1.0" encoding="utf-8"?>
+<p:sld xmlns:a="http://schemas.openxmlformats.org/drawingml/2006/main" xmlns:r="http://schemas.openxmlformats.org/officeDocument/2006/relationships" xmlns:p="http://schemas.openxmlformats.org/presentationml/2006/main">
+  <p:cSld>
+    <p:spTree>
+      <p:nvGrpSpPr>
+        <p:cNvPr id="1" name="">
+          <a:extLst>
+            <a:ext uri="{FF2B5EF4-FFF2-40B4-BE49-F238E27FC236}">
+              <a16:creationId xmlns:a16="http://schemas.microsoft.com/office/drawing/2014/main" id="{19F98E93-5541-8F5F-E103-BED0A4928888}"/>
+            </a:ext>
+          </a:extLst>
+        </p:cNvPr>
+        <p:cNvGrpSpPr/>
+        <p:nvPr/>
+      </p:nvGrpSpPr>
+      <p:grpSpPr>
+        <a:xfrm>
+          <a:off x="0" y="0"/>
+          <a:ext cx="0" cy="0"/>
+          <a:chOff x="0" y="0"/>
+          <a:chExt cx="0" cy="0"/>
+        </a:xfrm>
+      </p:grpSpPr>
+      <p:pic>
+        <p:nvPicPr>
+          <p:cNvPr id="13" name="Image 12">
+            <a:extLst>
+              <a:ext uri="{FF2B5EF4-FFF2-40B4-BE49-F238E27FC236}">
+                <a16:creationId xmlns:a16="http://schemas.microsoft.com/office/drawing/2014/main" id="{CABA81C7-FD76-4316-5FF0-601EF78637D3}"/>
+              </a:ext>
+            </a:extLst>
+          </p:cNvPr>
+          <p:cNvPicPr>
+            <a:picLocks noChangeAspect="1"/>
+          </p:cNvPicPr>
+          <p:nvPr/>
+        </p:nvPicPr>
+        <p:blipFill>
+          <a:blip r:embed="rId2"/>
+          <a:stretch>
+            <a:fillRect/>
+          </a:stretch>
+        </p:blipFill>
+        <p:spPr>
+          <a:xfrm>
+            <a:off x="6096394" y="1027905"/>
+            <a:ext cx="5744247" cy="5744247"/>
+          </a:xfrm>
+          <a:prstGeom prst="rect">
+            <a:avLst/>
+          </a:prstGeom>
+        </p:spPr>
+      </p:pic>
+      <p:sp>
+        <p:nvSpPr>
+          <p:cNvPr id="4" name="Titre 3">
+            <a:extLst>
+              <a:ext uri="{FF2B5EF4-FFF2-40B4-BE49-F238E27FC236}">
+                <a16:creationId xmlns:a16="http://schemas.microsoft.com/office/drawing/2014/main" id="{03AEDAB7-6174-ACF9-07F8-7E7BCB7B394A}"/>
+              </a:ext>
+            </a:extLst>
+          </p:cNvPr>
+          <p:cNvSpPr>
+            <a:spLocks noGrp="1"/>
+          </p:cNvSpPr>
+          <p:nvPr>
+            <p:ph type="title"/>
+          </p:nvPr>
+        </p:nvSpPr>
+        <p:spPr/>
+        <p:txBody>
+          <a:bodyPr/>
+          <a:lstStyle/>
+          <a:p>
+            <a:r>
+              <a:rPr lang="fr-FR" dirty="0"/>
+              <a:t>Résultats expérimentaux</a:t>
+            </a:r>
+            <a:br>
+              <a:rPr lang="fr-FR" dirty="0"/>
+            </a:br>
+            <a:r>
+              <a:rPr lang="fr-FR" sz="2400" dirty="0">
+                <a:solidFill>
+                  <a:schemeClr val="tx1">
+                    <a:lumMod val="65000"/>
+                    <a:lumOff val="35000"/>
+                  </a:schemeClr>
+                </a:solidFill>
+              </a:rPr>
+              <a:t>Translation des chiffres</a:t>
+            </a:r>
+            <a:endParaRPr lang="fr-FR" dirty="0"/>
+          </a:p>
+        </p:txBody>
+      </p:sp>
+      <p:pic>
+        <p:nvPicPr>
+          <p:cNvPr id="3" name="Image 2">
+            <a:extLst>
+              <a:ext uri="{FF2B5EF4-FFF2-40B4-BE49-F238E27FC236}">
+                <a16:creationId xmlns:a16="http://schemas.microsoft.com/office/drawing/2014/main" id="{10BB9AF7-C268-BE5A-121C-0C501BD46B84}"/>
+              </a:ext>
+            </a:extLst>
+          </p:cNvPr>
+          <p:cNvPicPr>
+            <a:picLocks noChangeAspect="1"/>
+          </p:cNvPicPr>
+          <p:nvPr/>
+        </p:nvPicPr>
+        <p:blipFill>
+          <a:blip r:embed="rId3"/>
+          <a:stretch>
+            <a:fillRect/>
+          </a:stretch>
+        </p:blipFill>
+        <p:spPr>
+          <a:xfrm>
+            <a:off x="440210" y="2220560"/>
+            <a:ext cx="825074" cy="2793871"/>
+          </a:xfrm>
+          <a:prstGeom prst="rect">
+            <a:avLst/>
+          </a:prstGeom>
+        </p:spPr>
+      </p:pic>
+      <p:pic>
+        <p:nvPicPr>
+          <p:cNvPr id="8" name="Image 7">
+            <a:extLst>
+              <a:ext uri="{FF2B5EF4-FFF2-40B4-BE49-F238E27FC236}">
+                <a16:creationId xmlns:a16="http://schemas.microsoft.com/office/drawing/2014/main" id="{B57B5CAA-46FD-163F-5519-783892FB930C}"/>
+              </a:ext>
+            </a:extLst>
+          </p:cNvPr>
+          <p:cNvPicPr>
+            <a:picLocks noChangeAspect="1"/>
+          </p:cNvPicPr>
+          <p:nvPr/>
+        </p:nvPicPr>
+        <p:blipFill>
+          <a:blip r:embed="rId4"/>
+          <a:stretch>
+            <a:fillRect/>
+          </a:stretch>
+        </p:blipFill>
+        <p:spPr>
+          <a:xfrm>
+            <a:off x="1268100" y="2220560"/>
+            <a:ext cx="800683" cy="2793871"/>
+          </a:xfrm>
+          <a:prstGeom prst="rect">
+            <a:avLst/>
+          </a:prstGeom>
+        </p:spPr>
+      </p:pic>
+      <p:pic>
+        <p:nvPicPr>
+          <p:cNvPr id="12" name="Image 11">
+            <a:extLst>
+              <a:ext uri="{FF2B5EF4-FFF2-40B4-BE49-F238E27FC236}">
+                <a16:creationId xmlns:a16="http://schemas.microsoft.com/office/drawing/2014/main" id="{59A5AB9D-5179-BD60-97E1-BEA2C40E0564}"/>
+              </a:ext>
+            </a:extLst>
+          </p:cNvPr>
+          <p:cNvPicPr>
+            <a:picLocks noChangeAspect="1"/>
+          </p:cNvPicPr>
+          <p:nvPr/>
+        </p:nvPicPr>
+        <p:blipFill>
+          <a:blip r:embed="rId5"/>
+          <a:stretch>
+            <a:fillRect/>
+          </a:stretch>
+        </p:blipFill>
+        <p:spPr>
+          <a:xfrm>
+            <a:off x="2479664" y="2220940"/>
+            <a:ext cx="795530" cy="3742997"/>
+          </a:xfrm>
+          <a:prstGeom prst="rect">
+            <a:avLst/>
+          </a:prstGeom>
+        </p:spPr>
+      </p:pic>
+      <p:pic>
+        <p:nvPicPr>
+          <p:cNvPr id="16" name="Image 15">
+            <a:extLst>
+              <a:ext uri="{FF2B5EF4-FFF2-40B4-BE49-F238E27FC236}">
+                <a16:creationId xmlns:a16="http://schemas.microsoft.com/office/drawing/2014/main" id="{B0371E83-E18E-0FD0-4574-A748CA9F6D47}"/>
+              </a:ext>
+            </a:extLst>
+          </p:cNvPr>
+          <p:cNvPicPr>
+            <a:picLocks noChangeAspect="1"/>
+          </p:cNvPicPr>
+          <p:nvPr/>
+        </p:nvPicPr>
+        <p:blipFill>
+          <a:blip r:embed="rId6"/>
+          <a:stretch>
+            <a:fillRect/>
+          </a:stretch>
+        </p:blipFill>
+        <p:spPr>
+          <a:xfrm>
+            <a:off x="3275194" y="2220560"/>
+            <a:ext cx="825408" cy="3742997"/>
+          </a:xfrm>
+          <a:prstGeom prst="rect">
+            <a:avLst/>
+          </a:prstGeom>
+        </p:spPr>
+      </p:pic>
+      <p:pic>
+        <p:nvPicPr>
+          <p:cNvPr id="20" name="Image 19">
+            <a:extLst>
+              <a:ext uri="{FF2B5EF4-FFF2-40B4-BE49-F238E27FC236}">
+                <a16:creationId xmlns:a16="http://schemas.microsoft.com/office/drawing/2014/main" id="{C8A126EC-179C-0D89-0AF4-957266DC66D6}"/>
+              </a:ext>
+            </a:extLst>
+          </p:cNvPr>
+          <p:cNvPicPr>
+            <a:picLocks noChangeAspect="1"/>
+          </p:cNvPicPr>
+          <p:nvPr/>
+        </p:nvPicPr>
+        <p:blipFill>
+          <a:blip r:embed="rId7"/>
+          <a:stretch>
+            <a:fillRect/>
+          </a:stretch>
+        </p:blipFill>
+        <p:spPr>
+          <a:xfrm>
+            <a:off x="4430570" y="2220560"/>
+            <a:ext cx="809652" cy="2793871"/>
+          </a:xfrm>
+          <a:prstGeom prst="rect">
+            <a:avLst/>
+          </a:prstGeom>
+        </p:spPr>
+      </p:pic>
+      <p:pic>
+        <p:nvPicPr>
+          <p:cNvPr id="22" name="Image 21">
+            <a:extLst>
+              <a:ext uri="{FF2B5EF4-FFF2-40B4-BE49-F238E27FC236}">
+                <a16:creationId xmlns:a16="http://schemas.microsoft.com/office/drawing/2014/main" id="{002921BA-769A-A77F-7E56-C04C823B0A90}"/>
+              </a:ext>
+            </a:extLst>
+          </p:cNvPr>
+          <p:cNvPicPr>
+            <a:picLocks noChangeAspect="1"/>
+          </p:cNvPicPr>
+          <p:nvPr/>
+        </p:nvPicPr>
+        <p:blipFill>
+          <a:blip r:embed="rId8"/>
+          <a:stretch>
+            <a:fillRect/>
+          </a:stretch>
+        </p:blipFill>
+        <p:spPr>
+          <a:xfrm>
+            <a:off x="5237856" y="2219595"/>
+            <a:ext cx="812971" cy="2793871"/>
+          </a:xfrm>
+          <a:prstGeom prst="rect">
+            <a:avLst/>
+          </a:prstGeom>
+        </p:spPr>
+      </p:pic>
+    </p:spTree>
+    <p:extLst>
+      <p:ext uri="{BB962C8B-B14F-4D97-AF65-F5344CB8AC3E}">
+        <p14:creationId xmlns:p14="http://schemas.microsoft.com/office/powerpoint/2010/main" val="3752956624"/>
+      </p:ext>
+    </p:extLst>
+  </p:cSld>
+  <p:clrMapOvr>
+    <a:masterClrMapping/>
+  </p:clrMapOvr>
+</p:sld>
+</file>
+
+<file path=ppt/slides/slide17.xml><?xml version="1.0" encoding="utf-8"?>
 <p:sld xmlns:a="http://schemas.openxmlformats.org/drawingml/2006/main" xmlns:r="http://schemas.openxmlformats.org/officeDocument/2006/relationships" xmlns:p="http://schemas.openxmlformats.org/presentationml/2006/main">
   <p:cSld>
     <p:spTree>
@@ -4172,8 +5296,23 @@
           <a:p>
             <a:r>
               <a:rPr lang="fr-FR" dirty="0"/>
-              <a:t>Résultats</a:t>
-            </a:r>
+              <a:t>Résultats expérimentaux</a:t>
+            </a:r>
+            <a:br>
+              <a:rPr lang="fr-FR" dirty="0"/>
+            </a:br>
+            <a:r>
+              <a:rPr lang="fr-FR" sz="2400" dirty="0">
+                <a:solidFill>
+                  <a:schemeClr val="tx1">
+                    <a:lumMod val="65000"/>
+                    <a:lumOff val="35000"/>
+                  </a:schemeClr>
+                </a:solidFill>
+              </a:rPr>
+              <a:t>Classification</a:t>
+            </a:r>
+            <a:endParaRPr lang="fr-FR" dirty="0"/>
           </a:p>
         </p:txBody>
       </p:sp>
@@ -4199,37 +5338,7 @@
         </p:blipFill>
         <p:spPr>
           <a:xfrm>
-            <a:off x="188907" y="1399074"/>
-            <a:ext cx="6483000" cy="5186400"/>
-          </a:xfrm>
-          <a:prstGeom prst="rect">
-            <a:avLst/>
-          </a:prstGeom>
-        </p:spPr>
-      </p:pic>
-      <p:pic>
-        <p:nvPicPr>
-          <p:cNvPr id="6" name="Image 5">
-            <a:extLst>
-              <a:ext uri="{FF2B5EF4-FFF2-40B4-BE49-F238E27FC236}">
-                <a16:creationId xmlns:a16="http://schemas.microsoft.com/office/drawing/2014/main" id="{1C35450B-87C8-2E1B-9216-F2FC9B0B31E9}"/>
-              </a:ext>
-            </a:extLst>
-          </p:cNvPr>
-          <p:cNvPicPr>
-            <a:picLocks noChangeAspect="1"/>
-          </p:cNvPicPr>
-          <p:nvPr/>
-        </p:nvPicPr>
-        <p:blipFill>
-          <a:blip r:embed="rId3"/>
-          <a:stretch>
-            <a:fillRect/>
-          </a:stretch>
-        </p:blipFill>
-        <p:spPr>
-          <a:xfrm>
-            <a:off x="6211749" y="1399074"/>
+            <a:off x="2854500" y="1690688"/>
             <a:ext cx="6483000" cy="5186400"/>
           </a:xfrm>
           <a:prstGeom prst="rect">
@@ -4241,362 +5350,6 @@
     <p:extLst>
       <p:ext uri="{BB962C8B-B14F-4D97-AF65-F5344CB8AC3E}">
         <p14:creationId xmlns:p14="http://schemas.microsoft.com/office/powerpoint/2010/main" val="2521462718"/>
-      </p:ext>
-    </p:extLst>
-  </p:cSld>
-  <p:clrMapOvr>
-    <a:masterClrMapping/>
-  </p:clrMapOvr>
-</p:sld>
-</file>
-
-<file path=ppt/slides/slide14.xml><?xml version="1.0" encoding="utf-8"?>
-<p:sld xmlns:a="http://schemas.openxmlformats.org/drawingml/2006/main" xmlns:r="http://schemas.openxmlformats.org/officeDocument/2006/relationships" xmlns:p="http://schemas.openxmlformats.org/presentationml/2006/main">
-  <p:cSld>
-    <p:spTree>
-      <p:nvGrpSpPr>
-        <p:cNvPr id="1" name="">
-          <a:extLst>
-            <a:ext uri="{FF2B5EF4-FFF2-40B4-BE49-F238E27FC236}">
-              <a16:creationId xmlns:a16="http://schemas.microsoft.com/office/drawing/2014/main" id="{43BD2780-808D-1F11-4E9A-4E8B8CF74E25}"/>
-            </a:ext>
-          </a:extLst>
-        </p:cNvPr>
-        <p:cNvGrpSpPr/>
-        <p:nvPr/>
-      </p:nvGrpSpPr>
-      <p:grpSpPr>
-        <a:xfrm>
-          <a:off x="0" y="0"/>
-          <a:ext cx="0" cy="0"/>
-          <a:chOff x="0" y="0"/>
-          <a:chExt cx="0" cy="0"/>
-        </a:xfrm>
-      </p:grpSpPr>
-      <p:sp>
-        <p:nvSpPr>
-          <p:cNvPr id="4" name="Titre 3">
-            <a:extLst>
-              <a:ext uri="{FF2B5EF4-FFF2-40B4-BE49-F238E27FC236}">
-                <a16:creationId xmlns:a16="http://schemas.microsoft.com/office/drawing/2014/main" id="{07FA21B2-BB2F-001A-CCD4-D00101E43F98}"/>
-              </a:ext>
-            </a:extLst>
-          </p:cNvPr>
-          <p:cNvSpPr>
-            <a:spLocks noGrp="1"/>
-          </p:cNvSpPr>
-          <p:nvPr>
-            <p:ph type="title"/>
-          </p:nvPr>
-        </p:nvSpPr>
-        <p:spPr/>
-        <p:txBody>
-          <a:bodyPr/>
-          <a:lstStyle/>
-          <a:p>
-            <a:r>
-              <a:rPr lang="fr-FR" dirty="0"/>
-              <a:t>Attaque et défense</a:t>
-            </a:r>
-          </a:p>
-        </p:txBody>
-      </p:sp>
-      <p:sp>
-        <p:nvSpPr>
-          <p:cNvPr id="2" name="Espace réservé du texte 1">
-            <a:extLst>
-              <a:ext uri="{FF2B5EF4-FFF2-40B4-BE49-F238E27FC236}">
-                <a16:creationId xmlns:a16="http://schemas.microsoft.com/office/drawing/2014/main" id="{8A1A3114-A231-B01F-EE65-720169F81DDB}"/>
-              </a:ext>
-            </a:extLst>
-          </p:cNvPr>
-          <p:cNvSpPr>
-            <a:spLocks noGrp="1"/>
-          </p:cNvSpPr>
-          <p:nvPr>
-            <p:ph type="body" idx="1"/>
-          </p:nvPr>
-        </p:nvSpPr>
-        <p:spPr/>
-        <p:txBody>
-          <a:bodyPr/>
-          <a:lstStyle/>
-          <a:p>
-            <a:endParaRPr lang="fr-FR" dirty="0"/>
-          </a:p>
-        </p:txBody>
-      </p:sp>
-    </p:spTree>
-    <p:extLst>
-      <p:ext uri="{BB962C8B-B14F-4D97-AF65-F5344CB8AC3E}">
-        <p14:creationId xmlns:p14="http://schemas.microsoft.com/office/powerpoint/2010/main" val="4151479487"/>
-      </p:ext>
-    </p:extLst>
-  </p:cSld>
-  <p:clrMapOvr>
-    <a:masterClrMapping/>
-  </p:clrMapOvr>
-</p:sld>
-</file>
-
-<file path=ppt/slides/slide15.xml><?xml version="1.0" encoding="utf-8"?>
-<p:sld xmlns:a="http://schemas.openxmlformats.org/drawingml/2006/main" xmlns:r="http://schemas.openxmlformats.org/officeDocument/2006/relationships" xmlns:p="http://schemas.openxmlformats.org/presentationml/2006/main">
-  <p:cSld>
-    <p:spTree>
-      <p:nvGrpSpPr>
-        <p:cNvPr id="1" name="">
-          <a:extLst>
-            <a:ext uri="{FF2B5EF4-FFF2-40B4-BE49-F238E27FC236}">
-              <a16:creationId xmlns:a16="http://schemas.microsoft.com/office/drawing/2014/main" id="{094866A7-8450-103C-0D3C-61722B59E960}"/>
-            </a:ext>
-          </a:extLst>
-        </p:cNvPr>
-        <p:cNvGrpSpPr/>
-        <p:nvPr/>
-      </p:nvGrpSpPr>
-      <p:grpSpPr>
-        <a:xfrm>
-          <a:off x="0" y="0"/>
-          <a:ext cx="0" cy="0"/>
-          <a:chOff x="0" y="0"/>
-          <a:chExt cx="0" cy="0"/>
-        </a:xfrm>
-      </p:grpSpPr>
-      <p:sp>
-        <p:nvSpPr>
-          <p:cNvPr id="4" name="Titre 3">
-            <a:extLst>
-              <a:ext uri="{FF2B5EF4-FFF2-40B4-BE49-F238E27FC236}">
-                <a16:creationId xmlns:a16="http://schemas.microsoft.com/office/drawing/2014/main" id="{33DEFD9E-3A54-4A41-5E4D-D8882A45FAF9}"/>
-              </a:ext>
-            </a:extLst>
-          </p:cNvPr>
-          <p:cNvSpPr>
-            <a:spLocks noGrp="1"/>
-          </p:cNvSpPr>
-          <p:nvPr>
-            <p:ph type="title"/>
-          </p:nvPr>
-        </p:nvSpPr>
-        <p:spPr/>
-        <p:txBody>
-          <a:bodyPr/>
-          <a:lstStyle/>
-          <a:p>
-            <a:r>
-              <a:rPr lang="fr-FR" dirty="0"/>
-              <a:t>Détection de traces</a:t>
-            </a:r>
-          </a:p>
-        </p:txBody>
-      </p:sp>
-      <p:sp>
-        <p:nvSpPr>
-          <p:cNvPr id="3" name="Espace réservé du contenu 2">
-            <a:extLst>
-              <a:ext uri="{FF2B5EF4-FFF2-40B4-BE49-F238E27FC236}">
-                <a16:creationId xmlns:a16="http://schemas.microsoft.com/office/drawing/2014/main" id="{643759A2-9DFE-F1B3-EB6F-9FC4AB050179}"/>
-              </a:ext>
-            </a:extLst>
-          </p:cNvPr>
-          <p:cNvSpPr>
-            <a:spLocks noGrp="1"/>
-          </p:cNvSpPr>
-          <p:nvPr>
-            <p:ph idx="1"/>
-          </p:nvPr>
-        </p:nvSpPr>
-        <p:spPr/>
-        <p:txBody>
-          <a:bodyPr/>
-          <a:lstStyle/>
-          <a:p>
-            <a:endParaRPr lang="fr-FR" dirty="0"/>
-          </a:p>
-        </p:txBody>
-      </p:sp>
-    </p:spTree>
-    <p:extLst>
-      <p:ext uri="{BB962C8B-B14F-4D97-AF65-F5344CB8AC3E}">
-        <p14:creationId xmlns:p14="http://schemas.microsoft.com/office/powerpoint/2010/main" val="275169876"/>
-      </p:ext>
-    </p:extLst>
-  </p:cSld>
-  <p:clrMapOvr>
-    <a:masterClrMapping/>
-  </p:clrMapOvr>
-</p:sld>
-</file>
-
-<file path=ppt/slides/slide16.xml><?xml version="1.0" encoding="utf-8"?>
-<p:sld xmlns:a="http://schemas.openxmlformats.org/drawingml/2006/main" xmlns:r="http://schemas.openxmlformats.org/officeDocument/2006/relationships" xmlns:p="http://schemas.openxmlformats.org/presentationml/2006/main">
-  <p:cSld>
-    <p:spTree>
-      <p:nvGrpSpPr>
-        <p:cNvPr id="1" name="">
-          <a:extLst>
-            <a:ext uri="{FF2B5EF4-FFF2-40B4-BE49-F238E27FC236}">
-              <a16:creationId xmlns:a16="http://schemas.microsoft.com/office/drawing/2014/main" id="{ED7E08F3-7F25-C1BF-95DB-E1E3867CF899}"/>
-            </a:ext>
-          </a:extLst>
-        </p:cNvPr>
-        <p:cNvGrpSpPr/>
-        <p:nvPr/>
-      </p:nvGrpSpPr>
-      <p:grpSpPr>
-        <a:xfrm>
-          <a:off x="0" y="0"/>
-          <a:ext cx="0" cy="0"/>
-          <a:chOff x="0" y="0"/>
-          <a:chExt cx="0" cy="0"/>
-        </a:xfrm>
-      </p:grpSpPr>
-      <p:sp>
-        <p:nvSpPr>
-          <p:cNvPr id="4" name="Titre 3">
-            <a:extLst>
-              <a:ext uri="{FF2B5EF4-FFF2-40B4-BE49-F238E27FC236}">
-                <a16:creationId xmlns:a16="http://schemas.microsoft.com/office/drawing/2014/main" id="{2ECCE192-ABCC-C030-08E1-D0C17A2121B2}"/>
-              </a:ext>
-            </a:extLst>
-          </p:cNvPr>
-          <p:cNvSpPr>
-            <a:spLocks noGrp="1"/>
-          </p:cNvSpPr>
-          <p:nvPr>
-            <p:ph type="title"/>
-          </p:nvPr>
-        </p:nvSpPr>
-        <p:spPr/>
-        <p:txBody>
-          <a:bodyPr/>
-          <a:lstStyle/>
-          <a:p>
-            <a:r>
-              <a:rPr lang="fr-FR" dirty="0"/>
-              <a:t>Reconnaissance de la classe source</a:t>
-            </a:r>
-          </a:p>
-        </p:txBody>
-      </p:sp>
-      <p:sp>
-        <p:nvSpPr>
-          <p:cNvPr id="3" name="Espace réservé du contenu 2">
-            <a:extLst>
-              <a:ext uri="{FF2B5EF4-FFF2-40B4-BE49-F238E27FC236}">
-                <a16:creationId xmlns:a16="http://schemas.microsoft.com/office/drawing/2014/main" id="{716DB553-CEAC-F9D6-1450-58974234C80B}"/>
-              </a:ext>
-            </a:extLst>
-          </p:cNvPr>
-          <p:cNvSpPr>
-            <a:spLocks noGrp="1"/>
-          </p:cNvSpPr>
-          <p:nvPr>
-            <p:ph idx="1"/>
-          </p:nvPr>
-        </p:nvSpPr>
-        <p:spPr/>
-        <p:txBody>
-          <a:bodyPr/>
-          <a:lstStyle/>
-          <a:p>
-            <a:endParaRPr lang="fr-FR" dirty="0"/>
-          </a:p>
-        </p:txBody>
-      </p:sp>
-    </p:spTree>
-    <p:extLst>
-      <p:ext uri="{BB962C8B-B14F-4D97-AF65-F5344CB8AC3E}">
-        <p14:creationId xmlns:p14="http://schemas.microsoft.com/office/powerpoint/2010/main" val="206938023"/>
-      </p:ext>
-    </p:extLst>
-  </p:cSld>
-  <p:clrMapOvr>
-    <a:masterClrMapping/>
-  </p:clrMapOvr>
-</p:sld>
-</file>
-
-<file path=ppt/slides/slide17.xml><?xml version="1.0" encoding="utf-8"?>
-<p:sld xmlns:a="http://schemas.openxmlformats.org/drawingml/2006/main" xmlns:r="http://schemas.openxmlformats.org/officeDocument/2006/relationships" xmlns:p="http://schemas.openxmlformats.org/presentationml/2006/main">
-  <p:cSld>
-    <p:spTree>
-      <p:nvGrpSpPr>
-        <p:cNvPr id="1" name="">
-          <a:extLst>
-            <a:ext uri="{FF2B5EF4-FFF2-40B4-BE49-F238E27FC236}">
-              <a16:creationId xmlns:a16="http://schemas.microsoft.com/office/drawing/2014/main" id="{6FE84870-DFFF-DD20-FE88-D000261F93E8}"/>
-            </a:ext>
-          </a:extLst>
-        </p:cNvPr>
-        <p:cNvGrpSpPr/>
-        <p:nvPr/>
-      </p:nvGrpSpPr>
-      <p:grpSpPr>
-        <a:xfrm>
-          <a:off x="0" y="0"/>
-          <a:ext cx="0" cy="0"/>
-          <a:chOff x="0" y="0"/>
-          <a:chExt cx="0" cy="0"/>
-        </a:xfrm>
-      </p:grpSpPr>
-      <p:sp>
-        <p:nvSpPr>
-          <p:cNvPr id="4" name="Titre 3">
-            <a:extLst>
-              <a:ext uri="{FF2B5EF4-FFF2-40B4-BE49-F238E27FC236}">
-                <a16:creationId xmlns:a16="http://schemas.microsoft.com/office/drawing/2014/main" id="{25BAEDED-B11B-C8CB-A0C9-29A2484FCA1C}"/>
-              </a:ext>
-            </a:extLst>
-          </p:cNvPr>
-          <p:cNvSpPr>
-            <a:spLocks noGrp="1"/>
-          </p:cNvSpPr>
-          <p:nvPr>
-            <p:ph type="title"/>
-          </p:nvPr>
-        </p:nvSpPr>
-        <p:spPr/>
-        <p:txBody>
-          <a:bodyPr/>
-          <a:lstStyle/>
-          <a:p>
-            <a:r>
-              <a:rPr lang="fr-FR" dirty="0"/>
-              <a:t>Résultats</a:t>
-            </a:r>
-          </a:p>
-        </p:txBody>
-      </p:sp>
-      <p:sp>
-        <p:nvSpPr>
-          <p:cNvPr id="3" name="Espace réservé du contenu 2">
-            <a:extLst>
-              <a:ext uri="{FF2B5EF4-FFF2-40B4-BE49-F238E27FC236}">
-                <a16:creationId xmlns:a16="http://schemas.microsoft.com/office/drawing/2014/main" id="{A9CFD80D-E9DF-B758-EEE7-2B3728E42079}"/>
-              </a:ext>
-            </a:extLst>
-          </p:cNvPr>
-          <p:cNvSpPr>
-            <a:spLocks noGrp="1"/>
-          </p:cNvSpPr>
-          <p:nvPr>
-            <p:ph idx="1"/>
-          </p:nvPr>
-        </p:nvSpPr>
-        <p:spPr/>
-        <p:txBody>
-          <a:bodyPr/>
-          <a:lstStyle/>
-          <a:p>
-            <a:endParaRPr lang="fr-FR" dirty="0"/>
-          </a:p>
-        </p:txBody>
-      </p:sp>
-    </p:spTree>
-    <p:extLst>
-      <p:ext uri="{BB962C8B-B14F-4D97-AF65-F5344CB8AC3E}">
-        <p14:creationId xmlns:p14="http://schemas.microsoft.com/office/powerpoint/2010/main" val="3274349397"/>
       </p:ext>
     </p:extLst>
   </p:cSld>
@@ -4614,7 +5367,7 @@
         <p:cNvPr id="1" name="">
           <a:extLst>
             <a:ext uri="{FF2B5EF4-FFF2-40B4-BE49-F238E27FC236}">
-              <a16:creationId xmlns:a16="http://schemas.microsoft.com/office/drawing/2014/main" id="{6D5B0FF0-D8F9-C769-7A64-6AD0A50C921F}"/>
+              <a16:creationId xmlns:a16="http://schemas.microsoft.com/office/drawing/2014/main" id="{27D9D05C-60AB-08F4-0979-B91BB25436A4}"/>
             </a:ext>
           </a:extLst>
         </p:cNvPr>
@@ -4634,7 +5387,7 @@
           <p:cNvPr id="4" name="Titre 3">
             <a:extLst>
               <a:ext uri="{FF2B5EF4-FFF2-40B4-BE49-F238E27FC236}">
-                <a16:creationId xmlns:a16="http://schemas.microsoft.com/office/drawing/2014/main" id="{F1C0F03A-00C9-4C00-9802-C712BFF0FE98}"/>
+                <a16:creationId xmlns:a16="http://schemas.microsoft.com/office/drawing/2014/main" id="{5C70F67C-2308-6D39-0AEA-E307534C8DFD}"/>
               </a:ext>
             </a:extLst>
           </p:cNvPr>
@@ -4652,17 +5405,188 @@
           <a:p>
             <a:r>
               <a:rPr lang="fr-FR" dirty="0"/>
-              <a:t>Conclusion</a:t>
-            </a:r>
-          </a:p>
-        </p:txBody>
-      </p:sp>
-      <p:sp>
-        <p:nvSpPr>
-          <p:cNvPr id="2" name="Espace réservé du texte 1">
-            <a:extLst>
-              <a:ext uri="{FF2B5EF4-FFF2-40B4-BE49-F238E27FC236}">
-                <a16:creationId xmlns:a16="http://schemas.microsoft.com/office/drawing/2014/main" id="{7B4AEEAB-3777-F2BC-884D-17E2D71E6971}"/>
+              <a:t>Résultats expérimentaux</a:t>
+            </a:r>
+            <a:br>
+              <a:rPr lang="fr-FR" dirty="0"/>
+            </a:br>
+            <a:r>
+              <a:rPr lang="fr-FR" sz="2400" dirty="0" err="1">
+                <a:solidFill>
+                  <a:schemeClr val="tx1">
+                    <a:lumMod val="65000"/>
+                    <a:lumOff val="35000"/>
+                  </a:schemeClr>
+                </a:solidFill>
+              </a:rPr>
+              <a:t>Déobscuration</a:t>
+            </a:r>
+            <a:endParaRPr lang="fr-FR" dirty="0"/>
+          </a:p>
+        </p:txBody>
+      </p:sp>
+      <p:pic>
+        <p:nvPicPr>
+          <p:cNvPr id="3" name="Image 2">
+            <a:extLst>
+              <a:ext uri="{FF2B5EF4-FFF2-40B4-BE49-F238E27FC236}">
+                <a16:creationId xmlns:a16="http://schemas.microsoft.com/office/drawing/2014/main" id="{35EB59F5-AF34-33B1-5783-B185DB2B8593}"/>
+              </a:ext>
+            </a:extLst>
+          </p:cNvPr>
+          <p:cNvPicPr>
+            <a:picLocks noChangeAspect="1"/>
+          </p:cNvPicPr>
+          <p:nvPr/>
+        </p:nvPicPr>
+        <p:blipFill>
+          <a:blip r:embed="rId2"/>
+          <a:stretch>
+            <a:fillRect/>
+          </a:stretch>
+        </p:blipFill>
+        <p:spPr>
+          <a:xfrm>
+            <a:off x="161925" y="1912415"/>
+            <a:ext cx="11868150" cy="1019175"/>
+          </a:xfrm>
+          <a:prstGeom prst="rect">
+            <a:avLst/>
+          </a:prstGeom>
+        </p:spPr>
+      </p:pic>
+      <p:pic>
+        <p:nvPicPr>
+          <p:cNvPr id="8" name="Image 7">
+            <a:extLst>
+              <a:ext uri="{FF2B5EF4-FFF2-40B4-BE49-F238E27FC236}">
+                <a16:creationId xmlns:a16="http://schemas.microsoft.com/office/drawing/2014/main" id="{5225FC3E-35E7-9BE9-22C1-319F6DF13DDA}"/>
+              </a:ext>
+            </a:extLst>
+          </p:cNvPr>
+          <p:cNvPicPr>
+            <a:picLocks noChangeAspect="1"/>
+          </p:cNvPicPr>
+          <p:nvPr/>
+        </p:nvPicPr>
+        <p:blipFill>
+          <a:blip r:embed="rId3"/>
+          <a:stretch>
+            <a:fillRect/>
+          </a:stretch>
+        </p:blipFill>
+        <p:spPr>
+          <a:xfrm>
+            <a:off x="161925" y="4413752"/>
+            <a:ext cx="11868150" cy="989013"/>
+          </a:xfrm>
+          <a:prstGeom prst="rect">
+            <a:avLst/>
+          </a:prstGeom>
+        </p:spPr>
+      </p:pic>
+      <p:pic>
+        <p:nvPicPr>
+          <p:cNvPr id="5" name="Image 4">
+            <a:extLst>
+              <a:ext uri="{FF2B5EF4-FFF2-40B4-BE49-F238E27FC236}">
+                <a16:creationId xmlns:a16="http://schemas.microsoft.com/office/drawing/2014/main" id="{43CA1825-A734-7337-31C7-D4FCA576EE8F}"/>
+              </a:ext>
+            </a:extLst>
+          </p:cNvPr>
+          <p:cNvPicPr>
+            <a:picLocks noChangeAspect="1"/>
+          </p:cNvPicPr>
+          <p:nvPr/>
+        </p:nvPicPr>
+        <p:blipFill>
+          <a:blip r:embed="rId4"/>
+          <a:stretch>
+            <a:fillRect/>
+          </a:stretch>
+        </p:blipFill>
+        <p:spPr>
+          <a:xfrm>
+            <a:off x="161925" y="2907235"/>
+            <a:ext cx="11868150" cy="979621"/>
+          </a:xfrm>
+          <a:prstGeom prst="rect">
+            <a:avLst/>
+          </a:prstGeom>
+        </p:spPr>
+      </p:pic>
+      <p:pic>
+        <p:nvPicPr>
+          <p:cNvPr id="9" name="Image 8">
+            <a:extLst>
+              <a:ext uri="{FF2B5EF4-FFF2-40B4-BE49-F238E27FC236}">
+                <a16:creationId xmlns:a16="http://schemas.microsoft.com/office/drawing/2014/main" id="{7DDB24A6-2D56-2837-4931-AECD212050A2}"/>
+              </a:ext>
+            </a:extLst>
+          </p:cNvPr>
+          <p:cNvPicPr>
+            <a:picLocks noChangeAspect="1"/>
+          </p:cNvPicPr>
+          <p:nvPr/>
+        </p:nvPicPr>
+        <p:blipFill>
+          <a:blip r:embed="rId5"/>
+          <a:stretch>
+            <a:fillRect/>
+          </a:stretch>
+        </p:blipFill>
+        <p:spPr>
+          <a:xfrm>
+            <a:off x="161925" y="5402765"/>
+            <a:ext cx="11868150" cy="980337"/>
+          </a:xfrm>
+          <a:prstGeom prst="rect">
+            <a:avLst/>
+          </a:prstGeom>
+        </p:spPr>
+      </p:pic>
+    </p:spTree>
+    <p:extLst>
+      <p:ext uri="{BB962C8B-B14F-4D97-AF65-F5344CB8AC3E}">
+        <p14:creationId xmlns:p14="http://schemas.microsoft.com/office/powerpoint/2010/main" val="1496896407"/>
+      </p:ext>
+    </p:extLst>
+  </p:cSld>
+  <p:clrMapOvr>
+    <a:masterClrMapping/>
+  </p:clrMapOvr>
+</p:sld>
+</file>
+
+<file path=ppt/slides/slide19.xml><?xml version="1.0" encoding="utf-8"?>
+<p:sld xmlns:a="http://schemas.openxmlformats.org/drawingml/2006/main" xmlns:r="http://schemas.openxmlformats.org/officeDocument/2006/relationships" xmlns:p="http://schemas.openxmlformats.org/presentationml/2006/main">
+  <p:cSld>
+    <p:spTree>
+      <p:nvGrpSpPr>
+        <p:cNvPr id="1" name="">
+          <a:extLst>
+            <a:ext uri="{FF2B5EF4-FFF2-40B4-BE49-F238E27FC236}">
+              <a16:creationId xmlns:a16="http://schemas.microsoft.com/office/drawing/2014/main" id="{B4518879-24EC-0881-41FA-0523A9927B88}"/>
+            </a:ext>
+          </a:extLst>
+        </p:cNvPr>
+        <p:cNvGrpSpPr/>
+        <p:nvPr/>
+      </p:nvGrpSpPr>
+      <p:grpSpPr>
+        <a:xfrm>
+          <a:off x="0" y="0"/>
+          <a:ext cx="0" cy="0"/>
+          <a:chOff x="0" y="0"/>
+          <a:chExt cx="0" cy="0"/>
+        </a:xfrm>
+      </p:grpSpPr>
+      <p:sp>
+        <p:nvSpPr>
+          <p:cNvPr id="4" name="Titre 3">
+            <a:extLst>
+              <a:ext uri="{FF2B5EF4-FFF2-40B4-BE49-F238E27FC236}">
+                <a16:creationId xmlns:a16="http://schemas.microsoft.com/office/drawing/2014/main" id="{92DBA8C6-1BD7-07E0-A203-88D5B99FD07B}"/>
               </a:ext>
             </a:extLst>
           </p:cNvPr>
@@ -4670,7 +5594,7 @@
             <a:spLocks noGrp="1"/>
           </p:cNvSpPr>
           <p:nvPr>
-            <p:ph type="body" idx="1"/>
+            <p:ph type="title"/>
           </p:nvPr>
         </p:nvSpPr>
         <p:spPr/>
@@ -4678,14 +5602,73 @@
           <a:bodyPr/>
           <a:lstStyle/>
           <a:p>
+            <a:r>
+              <a:rPr lang="fr-FR" dirty="0"/>
+              <a:t>Résultats expérimentaux</a:t>
+            </a:r>
+            <a:br>
+              <a:rPr lang="fr-FR" dirty="0"/>
+            </a:br>
+            <a:r>
+              <a:rPr lang="fr-FR" sz="2400" dirty="0">
+                <a:solidFill>
+                  <a:schemeClr val="tx1">
+                    <a:lumMod val="65000"/>
+                    <a:lumOff val="35000"/>
+                  </a:schemeClr>
+                </a:solidFill>
+              </a:rPr>
+              <a:t>Classification de la </a:t>
+            </a:r>
+            <a:r>
+              <a:rPr lang="fr-FR" sz="2400" dirty="0" err="1">
+                <a:solidFill>
+                  <a:schemeClr val="tx1">
+                    <a:lumMod val="65000"/>
+                    <a:lumOff val="35000"/>
+                  </a:schemeClr>
+                </a:solidFill>
+              </a:rPr>
+              <a:t>déobscuration</a:t>
+            </a:r>
             <a:endParaRPr lang="fr-FR" dirty="0"/>
           </a:p>
         </p:txBody>
       </p:sp>
+      <p:pic>
+        <p:nvPicPr>
+          <p:cNvPr id="6" name="Image 5">
+            <a:extLst>
+              <a:ext uri="{FF2B5EF4-FFF2-40B4-BE49-F238E27FC236}">
+                <a16:creationId xmlns:a16="http://schemas.microsoft.com/office/drawing/2014/main" id="{E76CC8D6-0770-BD7F-CD53-09D3F257BA8B}"/>
+              </a:ext>
+            </a:extLst>
+          </p:cNvPr>
+          <p:cNvPicPr>
+            <a:picLocks noChangeAspect="1"/>
+          </p:cNvPicPr>
+          <p:nvPr/>
+        </p:nvPicPr>
+        <p:blipFill>
+          <a:blip r:embed="rId2"/>
+          <a:stretch>
+            <a:fillRect/>
+          </a:stretch>
+        </p:blipFill>
+        <p:spPr>
+          <a:xfrm>
+            <a:off x="2854500" y="1690688"/>
+            <a:ext cx="6483000" cy="5186400"/>
+          </a:xfrm>
+          <a:prstGeom prst="rect">
+            <a:avLst/>
+          </a:prstGeom>
+        </p:spPr>
+      </p:pic>
     </p:spTree>
     <p:extLst>
       <p:ext uri="{BB962C8B-B14F-4D97-AF65-F5344CB8AC3E}">
-        <p14:creationId xmlns:p14="http://schemas.microsoft.com/office/powerpoint/2010/main" val="2394037337"/>
+        <p14:creationId xmlns:p14="http://schemas.microsoft.com/office/powerpoint/2010/main" val="911793960"/>
       </p:ext>
     </p:extLst>
   </p:cSld>
@@ -4767,14 +5750,4158 @@
           <a:bodyPr/>
           <a:lstStyle/>
           <a:p>
-            <a:endParaRPr lang="fr-FR" dirty="0"/>
-          </a:p>
-        </p:txBody>
-      </p:sp>
+            <a:r>
+              <a:rPr lang="fr-FR" b="1" dirty="0"/>
+              <a:t>Protection des données</a:t>
+            </a:r>
+            <a:r>
+              <a:rPr lang="fr-FR" dirty="0"/>
+              <a:t>, de la vie privée</a:t>
+            </a:r>
+          </a:p>
+          <a:p>
+            <a:r>
+              <a:rPr lang="fr-FR" dirty="0"/>
+              <a:t>Importance de l’information dans les médias visuels </a:t>
+            </a:r>
+          </a:p>
+          <a:p>
+            <a:r>
+              <a:rPr lang="fr-FR" dirty="0"/>
+              <a:t>Obscuration </a:t>
+            </a:r>
+            <a:r>
+              <a:rPr lang="fr-FR" b="1" dirty="0"/>
+              <a:t>réversible</a:t>
+            </a:r>
+            <a:r>
+              <a:rPr lang="fr-FR" dirty="0"/>
+              <a:t> à partir d’une clé</a:t>
+            </a:r>
+          </a:p>
+          <a:p>
+            <a:r>
+              <a:rPr lang="fr-FR" dirty="0"/>
+              <a:t>Bonne</a:t>
+            </a:r>
+            <a:r>
+              <a:rPr lang="fr-FR" b="1" dirty="0"/>
+              <a:t> fidélité visuelle</a:t>
+            </a:r>
+            <a:r>
+              <a:rPr lang="fr-FR" dirty="0"/>
+              <a:t> et </a:t>
+            </a:r>
+            <a:r>
+              <a:rPr lang="fr-FR" b="1" dirty="0"/>
+              <a:t>invisible</a:t>
+            </a:r>
+          </a:p>
+        </p:txBody>
+      </p:sp>
+      <p:pic>
+        <p:nvPicPr>
+          <p:cNvPr id="1028" name="Picture 4" descr="Plaque d'immatriculation : voici la technique rapide pour la flouter !">
+            <a:extLst>
+              <a:ext uri="{FF2B5EF4-FFF2-40B4-BE49-F238E27FC236}">
+                <a16:creationId xmlns:a16="http://schemas.microsoft.com/office/drawing/2014/main" id="{DF052E8D-ED3B-754C-C24A-F8FA7583E75D}"/>
+              </a:ext>
+            </a:extLst>
+          </p:cNvPr>
+          <p:cNvPicPr>
+            <a:picLocks noChangeAspect="1" noChangeArrowheads="1"/>
+          </p:cNvPicPr>
+          <p:nvPr/>
+        </p:nvPicPr>
+        <p:blipFill>
+          <a:blip r:embed="rId2">
+            <a:extLst>
+              <a:ext uri="{28A0092B-C50C-407E-A947-70E740481C1C}">
+                <a14:useLocalDpi xmlns:a14="http://schemas.microsoft.com/office/drawing/2010/main" val="0"/>
+              </a:ext>
+            </a:extLst>
+          </a:blip>
+          <a:srcRect/>
+          <a:stretch>
+            <a:fillRect/>
+          </a:stretch>
+        </p:blipFill>
+        <p:spPr bwMode="auto">
+          <a:xfrm>
+            <a:off x="4299044" y="4203905"/>
+            <a:ext cx="3593912" cy="1973058"/>
+          </a:xfrm>
+          <a:prstGeom prst="rect">
+            <a:avLst/>
+          </a:prstGeom>
+          <a:noFill/>
+          <a:extLst>
+            <a:ext uri="{909E8E84-426E-40DD-AFC4-6F175D3DCCD1}">
+              <a14:hiddenFill xmlns:a14="http://schemas.microsoft.com/office/drawing/2010/main">
+                <a:solidFill>
+                  <a:srgbClr val="FFFFFF"/>
+                </a:solidFill>
+              </a14:hiddenFill>
+            </a:ext>
+          </a:extLst>
+        </p:spPr>
+      </p:pic>
     </p:spTree>
     <p:extLst>
       <p:ext uri="{BB962C8B-B14F-4D97-AF65-F5344CB8AC3E}">
         <p14:creationId xmlns:p14="http://schemas.microsoft.com/office/powerpoint/2010/main" val="3381085258"/>
+      </p:ext>
+    </p:extLst>
+  </p:cSld>
+  <p:clrMapOvr>
+    <a:masterClrMapping/>
+  </p:clrMapOvr>
+</p:sld>
+</file>
+
+<file path=ppt/slides/slide20.xml><?xml version="1.0" encoding="utf-8"?>
+<p:sld xmlns:a="http://schemas.openxmlformats.org/drawingml/2006/main" xmlns:r="http://schemas.openxmlformats.org/officeDocument/2006/relationships" xmlns:p="http://schemas.openxmlformats.org/presentationml/2006/main">
+  <p:cSld>
+    <p:spTree>
+      <p:nvGrpSpPr>
+        <p:cNvPr id="1" name="">
+          <a:extLst>
+            <a:ext uri="{FF2B5EF4-FFF2-40B4-BE49-F238E27FC236}">
+              <a16:creationId xmlns:a16="http://schemas.microsoft.com/office/drawing/2014/main" id="{43BD2780-808D-1F11-4E9A-4E8B8CF74E25}"/>
+            </a:ext>
+          </a:extLst>
+        </p:cNvPr>
+        <p:cNvGrpSpPr/>
+        <p:nvPr/>
+      </p:nvGrpSpPr>
+      <p:grpSpPr>
+        <a:xfrm>
+          <a:off x="0" y="0"/>
+          <a:ext cx="0" cy="0"/>
+          <a:chOff x="0" y="0"/>
+          <a:chExt cx="0" cy="0"/>
+        </a:xfrm>
+      </p:grpSpPr>
+      <p:sp>
+        <p:nvSpPr>
+          <p:cNvPr id="4" name="Titre 3">
+            <a:extLst>
+              <a:ext uri="{FF2B5EF4-FFF2-40B4-BE49-F238E27FC236}">
+                <a16:creationId xmlns:a16="http://schemas.microsoft.com/office/drawing/2014/main" id="{07FA21B2-BB2F-001A-CCD4-D00101E43F98}"/>
+              </a:ext>
+            </a:extLst>
+          </p:cNvPr>
+          <p:cNvSpPr>
+            <a:spLocks noGrp="1"/>
+          </p:cNvSpPr>
+          <p:nvPr>
+            <p:ph type="title"/>
+          </p:nvPr>
+        </p:nvSpPr>
+        <p:spPr/>
+        <p:txBody>
+          <a:bodyPr/>
+          <a:lstStyle/>
+          <a:p>
+            <a:r>
+              <a:rPr lang="fr-FR" dirty="0"/>
+              <a:t>Attaque et défense</a:t>
+            </a:r>
+          </a:p>
+        </p:txBody>
+      </p:sp>
+      <p:sp>
+        <p:nvSpPr>
+          <p:cNvPr id="2" name="Espace réservé du texte 1">
+            <a:extLst>
+              <a:ext uri="{FF2B5EF4-FFF2-40B4-BE49-F238E27FC236}">
+                <a16:creationId xmlns:a16="http://schemas.microsoft.com/office/drawing/2014/main" id="{8A1A3114-A231-B01F-EE65-720169F81DDB}"/>
+              </a:ext>
+            </a:extLst>
+          </p:cNvPr>
+          <p:cNvSpPr>
+            <a:spLocks noGrp="1"/>
+          </p:cNvSpPr>
+          <p:nvPr>
+            <p:ph type="body" idx="1"/>
+          </p:nvPr>
+        </p:nvSpPr>
+        <p:spPr/>
+        <p:txBody>
+          <a:bodyPr/>
+          <a:lstStyle/>
+          <a:p>
+            <a:endParaRPr lang="fr-FR" dirty="0"/>
+          </a:p>
+        </p:txBody>
+      </p:sp>
+    </p:spTree>
+    <p:extLst>
+      <p:ext uri="{BB962C8B-B14F-4D97-AF65-F5344CB8AC3E}">
+        <p14:creationId xmlns:p14="http://schemas.microsoft.com/office/powerpoint/2010/main" val="4151479487"/>
+      </p:ext>
+    </p:extLst>
+  </p:cSld>
+  <p:clrMapOvr>
+    <a:masterClrMapping/>
+  </p:clrMapOvr>
+</p:sld>
+</file>
+
+<file path=ppt/slides/slide21.xml><?xml version="1.0" encoding="utf-8"?>
+<p:sld xmlns:a="http://schemas.openxmlformats.org/drawingml/2006/main" xmlns:r="http://schemas.openxmlformats.org/officeDocument/2006/relationships" xmlns:p="http://schemas.openxmlformats.org/presentationml/2006/main">
+  <p:cSld>
+    <p:spTree>
+      <p:nvGrpSpPr>
+        <p:cNvPr id="1" name="">
+          <a:extLst>
+            <a:ext uri="{FF2B5EF4-FFF2-40B4-BE49-F238E27FC236}">
+              <a16:creationId xmlns:a16="http://schemas.microsoft.com/office/drawing/2014/main" id="{866A8B81-FBFD-731A-5785-186A610DB280}"/>
+            </a:ext>
+          </a:extLst>
+        </p:cNvPr>
+        <p:cNvGrpSpPr/>
+        <p:nvPr/>
+      </p:nvGrpSpPr>
+      <p:grpSpPr>
+        <a:xfrm>
+          <a:off x="0" y="0"/>
+          <a:ext cx="0" cy="0"/>
+          <a:chOff x="0" y="0"/>
+          <a:chExt cx="0" cy="0"/>
+        </a:xfrm>
+      </p:grpSpPr>
+      <p:sp>
+        <p:nvSpPr>
+          <p:cNvPr id="4" name="Titre 3">
+            <a:extLst>
+              <a:ext uri="{FF2B5EF4-FFF2-40B4-BE49-F238E27FC236}">
+                <a16:creationId xmlns:a16="http://schemas.microsoft.com/office/drawing/2014/main" id="{3899C493-8D1E-EA61-68FB-28DAFFC80D71}"/>
+              </a:ext>
+            </a:extLst>
+          </p:cNvPr>
+          <p:cNvSpPr>
+            <a:spLocks noGrp="1"/>
+          </p:cNvSpPr>
+          <p:nvPr>
+            <p:ph type="title"/>
+          </p:nvPr>
+        </p:nvSpPr>
+        <p:spPr/>
+        <p:txBody>
+          <a:bodyPr/>
+          <a:lstStyle/>
+          <a:p>
+            <a:r>
+              <a:rPr lang="fr-FR" dirty="0"/>
+              <a:t>Détection de l’obscuration</a:t>
+            </a:r>
+            <a:br>
+              <a:rPr lang="fr-FR" dirty="0"/>
+            </a:br>
+            <a:r>
+              <a:rPr lang="fr-FR" sz="2400" dirty="0">
+                <a:solidFill>
+                  <a:schemeClr val="tx1">
+                    <a:lumMod val="65000"/>
+                    <a:lumOff val="35000"/>
+                  </a:schemeClr>
+                </a:solidFill>
+              </a:rPr>
+              <a:t>Fonctionnement</a:t>
+            </a:r>
+            <a:endParaRPr lang="fr-FR" dirty="0"/>
+          </a:p>
+        </p:txBody>
+      </p:sp>
+      <p:pic>
+        <p:nvPicPr>
+          <p:cNvPr id="2" name="Espace réservé du contenu 6" descr="Une image contenant noir, noir et blanc, capture d’écran, Graphique&#10;&#10;Le contenu généré par l’IA peut être incorrect.">
+            <a:extLst>
+              <a:ext uri="{FF2B5EF4-FFF2-40B4-BE49-F238E27FC236}">
+                <a16:creationId xmlns:a16="http://schemas.microsoft.com/office/drawing/2014/main" id="{EC7F6506-152A-86A4-51F3-670911F1D97A}"/>
+              </a:ext>
+            </a:extLst>
+          </p:cNvPr>
+          <p:cNvPicPr>
+            <a:picLocks noGrp="1" noChangeAspect="1"/>
+          </p:cNvPicPr>
+          <p:nvPr>
+            <p:ph idx="1"/>
+          </p:nvPr>
+        </p:nvPicPr>
+        <p:blipFill>
+          <a:blip r:embed="rId2">
+            <a:extLst>
+              <a:ext uri="{28A0092B-C50C-407E-A947-70E740481C1C}">
+                <a14:useLocalDpi xmlns:a14="http://schemas.microsoft.com/office/drawing/2010/main" val="0"/>
+              </a:ext>
+            </a:extLst>
+          </a:blip>
+          <a:stretch>
+            <a:fillRect/>
+          </a:stretch>
+        </p:blipFill>
+        <p:spPr>
+          <a:xfrm>
+            <a:off x="2478284" y="2431467"/>
+            <a:ext cx="3111201" cy="1817779"/>
+          </a:xfrm>
+        </p:spPr>
+      </p:pic>
+      <p:pic>
+        <p:nvPicPr>
+          <p:cNvPr id="5" name="Image 4" descr="Une image contenant symbole, noir, noir et blanc, obscurité&#10;&#10;Le contenu généré par l’IA peut être incorrect.">
+            <a:extLst>
+              <a:ext uri="{FF2B5EF4-FFF2-40B4-BE49-F238E27FC236}">
+                <a16:creationId xmlns:a16="http://schemas.microsoft.com/office/drawing/2014/main" id="{86831B5A-2D32-4CE3-6730-73FBE78595D0}"/>
+              </a:ext>
+            </a:extLst>
+          </p:cNvPr>
+          <p:cNvPicPr>
+            <a:picLocks noChangeAspect="1"/>
+          </p:cNvPicPr>
+          <p:nvPr/>
+        </p:nvPicPr>
+        <p:blipFill>
+          <a:blip r:embed="rId3">
+            <a:extLst>
+              <a:ext uri="{28A0092B-C50C-407E-A947-70E740481C1C}">
+                <a14:useLocalDpi xmlns:a14="http://schemas.microsoft.com/office/drawing/2010/main" val="0"/>
+              </a:ext>
+            </a:extLst>
+          </a:blip>
+          <a:stretch>
+            <a:fillRect/>
+          </a:stretch>
+        </p:blipFill>
+        <p:spPr>
+          <a:xfrm>
+            <a:off x="6681718" y="2431465"/>
+            <a:ext cx="3111201" cy="1817780"/>
+          </a:xfrm>
+          <a:prstGeom prst="rect">
+            <a:avLst/>
+          </a:prstGeom>
+        </p:spPr>
+      </p:pic>
+      <p:cxnSp>
+        <p:nvCxnSpPr>
+          <p:cNvPr id="7" name="Connecteur droit avec flèche 6">
+            <a:extLst>
+              <a:ext uri="{FF2B5EF4-FFF2-40B4-BE49-F238E27FC236}">
+                <a16:creationId xmlns:a16="http://schemas.microsoft.com/office/drawing/2014/main" id="{06851FFA-02A0-3221-BB11-8C6D06CB9622}"/>
+              </a:ext>
+            </a:extLst>
+          </p:cNvPr>
+          <p:cNvCxnSpPr>
+            <a:cxnSpLocks/>
+            <a:stCxn id="2" idx="3"/>
+            <a:endCxn id="5" idx="1"/>
+          </p:cNvCxnSpPr>
+          <p:nvPr/>
+        </p:nvCxnSpPr>
+        <p:spPr>
+          <a:xfrm flipV="1">
+            <a:off x="5589485" y="3340355"/>
+            <a:ext cx="1092233" cy="2"/>
+          </a:xfrm>
+          <a:prstGeom prst="straightConnector1">
+            <a:avLst/>
+          </a:prstGeom>
+          <a:ln w="76200">
+            <a:solidFill>
+              <a:schemeClr val="bg2">
+                <a:lumMod val="50000"/>
+              </a:schemeClr>
+            </a:solidFill>
+            <a:tailEnd type="triangle"/>
+          </a:ln>
+        </p:spPr>
+        <p:style>
+          <a:lnRef idx="2">
+            <a:schemeClr val="accent1"/>
+          </a:lnRef>
+          <a:fillRef idx="0">
+            <a:schemeClr val="accent1"/>
+          </a:fillRef>
+          <a:effectRef idx="1">
+            <a:schemeClr val="accent1"/>
+          </a:effectRef>
+          <a:fontRef idx="minor">
+            <a:schemeClr val="tx1"/>
+          </a:fontRef>
+        </p:style>
+      </p:cxnSp>
+      <p:sp>
+        <p:nvSpPr>
+          <p:cNvPr id="21" name="Organigramme : Opération manuelle 20">
+            <a:extLst>
+              <a:ext uri="{FF2B5EF4-FFF2-40B4-BE49-F238E27FC236}">
+                <a16:creationId xmlns:a16="http://schemas.microsoft.com/office/drawing/2014/main" id="{83F40CDD-0AAF-D045-EA8E-7E2872883BC8}"/>
+              </a:ext>
+            </a:extLst>
+          </p:cNvPr>
+          <p:cNvSpPr/>
+          <p:nvPr/>
+        </p:nvSpPr>
+        <p:spPr>
+          <a:xfrm>
+            <a:off x="2478283" y="4515331"/>
+            <a:ext cx="3111201" cy="532449"/>
+          </a:xfrm>
+          <a:prstGeom prst="flowChartManualOperation">
+            <a:avLst/>
+          </a:prstGeom>
+        </p:spPr>
+        <p:style>
+          <a:lnRef idx="2">
+            <a:schemeClr val="accent1">
+              <a:shade val="15000"/>
+            </a:schemeClr>
+          </a:lnRef>
+          <a:fillRef idx="1">
+            <a:schemeClr val="accent1"/>
+          </a:fillRef>
+          <a:effectRef idx="0">
+            <a:schemeClr val="accent1"/>
+          </a:effectRef>
+          <a:fontRef idx="minor">
+            <a:schemeClr val="lt1"/>
+          </a:fontRef>
+        </p:style>
+        <p:txBody>
+          <a:bodyPr rtlCol="0" anchor="ctr"/>
+          <a:lstStyle/>
+          <a:p>
+            <a:pPr algn="ctr"/>
+            <a:r>
+              <a:rPr lang="fr-FR" dirty="0"/>
+              <a:t>Classifieur</a:t>
+            </a:r>
+          </a:p>
+        </p:txBody>
+      </p:sp>
+      <p:sp>
+        <p:nvSpPr>
+          <p:cNvPr id="22" name="Organigramme : Opération manuelle 21">
+            <a:extLst>
+              <a:ext uri="{FF2B5EF4-FFF2-40B4-BE49-F238E27FC236}">
+                <a16:creationId xmlns:a16="http://schemas.microsoft.com/office/drawing/2014/main" id="{6C881110-8E58-383B-4B71-4AF03E4350D3}"/>
+              </a:ext>
+            </a:extLst>
+          </p:cNvPr>
+          <p:cNvSpPr/>
+          <p:nvPr/>
+        </p:nvSpPr>
+        <p:spPr>
+          <a:xfrm>
+            <a:off x="6681718" y="4515331"/>
+            <a:ext cx="3111201" cy="532449"/>
+          </a:xfrm>
+          <a:prstGeom prst="flowChartManualOperation">
+            <a:avLst/>
+          </a:prstGeom>
+        </p:spPr>
+        <p:style>
+          <a:lnRef idx="2">
+            <a:schemeClr val="accent1">
+              <a:shade val="15000"/>
+            </a:schemeClr>
+          </a:lnRef>
+          <a:fillRef idx="1">
+            <a:schemeClr val="accent1"/>
+          </a:fillRef>
+          <a:effectRef idx="0">
+            <a:schemeClr val="accent1"/>
+          </a:effectRef>
+          <a:fontRef idx="minor">
+            <a:schemeClr val="lt1"/>
+          </a:fontRef>
+        </p:style>
+        <p:txBody>
+          <a:bodyPr rtlCol="0" anchor="ctr"/>
+          <a:lstStyle/>
+          <a:p>
+            <a:pPr algn="ctr"/>
+            <a:r>
+              <a:rPr lang="fr-FR" dirty="0"/>
+              <a:t>Classifieur</a:t>
+            </a:r>
+          </a:p>
+        </p:txBody>
+      </p:sp>
+      <p:sp>
+        <p:nvSpPr>
+          <p:cNvPr id="24" name="ZoneTexte 23">
+            <a:extLst>
+              <a:ext uri="{FF2B5EF4-FFF2-40B4-BE49-F238E27FC236}">
+                <a16:creationId xmlns:a16="http://schemas.microsoft.com/office/drawing/2014/main" id="{4172414B-9B6C-3D04-5934-8D6009D916FE}"/>
+              </a:ext>
+            </a:extLst>
+          </p:cNvPr>
+          <p:cNvSpPr txBox="1"/>
+          <p:nvPr/>
+        </p:nvSpPr>
+        <p:spPr>
+          <a:xfrm>
+            <a:off x="2651253" y="5141289"/>
+            <a:ext cx="2765259" cy="646331"/>
+          </a:xfrm>
+          <a:prstGeom prst="rect">
+            <a:avLst/>
+          </a:prstGeom>
+          <a:noFill/>
+        </p:spPr>
+        <p:txBody>
+          <a:bodyPr wrap="square" rtlCol="0">
+            <a:spAutoFit/>
+          </a:bodyPr>
+          <a:lstStyle/>
+          <a:p>
+            <a:pPr algn="ctr"/>
+            <a:r>
+              <a:rPr lang="fr-FR" sz="3600" dirty="0">
+                <a:solidFill>
+                  <a:srgbClr val="C00000"/>
+                </a:solidFill>
+              </a:rPr>
+              <a:t>0	0	0</a:t>
+            </a:r>
+            <a:endParaRPr lang="fr-FR" sz="3600" u="sng" dirty="0">
+              <a:solidFill>
+                <a:srgbClr val="C00000"/>
+              </a:solidFill>
+              <a:latin typeface="Arial" panose="020B0604020202020204" pitchFamily="34" charset="0"/>
+            </a:endParaRPr>
+          </a:p>
+        </p:txBody>
+      </p:sp>
+      <p:sp>
+        <p:nvSpPr>
+          <p:cNvPr id="26" name="ZoneTexte 25">
+            <a:extLst>
+              <a:ext uri="{FF2B5EF4-FFF2-40B4-BE49-F238E27FC236}">
+                <a16:creationId xmlns:a16="http://schemas.microsoft.com/office/drawing/2014/main" id="{A77F86A3-82D8-FD96-03E1-BB91B3011C35}"/>
+              </a:ext>
+            </a:extLst>
+          </p:cNvPr>
+          <p:cNvSpPr txBox="1"/>
+          <p:nvPr/>
+        </p:nvSpPr>
+        <p:spPr>
+          <a:xfrm>
+            <a:off x="6854688" y="5141289"/>
+            <a:ext cx="2765259" cy="646331"/>
+          </a:xfrm>
+          <a:prstGeom prst="rect">
+            <a:avLst/>
+          </a:prstGeom>
+          <a:noFill/>
+        </p:spPr>
+        <p:txBody>
+          <a:bodyPr wrap="square" rtlCol="0">
+            <a:spAutoFit/>
+          </a:bodyPr>
+          <a:lstStyle/>
+          <a:p>
+            <a:pPr algn="ctr"/>
+            <a:r>
+              <a:rPr lang="fr-FR" sz="3600" dirty="0">
+                <a:solidFill>
+                  <a:schemeClr val="accent6"/>
+                </a:solidFill>
+              </a:rPr>
+              <a:t>1</a:t>
+            </a:r>
+            <a:r>
+              <a:rPr lang="fr-FR" sz="3600" dirty="0"/>
+              <a:t>	</a:t>
+            </a:r>
+            <a:r>
+              <a:rPr lang="fr-FR" sz="3600" dirty="0">
+                <a:solidFill>
+                  <a:schemeClr val="accent6"/>
+                </a:solidFill>
+              </a:rPr>
+              <a:t>1</a:t>
+            </a:r>
+            <a:r>
+              <a:rPr lang="fr-FR" sz="3600" dirty="0"/>
+              <a:t>	</a:t>
+            </a:r>
+            <a:r>
+              <a:rPr lang="fr-FR" sz="3600" dirty="0">
+                <a:solidFill>
+                  <a:schemeClr val="accent6"/>
+                </a:solidFill>
+              </a:rPr>
+              <a:t>1</a:t>
+            </a:r>
+            <a:endParaRPr lang="fr-FR" sz="3600" u="sng" dirty="0">
+              <a:solidFill>
+                <a:schemeClr val="accent6"/>
+              </a:solidFill>
+              <a:latin typeface="Arial" panose="020B0604020202020204" pitchFamily="34" charset="0"/>
+            </a:endParaRPr>
+          </a:p>
+        </p:txBody>
+      </p:sp>
+    </p:spTree>
+    <p:extLst>
+      <p:ext uri="{BB962C8B-B14F-4D97-AF65-F5344CB8AC3E}">
+        <p14:creationId xmlns:p14="http://schemas.microsoft.com/office/powerpoint/2010/main" val="2465332553"/>
+      </p:ext>
+    </p:extLst>
+  </p:cSld>
+  <p:clrMapOvr>
+    <a:masterClrMapping/>
+  </p:clrMapOvr>
+</p:sld>
+</file>
+
+<file path=ppt/slides/slide22.xml><?xml version="1.0" encoding="utf-8"?>
+<p:sld xmlns:a="http://schemas.openxmlformats.org/drawingml/2006/main" xmlns:r="http://schemas.openxmlformats.org/officeDocument/2006/relationships" xmlns:p="http://schemas.openxmlformats.org/presentationml/2006/main">
+  <p:cSld>
+    <p:spTree>
+      <p:nvGrpSpPr>
+        <p:cNvPr id="1" name="">
+          <a:extLst>
+            <a:ext uri="{FF2B5EF4-FFF2-40B4-BE49-F238E27FC236}">
+              <a16:creationId xmlns:a16="http://schemas.microsoft.com/office/drawing/2014/main" id="{F313B3A1-5AC0-A98D-7F59-54D0D5D25FA8}"/>
+            </a:ext>
+          </a:extLst>
+        </p:cNvPr>
+        <p:cNvGrpSpPr/>
+        <p:nvPr/>
+      </p:nvGrpSpPr>
+      <p:grpSpPr>
+        <a:xfrm>
+          <a:off x="0" y="0"/>
+          <a:ext cx="0" cy="0"/>
+          <a:chOff x="0" y="0"/>
+          <a:chExt cx="0" cy="0"/>
+        </a:xfrm>
+      </p:grpSpPr>
+      <p:sp>
+        <p:nvSpPr>
+          <p:cNvPr id="4" name="Titre 3">
+            <a:extLst>
+              <a:ext uri="{FF2B5EF4-FFF2-40B4-BE49-F238E27FC236}">
+                <a16:creationId xmlns:a16="http://schemas.microsoft.com/office/drawing/2014/main" id="{65BF223B-7492-009A-8114-E3C9C45BB7D8}"/>
+              </a:ext>
+            </a:extLst>
+          </p:cNvPr>
+          <p:cNvSpPr>
+            <a:spLocks noGrp="1"/>
+          </p:cNvSpPr>
+          <p:nvPr>
+            <p:ph type="title"/>
+          </p:nvPr>
+        </p:nvSpPr>
+        <p:spPr/>
+        <p:txBody>
+          <a:bodyPr>
+            <a:normAutofit/>
+          </a:bodyPr>
+          <a:lstStyle/>
+          <a:p>
+            <a:r>
+              <a:rPr lang="fr-FR" dirty="0"/>
+              <a:t>Détection de l’obscuration</a:t>
+            </a:r>
+            <a:br>
+              <a:rPr lang="fr-FR" sz="2400" dirty="0"/>
+            </a:br>
+            <a:r>
+              <a:rPr lang="fr-FR" sz="2400" dirty="0">
+                <a:solidFill>
+                  <a:schemeClr val="tx1">
+                    <a:lumMod val="65000"/>
+                    <a:lumOff val="35000"/>
+                  </a:schemeClr>
+                </a:solidFill>
+              </a:rPr>
+              <a:t>Entraînement du classifieur</a:t>
+            </a:r>
+            <a:endParaRPr lang="fr-FR" sz="2400" dirty="0"/>
+          </a:p>
+        </p:txBody>
+      </p:sp>
+      <p:pic>
+        <p:nvPicPr>
+          <p:cNvPr id="2" name="Image 1">
+            <a:extLst>
+              <a:ext uri="{FF2B5EF4-FFF2-40B4-BE49-F238E27FC236}">
+                <a16:creationId xmlns:a16="http://schemas.microsoft.com/office/drawing/2014/main" id="{EC4D0502-B93B-E802-80B5-E820D2F6CEA5}"/>
+              </a:ext>
+            </a:extLst>
+          </p:cNvPr>
+          <p:cNvPicPr>
+            <a:picLocks noChangeAspect="1"/>
+          </p:cNvPicPr>
+          <p:nvPr/>
+        </p:nvPicPr>
+        <p:blipFill>
+          <a:blip r:embed="rId2"/>
+          <a:stretch>
+            <a:fillRect/>
+          </a:stretch>
+        </p:blipFill>
+        <p:spPr>
+          <a:xfrm>
+            <a:off x="1797091" y="3333026"/>
+            <a:ext cx="8597818" cy="844175"/>
+          </a:xfrm>
+          <a:prstGeom prst="rect">
+            <a:avLst/>
+          </a:prstGeom>
+        </p:spPr>
+      </p:pic>
+      <p:pic>
+        <p:nvPicPr>
+          <p:cNvPr id="3" name="Image 2">
+            <a:extLst>
+              <a:ext uri="{FF2B5EF4-FFF2-40B4-BE49-F238E27FC236}">
+                <a16:creationId xmlns:a16="http://schemas.microsoft.com/office/drawing/2014/main" id="{CB32FBEB-C5EC-C496-986A-8CE23F65DA6D}"/>
+              </a:ext>
+            </a:extLst>
+          </p:cNvPr>
+          <p:cNvPicPr>
+            <a:picLocks noChangeAspect="1"/>
+          </p:cNvPicPr>
+          <p:nvPr/>
+        </p:nvPicPr>
+        <p:blipFill>
+          <a:blip r:embed="rId2"/>
+          <a:srcRect r="90275"/>
+          <a:stretch/>
+        </p:blipFill>
+        <p:spPr>
+          <a:xfrm>
+            <a:off x="5677925" y="1937319"/>
+            <a:ext cx="836149" cy="844175"/>
+          </a:xfrm>
+          <a:prstGeom prst="rect">
+            <a:avLst/>
+          </a:prstGeom>
+        </p:spPr>
+      </p:pic>
+      <p:cxnSp>
+        <p:nvCxnSpPr>
+          <p:cNvPr id="6" name="Connecteur droit avec flèche 5">
+            <a:extLst>
+              <a:ext uri="{FF2B5EF4-FFF2-40B4-BE49-F238E27FC236}">
+                <a16:creationId xmlns:a16="http://schemas.microsoft.com/office/drawing/2014/main" id="{8F1E9048-AD73-CFE4-C876-D191FD1B4B54}"/>
+              </a:ext>
+            </a:extLst>
+          </p:cNvPr>
+          <p:cNvCxnSpPr>
+            <a:stCxn id="3" idx="2"/>
+          </p:cNvCxnSpPr>
+          <p:nvPr/>
+        </p:nvCxnSpPr>
+        <p:spPr>
+          <a:xfrm flipH="1">
+            <a:off x="2233914" y="2781494"/>
+            <a:ext cx="3862086" cy="551532"/>
+          </a:xfrm>
+          <a:prstGeom prst="straightConnector1">
+            <a:avLst/>
+          </a:prstGeom>
+          <a:ln>
+            <a:tailEnd type="triangle"/>
+          </a:ln>
+        </p:spPr>
+        <p:style>
+          <a:lnRef idx="2">
+            <a:schemeClr val="accent1"/>
+          </a:lnRef>
+          <a:fillRef idx="0">
+            <a:schemeClr val="accent1"/>
+          </a:fillRef>
+          <a:effectRef idx="1">
+            <a:schemeClr val="accent1"/>
+          </a:effectRef>
+          <a:fontRef idx="minor">
+            <a:schemeClr val="tx1"/>
+          </a:fontRef>
+        </p:style>
+      </p:cxnSp>
+      <p:cxnSp>
+        <p:nvCxnSpPr>
+          <p:cNvPr id="7" name="Connecteur droit avec flèche 6">
+            <a:extLst>
+              <a:ext uri="{FF2B5EF4-FFF2-40B4-BE49-F238E27FC236}">
+                <a16:creationId xmlns:a16="http://schemas.microsoft.com/office/drawing/2014/main" id="{EECF1EF0-DAFA-0C11-8FF0-8D29F1565BE2}"/>
+              </a:ext>
+            </a:extLst>
+          </p:cNvPr>
+          <p:cNvCxnSpPr>
+            <a:cxnSpLocks/>
+          </p:cNvCxnSpPr>
+          <p:nvPr/>
+        </p:nvCxnSpPr>
+        <p:spPr>
+          <a:xfrm flipH="1">
+            <a:off x="3136739" y="2781494"/>
+            <a:ext cx="2959261" cy="551532"/>
+          </a:xfrm>
+          <a:prstGeom prst="straightConnector1">
+            <a:avLst/>
+          </a:prstGeom>
+          <a:ln>
+            <a:tailEnd type="triangle"/>
+          </a:ln>
+        </p:spPr>
+        <p:style>
+          <a:lnRef idx="2">
+            <a:schemeClr val="accent1"/>
+          </a:lnRef>
+          <a:fillRef idx="0">
+            <a:schemeClr val="accent1"/>
+          </a:fillRef>
+          <a:effectRef idx="1">
+            <a:schemeClr val="accent1"/>
+          </a:effectRef>
+          <a:fontRef idx="minor">
+            <a:schemeClr val="tx1"/>
+          </a:fontRef>
+        </p:style>
+      </p:cxnSp>
+      <p:cxnSp>
+        <p:nvCxnSpPr>
+          <p:cNvPr id="9" name="Connecteur droit avec flèche 8">
+            <a:extLst>
+              <a:ext uri="{FF2B5EF4-FFF2-40B4-BE49-F238E27FC236}">
+                <a16:creationId xmlns:a16="http://schemas.microsoft.com/office/drawing/2014/main" id="{DF6FD502-E77F-4C38-E4B1-6AD0EC717642}"/>
+              </a:ext>
+            </a:extLst>
+          </p:cNvPr>
+          <p:cNvCxnSpPr>
+            <a:cxnSpLocks/>
+            <a:stCxn id="3" idx="2"/>
+          </p:cNvCxnSpPr>
+          <p:nvPr/>
+        </p:nvCxnSpPr>
+        <p:spPr>
+          <a:xfrm flipH="1">
+            <a:off x="3946967" y="2781494"/>
+            <a:ext cx="2149033" cy="551532"/>
+          </a:xfrm>
+          <a:prstGeom prst="straightConnector1">
+            <a:avLst/>
+          </a:prstGeom>
+          <a:ln>
+            <a:tailEnd type="triangle"/>
+          </a:ln>
+        </p:spPr>
+        <p:style>
+          <a:lnRef idx="2">
+            <a:schemeClr val="accent1"/>
+          </a:lnRef>
+          <a:fillRef idx="0">
+            <a:schemeClr val="accent1"/>
+          </a:fillRef>
+          <a:effectRef idx="1">
+            <a:schemeClr val="accent1"/>
+          </a:effectRef>
+          <a:fontRef idx="minor">
+            <a:schemeClr val="tx1"/>
+          </a:fontRef>
+        </p:style>
+      </p:cxnSp>
+      <p:cxnSp>
+        <p:nvCxnSpPr>
+          <p:cNvPr id="13" name="Connecteur droit avec flèche 12">
+            <a:extLst>
+              <a:ext uri="{FF2B5EF4-FFF2-40B4-BE49-F238E27FC236}">
+                <a16:creationId xmlns:a16="http://schemas.microsoft.com/office/drawing/2014/main" id="{C5A7FFBD-F338-DEC6-D5EF-9D028856BAC6}"/>
+              </a:ext>
+            </a:extLst>
+          </p:cNvPr>
+          <p:cNvCxnSpPr>
+            <a:cxnSpLocks/>
+            <a:stCxn id="3" idx="2"/>
+          </p:cNvCxnSpPr>
+          <p:nvPr/>
+        </p:nvCxnSpPr>
+        <p:spPr>
+          <a:xfrm flipH="1">
+            <a:off x="4803494" y="2781494"/>
+            <a:ext cx="1292506" cy="551532"/>
+          </a:xfrm>
+          <a:prstGeom prst="straightConnector1">
+            <a:avLst/>
+          </a:prstGeom>
+          <a:ln>
+            <a:tailEnd type="triangle"/>
+          </a:ln>
+        </p:spPr>
+        <p:style>
+          <a:lnRef idx="2">
+            <a:schemeClr val="accent1"/>
+          </a:lnRef>
+          <a:fillRef idx="0">
+            <a:schemeClr val="accent1"/>
+          </a:fillRef>
+          <a:effectRef idx="1">
+            <a:schemeClr val="accent1"/>
+          </a:effectRef>
+          <a:fontRef idx="minor">
+            <a:schemeClr val="tx1"/>
+          </a:fontRef>
+        </p:style>
+      </p:cxnSp>
+      <p:cxnSp>
+        <p:nvCxnSpPr>
+          <p:cNvPr id="16" name="Connecteur droit avec flèche 15">
+            <a:extLst>
+              <a:ext uri="{FF2B5EF4-FFF2-40B4-BE49-F238E27FC236}">
+                <a16:creationId xmlns:a16="http://schemas.microsoft.com/office/drawing/2014/main" id="{3763CEE7-E6E0-C70B-D706-E10EC15979C9}"/>
+              </a:ext>
+            </a:extLst>
+          </p:cNvPr>
+          <p:cNvCxnSpPr>
+            <a:cxnSpLocks/>
+            <a:stCxn id="3" idx="2"/>
+          </p:cNvCxnSpPr>
+          <p:nvPr/>
+        </p:nvCxnSpPr>
+        <p:spPr>
+          <a:xfrm flipH="1">
+            <a:off x="5677925" y="2781494"/>
+            <a:ext cx="418075" cy="551532"/>
+          </a:xfrm>
+          <a:prstGeom prst="straightConnector1">
+            <a:avLst/>
+          </a:prstGeom>
+          <a:ln>
+            <a:tailEnd type="triangle"/>
+          </a:ln>
+        </p:spPr>
+        <p:style>
+          <a:lnRef idx="2">
+            <a:schemeClr val="accent1"/>
+          </a:lnRef>
+          <a:fillRef idx="0">
+            <a:schemeClr val="accent1"/>
+          </a:fillRef>
+          <a:effectRef idx="1">
+            <a:schemeClr val="accent1"/>
+          </a:effectRef>
+          <a:fontRef idx="minor">
+            <a:schemeClr val="tx1"/>
+          </a:fontRef>
+        </p:style>
+      </p:cxnSp>
+      <p:cxnSp>
+        <p:nvCxnSpPr>
+          <p:cNvPr id="19" name="Connecteur droit avec flèche 18">
+            <a:extLst>
+              <a:ext uri="{FF2B5EF4-FFF2-40B4-BE49-F238E27FC236}">
+                <a16:creationId xmlns:a16="http://schemas.microsoft.com/office/drawing/2014/main" id="{34970016-7684-338D-70A9-598653366895}"/>
+              </a:ext>
+            </a:extLst>
+          </p:cNvPr>
+          <p:cNvCxnSpPr>
+            <a:cxnSpLocks/>
+            <a:stCxn id="3" idx="2"/>
+          </p:cNvCxnSpPr>
+          <p:nvPr/>
+        </p:nvCxnSpPr>
+        <p:spPr>
+          <a:xfrm>
+            <a:off x="6096000" y="2781494"/>
+            <a:ext cx="436823" cy="551532"/>
+          </a:xfrm>
+          <a:prstGeom prst="straightConnector1">
+            <a:avLst/>
+          </a:prstGeom>
+          <a:ln>
+            <a:tailEnd type="triangle"/>
+          </a:ln>
+        </p:spPr>
+        <p:style>
+          <a:lnRef idx="2">
+            <a:schemeClr val="accent1"/>
+          </a:lnRef>
+          <a:fillRef idx="0">
+            <a:schemeClr val="accent1"/>
+          </a:fillRef>
+          <a:effectRef idx="1">
+            <a:schemeClr val="accent1"/>
+          </a:effectRef>
+          <a:fontRef idx="minor">
+            <a:schemeClr val="tx1"/>
+          </a:fontRef>
+        </p:style>
+      </p:cxnSp>
+      <p:cxnSp>
+        <p:nvCxnSpPr>
+          <p:cNvPr id="22" name="Connecteur droit avec flèche 21">
+            <a:extLst>
+              <a:ext uri="{FF2B5EF4-FFF2-40B4-BE49-F238E27FC236}">
+                <a16:creationId xmlns:a16="http://schemas.microsoft.com/office/drawing/2014/main" id="{C2E5DCBD-A798-37ED-9BD2-502BD26E4815}"/>
+              </a:ext>
+            </a:extLst>
+          </p:cNvPr>
+          <p:cNvCxnSpPr>
+            <a:cxnSpLocks/>
+          </p:cNvCxnSpPr>
+          <p:nvPr/>
+        </p:nvCxnSpPr>
+        <p:spPr>
+          <a:xfrm>
+            <a:off x="6096000" y="2781494"/>
+            <a:ext cx="1292505" cy="551532"/>
+          </a:xfrm>
+          <a:prstGeom prst="straightConnector1">
+            <a:avLst/>
+          </a:prstGeom>
+          <a:ln>
+            <a:tailEnd type="triangle"/>
+          </a:ln>
+        </p:spPr>
+        <p:style>
+          <a:lnRef idx="2">
+            <a:schemeClr val="accent1"/>
+          </a:lnRef>
+          <a:fillRef idx="0">
+            <a:schemeClr val="accent1"/>
+          </a:fillRef>
+          <a:effectRef idx="1">
+            <a:schemeClr val="accent1"/>
+          </a:effectRef>
+          <a:fontRef idx="minor">
+            <a:schemeClr val="tx1"/>
+          </a:fontRef>
+        </p:style>
+      </p:cxnSp>
+      <p:cxnSp>
+        <p:nvCxnSpPr>
+          <p:cNvPr id="24" name="Connecteur droit avec flèche 23">
+            <a:extLst>
+              <a:ext uri="{FF2B5EF4-FFF2-40B4-BE49-F238E27FC236}">
+                <a16:creationId xmlns:a16="http://schemas.microsoft.com/office/drawing/2014/main" id="{C5DC30C4-0F21-BE67-2596-A4FBBC37D93F}"/>
+              </a:ext>
+            </a:extLst>
+          </p:cNvPr>
+          <p:cNvCxnSpPr>
+            <a:cxnSpLocks/>
+          </p:cNvCxnSpPr>
+          <p:nvPr/>
+        </p:nvCxnSpPr>
+        <p:spPr>
+          <a:xfrm>
+            <a:off x="6073001" y="2781494"/>
+            <a:ext cx="2172031" cy="551532"/>
+          </a:xfrm>
+          <a:prstGeom prst="straightConnector1">
+            <a:avLst/>
+          </a:prstGeom>
+          <a:ln>
+            <a:tailEnd type="triangle"/>
+          </a:ln>
+        </p:spPr>
+        <p:style>
+          <a:lnRef idx="2">
+            <a:schemeClr val="accent1"/>
+          </a:lnRef>
+          <a:fillRef idx="0">
+            <a:schemeClr val="accent1"/>
+          </a:fillRef>
+          <a:effectRef idx="1">
+            <a:schemeClr val="accent1"/>
+          </a:effectRef>
+          <a:fontRef idx="minor">
+            <a:schemeClr val="tx1"/>
+          </a:fontRef>
+        </p:style>
+      </p:cxnSp>
+      <p:cxnSp>
+        <p:nvCxnSpPr>
+          <p:cNvPr id="26" name="Connecteur droit avec flèche 25">
+            <a:extLst>
+              <a:ext uri="{FF2B5EF4-FFF2-40B4-BE49-F238E27FC236}">
+                <a16:creationId xmlns:a16="http://schemas.microsoft.com/office/drawing/2014/main" id="{3B871B76-4556-8EC5-1964-5F2F9E5EEF66}"/>
+              </a:ext>
+            </a:extLst>
+          </p:cNvPr>
+          <p:cNvCxnSpPr>
+            <a:cxnSpLocks/>
+          </p:cNvCxnSpPr>
+          <p:nvPr/>
+        </p:nvCxnSpPr>
+        <p:spPr>
+          <a:xfrm>
+            <a:off x="6061924" y="2781494"/>
+            <a:ext cx="2993336" cy="551532"/>
+          </a:xfrm>
+          <a:prstGeom prst="straightConnector1">
+            <a:avLst/>
+          </a:prstGeom>
+          <a:ln>
+            <a:tailEnd type="triangle"/>
+          </a:ln>
+        </p:spPr>
+        <p:style>
+          <a:lnRef idx="2">
+            <a:schemeClr val="accent1"/>
+          </a:lnRef>
+          <a:fillRef idx="0">
+            <a:schemeClr val="accent1"/>
+          </a:fillRef>
+          <a:effectRef idx="1">
+            <a:schemeClr val="accent1"/>
+          </a:effectRef>
+          <a:fontRef idx="minor">
+            <a:schemeClr val="tx1"/>
+          </a:fontRef>
+        </p:style>
+      </p:cxnSp>
+      <p:cxnSp>
+        <p:nvCxnSpPr>
+          <p:cNvPr id="28" name="Connecteur droit avec flèche 27">
+            <a:extLst>
+              <a:ext uri="{FF2B5EF4-FFF2-40B4-BE49-F238E27FC236}">
+                <a16:creationId xmlns:a16="http://schemas.microsoft.com/office/drawing/2014/main" id="{1AE6A480-75A6-EBFB-A569-BC8F75698A94}"/>
+              </a:ext>
+            </a:extLst>
+          </p:cNvPr>
+          <p:cNvCxnSpPr>
+            <a:cxnSpLocks/>
+          </p:cNvCxnSpPr>
+          <p:nvPr/>
+        </p:nvCxnSpPr>
+        <p:spPr>
+          <a:xfrm>
+            <a:off x="6073001" y="2781494"/>
+            <a:ext cx="3885084" cy="551532"/>
+          </a:xfrm>
+          <a:prstGeom prst="straightConnector1">
+            <a:avLst/>
+          </a:prstGeom>
+          <a:ln>
+            <a:tailEnd type="triangle"/>
+          </a:ln>
+        </p:spPr>
+        <p:style>
+          <a:lnRef idx="2">
+            <a:schemeClr val="accent1"/>
+          </a:lnRef>
+          <a:fillRef idx="0">
+            <a:schemeClr val="accent1"/>
+          </a:fillRef>
+          <a:effectRef idx="1">
+            <a:schemeClr val="accent1"/>
+          </a:effectRef>
+          <a:fontRef idx="minor">
+            <a:schemeClr val="tx1"/>
+          </a:fontRef>
+        </p:style>
+      </p:cxnSp>
+      <p:sp>
+        <p:nvSpPr>
+          <p:cNvPr id="30" name="ZoneTexte 29">
+            <a:extLst>
+              <a:ext uri="{FF2B5EF4-FFF2-40B4-BE49-F238E27FC236}">
+                <a16:creationId xmlns:a16="http://schemas.microsoft.com/office/drawing/2014/main" id="{C46DF36C-2E2B-F1ED-CC14-3AC08FB98242}"/>
+              </a:ext>
+            </a:extLst>
+          </p:cNvPr>
+          <p:cNvSpPr txBox="1"/>
+          <p:nvPr/>
+        </p:nvSpPr>
+        <p:spPr>
+          <a:xfrm>
+            <a:off x="1655180" y="4127472"/>
+            <a:ext cx="1157468" cy="369332"/>
+          </a:xfrm>
+          <a:prstGeom prst="rect">
+            <a:avLst/>
+          </a:prstGeom>
+          <a:noFill/>
+        </p:spPr>
+        <p:txBody>
+          <a:bodyPr wrap="square" rtlCol="0">
+            <a:spAutoFit/>
+          </a:bodyPr>
+          <a:lstStyle/>
+          <a:p>
+            <a:pPr algn="ctr"/>
+            <a:r>
+              <a:rPr lang="fr-FR" dirty="0"/>
+              <a:t>10%</a:t>
+            </a:r>
+          </a:p>
+        </p:txBody>
+      </p:sp>
+      <p:sp>
+        <p:nvSpPr>
+          <p:cNvPr id="31" name="ZoneTexte 30">
+            <a:extLst>
+              <a:ext uri="{FF2B5EF4-FFF2-40B4-BE49-F238E27FC236}">
+                <a16:creationId xmlns:a16="http://schemas.microsoft.com/office/drawing/2014/main" id="{F3304240-F461-66F9-BD20-37A7C517DF0F}"/>
+              </a:ext>
+            </a:extLst>
+          </p:cNvPr>
+          <p:cNvSpPr txBox="1"/>
+          <p:nvPr/>
+        </p:nvSpPr>
+        <p:spPr>
+          <a:xfrm>
+            <a:off x="2472160" y="4127472"/>
+            <a:ext cx="1157468" cy="369332"/>
+          </a:xfrm>
+          <a:prstGeom prst="rect">
+            <a:avLst/>
+          </a:prstGeom>
+          <a:noFill/>
+        </p:spPr>
+        <p:txBody>
+          <a:bodyPr wrap="square" rtlCol="0">
+            <a:spAutoFit/>
+          </a:bodyPr>
+          <a:lstStyle/>
+          <a:p>
+            <a:pPr algn="ctr"/>
+            <a:r>
+              <a:rPr lang="fr-FR" dirty="0"/>
+              <a:t>10%</a:t>
+            </a:r>
+          </a:p>
+        </p:txBody>
+      </p:sp>
+      <p:sp>
+        <p:nvSpPr>
+          <p:cNvPr id="32" name="ZoneTexte 31">
+            <a:extLst>
+              <a:ext uri="{FF2B5EF4-FFF2-40B4-BE49-F238E27FC236}">
+                <a16:creationId xmlns:a16="http://schemas.microsoft.com/office/drawing/2014/main" id="{8B3E9F20-9C12-28DF-4720-07973E59477F}"/>
+              </a:ext>
+            </a:extLst>
+          </p:cNvPr>
+          <p:cNvSpPr txBox="1"/>
+          <p:nvPr/>
+        </p:nvSpPr>
+        <p:spPr>
+          <a:xfrm>
+            <a:off x="3368233" y="4117765"/>
+            <a:ext cx="1157468" cy="369332"/>
+          </a:xfrm>
+          <a:prstGeom prst="rect">
+            <a:avLst/>
+          </a:prstGeom>
+          <a:noFill/>
+        </p:spPr>
+        <p:txBody>
+          <a:bodyPr wrap="square" rtlCol="0">
+            <a:spAutoFit/>
+          </a:bodyPr>
+          <a:lstStyle/>
+          <a:p>
+            <a:pPr algn="ctr"/>
+            <a:r>
+              <a:rPr lang="fr-FR" dirty="0"/>
+              <a:t>10%</a:t>
+            </a:r>
+          </a:p>
+        </p:txBody>
+      </p:sp>
+      <p:sp>
+        <p:nvSpPr>
+          <p:cNvPr id="33" name="ZoneTexte 32">
+            <a:extLst>
+              <a:ext uri="{FF2B5EF4-FFF2-40B4-BE49-F238E27FC236}">
+                <a16:creationId xmlns:a16="http://schemas.microsoft.com/office/drawing/2014/main" id="{65FD3604-6234-ECC9-75FF-14067B5DAB75}"/>
+              </a:ext>
+            </a:extLst>
+          </p:cNvPr>
+          <p:cNvSpPr txBox="1"/>
+          <p:nvPr/>
+        </p:nvSpPr>
+        <p:spPr>
+          <a:xfrm>
+            <a:off x="4233319" y="4127472"/>
+            <a:ext cx="1157468" cy="369332"/>
+          </a:xfrm>
+          <a:prstGeom prst="rect">
+            <a:avLst/>
+          </a:prstGeom>
+          <a:noFill/>
+        </p:spPr>
+        <p:txBody>
+          <a:bodyPr wrap="square" rtlCol="0">
+            <a:spAutoFit/>
+          </a:bodyPr>
+          <a:lstStyle/>
+          <a:p>
+            <a:pPr algn="ctr"/>
+            <a:r>
+              <a:rPr lang="fr-FR" dirty="0"/>
+              <a:t>10%</a:t>
+            </a:r>
+          </a:p>
+        </p:txBody>
+      </p:sp>
+      <p:sp>
+        <p:nvSpPr>
+          <p:cNvPr id="34" name="ZoneTexte 33">
+            <a:extLst>
+              <a:ext uri="{FF2B5EF4-FFF2-40B4-BE49-F238E27FC236}">
+                <a16:creationId xmlns:a16="http://schemas.microsoft.com/office/drawing/2014/main" id="{22DF8842-4F91-B01E-FA8A-C00561C191FA}"/>
+              </a:ext>
+            </a:extLst>
+          </p:cNvPr>
+          <p:cNvSpPr txBox="1"/>
+          <p:nvPr/>
+        </p:nvSpPr>
+        <p:spPr>
+          <a:xfrm>
+            <a:off x="5150613" y="4117765"/>
+            <a:ext cx="1157468" cy="369332"/>
+          </a:xfrm>
+          <a:prstGeom prst="rect">
+            <a:avLst/>
+          </a:prstGeom>
+          <a:noFill/>
+        </p:spPr>
+        <p:txBody>
+          <a:bodyPr wrap="square" rtlCol="0">
+            <a:spAutoFit/>
+          </a:bodyPr>
+          <a:lstStyle/>
+          <a:p>
+            <a:pPr algn="ctr"/>
+            <a:r>
+              <a:rPr lang="fr-FR" dirty="0"/>
+              <a:t>10%</a:t>
+            </a:r>
+          </a:p>
+        </p:txBody>
+      </p:sp>
+      <p:sp>
+        <p:nvSpPr>
+          <p:cNvPr id="35" name="ZoneTexte 34">
+            <a:extLst>
+              <a:ext uri="{FF2B5EF4-FFF2-40B4-BE49-F238E27FC236}">
+                <a16:creationId xmlns:a16="http://schemas.microsoft.com/office/drawing/2014/main" id="{B06B852E-F163-CC2D-499E-93C5ACAA8D4B}"/>
+              </a:ext>
+            </a:extLst>
+          </p:cNvPr>
+          <p:cNvSpPr txBox="1"/>
+          <p:nvPr/>
+        </p:nvSpPr>
+        <p:spPr>
+          <a:xfrm>
+            <a:off x="5990259" y="4131207"/>
+            <a:ext cx="1157468" cy="369332"/>
+          </a:xfrm>
+          <a:prstGeom prst="rect">
+            <a:avLst/>
+          </a:prstGeom>
+          <a:noFill/>
+        </p:spPr>
+        <p:txBody>
+          <a:bodyPr wrap="square" rtlCol="0">
+            <a:spAutoFit/>
+          </a:bodyPr>
+          <a:lstStyle/>
+          <a:p>
+            <a:pPr algn="ctr"/>
+            <a:r>
+              <a:rPr lang="fr-FR" dirty="0"/>
+              <a:t>10%</a:t>
+            </a:r>
+          </a:p>
+        </p:txBody>
+      </p:sp>
+      <p:sp>
+        <p:nvSpPr>
+          <p:cNvPr id="36" name="ZoneTexte 35">
+            <a:extLst>
+              <a:ext uri="{FF2B5EF4-FFF2-40B4-BE49-F238E27FC236}">
+                <a16:creationId xmlns:a16="http://schemas.microsoft.com/office/drawing/2014/main" id="{66B019A2-D40D-0C32-7967-7D6213F23A8F}"/>
+              </a:ext>
+            </a:extLst>
+          </p:cNvPr>
+          <p:cNvSpPr txBox="1"/>
+          <p:nvPr/>
+        </p:nvSpPr>
+        <p:spPr>
+          <a:xfrm>
+            <a:off x="6858075" y="4123368"/>
+            <a:ext cx="1157468" cy="369332"/>
+          </a:xfrm>
+          <a:prstGeom prst="rect">
+            <a:avLst/>
+          </a:prstGeom>
+          <a:noFill/>
+        </p:spPr>
+        <p:txBody>
+          <a:bodyPr wrap="square" rtlCol="0">
+            <a:spAutoFit/>
+          </a:bodyPr>
+          <a:lstStyle/>
+          <a:p>
+            <a:pPr algn="ctr"/>
+            <a:r>
+              <a:rPr lang="fr-FR" dirty="0"/>
+              <a:t>10%</a:t>
+            </a:r>
+          </a:p>
+        </p:txBody>
+      </p:sp>
+      <p:sp>
+        <p:nvSpPr>
+          <p:cNvPr id="37" name="ZoneTexte 36">
+            <a:extLst>
+              <a:ext uri="{FF2B5EF4-FFF2-40B4-BE49-F238E27FC236}">
+                <a16:creationId xmlns:a16="http://schemas.microsoft.com/office/drawing/2014/main" id="{C54612F7-AB0E-B9A5-775D-A3E5DE851CA1}"/>
+              </a:ext>
+            </a:extLst>
+          </p:cNvPr>
+          <p:cNvSpPr txBox="1"/>
+          <p:nvPr/>
+        </p:nvSpPr>
+        <p:spPr>
+          <a:xfrm>
+            <a:off x="7697721" y="4131208"/>
+            <a:ext cx="1157468" cy="369332"/>
+          </a:xfrm>
+          <a:prstGeom prst="rect">
+            <a:avLst/>
+          </a:prstGeom>
+          <a:noFill/>
+        </p:spPr>
+        <p:txBody>
+          <a:bodyPr wrap="square" rtlCol="0">
+            <a:spAutoFit/>
+          </a:bodyPr>
+          <a:lstStyle/>
+          <a:p>
+            <a:pPr algn="ctr"/>
+            <a:r>
+              <a:rPr lang="fr-FR" dirty="0"/>
+              <a:t>10%</a:t>
+            </a:r>
+          </a:p>
+        </p:txBody>
+      </p:sp>
+      <p:sp>
+        <p:nvSpPr>
+          <p:cNvPr id="38" name="ZoneTexte 37">
+            <a:extLst>
+              <a:ext uri="{FF2B5EF4-FFF2-40B4-BE49-F238E27FC236}">
+                <a16:creationId xmlns:a16="http://schemas.microsoft.com/office/drawing/2014/main" id="{6A4DC60D-D857-A216-8820-43FB0C83C05A}"/>
+              </a:ext>
+            </a:extLst>
+          </p:cNvPr>
+          <p:cNvSpPr txBox="1"/>
+          <p:nvPr/>
+        </p:nvSpPr>
+        <p:spPr>
+          <a:xfrm>
+            <a:off x="8562372" y="4121500"/>
+            <a:ext cx="1157468" cy="369332"/>
+          </a:xfrm>
+          <a:prstGeom prst="rect">
+            <a:avLst/>
+          </a:prstGeom>
+          <a:noFill/>
+        </p:spPr>
+        <p:txBody>
+          <a:bodyPr wrap="square" rtlCol="0">
+            <a:spAutoFit/>
+          </a:bodyPr>
+          <a:lstStyle/>
+          <a:p>
+            <a:pPr algn="ctr"/>
+            <a:r>
+              <a:rPr lang="fr-FR" dirty="0"/>
+              <a:t>10%</a:t>
+            </a:r>
+          </a:p>
+        </p:txBody>
+      </p:sp>
+      <p:sp>
+        <p:nvSpPr>
+          <p:cNvPr id="39" name="ZoneTexte 38">
+            <a:extLst>
+              <a:ext uri="{FF2B5EF4-FFF2-40B4-BE49-F238E27FC236}">
+                <a16:creationId xmlns:a16="http://schemas.microsoft.com/office/drawing/2014/main" id="{37ACCCBF-0510-BF5D-C437-808591F92CAA}"/>
+              </a:ext>
+            </a:extLst>
+          </p:cNvPr>
+          <p:cNvSpPr txBox="1"/>
+          <p:nvPr/>
+        </p:nvSpPr>
+        <p:spPr>
+          <a:xfrm>
+            <a:off x="9409326" y="4108058"/>
+            <a:ext cx="1157468" cy="369332"/>
+          </a:xfrm>
+          <a:prstGeom prst="rect">
+            <a:avLst/>
+          </a:prstGeom>
+          <a:noFill/>
+        </p:spPr>
+        <p:txBody>
+          <a:bodyPr wrap="square" rtlCol="0">
+            <a:spAutoFit/>
+          </a:bodyPr>
+          <a:lstStyle/>
+          <a:p>
+            <a:pPr algn="ctr"/>
+            <a:r>
+              <a:rPr lang="fr-FR" dirty="0"/>
+              <a:t>10%</a:t>
+            </a:r>
+          </a:p>
+        </p:txBody>
+      </p:sp>
+      <p:sp>
+        <p:nvSpPr>
+          <p:cNvPr id="42" name="ZoneTexte 41">
+            <a:extLst>
+              <a:ext uri="{FF2B5EF4-FFF2-40B4-BE49-F238E27FC236}">
+                <a16:creationId xmlns:a16="http://schemas.microsoft.com/office/drawing/2014/main" id="{8BC43859-9332-C48C-7976-187478E08DC8}"/>
+              </a:ext>
+            </a:extLst>
+          </p:cNvPr>
+          <p:cNvSpPr txBox="1"/>
+          <p:nvPr/>
+        </p:nvSpPr>
+        <p:spPr>
+          <a:xfrm>
+            <a:off x="1866417" y="5994465"/>
+            <a:ext cx="734993" cy="369332"/>
+          </a:xfrm>
+          <a:prstGeom prst="rect">
+            <a:avLst/>
+          </a:prstGeom>
+          <a:noFill/>
+        </p:spPr>
+        <p:txBody>
+          <a:bodyPr wrap="square" rtlCol="0">
+            <a:spAutoFit/>
+          </a:bodyPr>
+          <a:lstStyle/>
+          <a:p>
+            <a:pPr algn="ctr"/>
+            <a:r>
+              <a:rPr lang="fr-FR" dirty="0">
+                <a:solidFill>
+                  <a:srgbClr val="FF0000"/>
+                </a:solidFill>
+              </a:rPr>
+              <a:t>0</a:t>
+            </a:r>
+          </a:p>
+        </p:txBody>
+      </p:sp>
+      <p:sp>
+        <p:nvSpPr>
+          <p:cNvPr id="43" name="ZoneTexte 42">
+            <a:extLst>
+              <a:ext uri="{FF2B5EF4-FFF2-40B4-BE49-F238E27FC236}">
+                <a16:creationId xmlns:a16="http://schemas.microsoft.com/office/drawing/2014/main" id="{844B0B78-3B8E-075E-03EA-C1C370501C45}"/>
+              </a:ext>
+            </a:extLst>
+          </p:cNvPr>
+          <p:cNvSpPr txBox="1"/>
+          <p:nvPr/>
+        </p:nvSpPr>
+        <p:spPr>
+          <a:xfrm>
+            <a:off x="2683397" y="5994465"/>
+            <a:ext cx="734993" cy="369332"/>
+          </a:xfrm>
+          <a:prstGeom prst="rect">
+            <a:avLst/>
+          </a:prstGeom>
+          <a:noFill/>
+        </p:spPr>
+        <p:txBody>
+          <a:bodyPr wrap="square" rtlCol="0">
+            <a:spAutoFit/>
+          </a:bodyPr>
+          <a:lstStyle/>
+          <a:p>
+            <a:pPr algn="ctr"/>
+            <a:r>
+              <a:rPr lang="fr-FR" dirty="0">
+                <a:solidFill>
+                  <a:schemeClr val="accent6"/>
+                </a:solidFill>
+              </a:rPr>
+              <a:t>1</a:t>
+            </a:r>
+          </a:p>
+        </p:txBody>
+      </p:sp>
+      <p:sp>
+        <p:nvSpPr>
+          <p:cNvPr id="44" name="ZoneTexte 43">
+            <a:extLst>
+              <a:ext uri="{FF2B5EF4-FFF2-40B4-BE49-F238E27FC236}">
+                <a16:creationId xmlns:a16="http://schemas.microsoft.com/office/drawing/2014/main" id="{42184CE9-7016-C0A1-B05D-178633F04011}"/>
+              </a:ext>
+            </a:extLst>
+          </p:cNvPr>
+          <p:cNvSpPr txBox="1"/>
+          <p:nvPr/>
+        </p:nvSpPr>
+        <p:spPr>
+          <a:xfrm>
+            <a:off x="3579470" y="5994465"/>
+            <a:ext cx="734993" cy="369332"/>
+          </a:xfrm>
+          <a:prstGeom prst="rect">
+            <a:avLst/>
+          </a:prstGeom>
+          <a:noFill/>
+        </p:spPr>
+        <p:txBody>
+          <a:bodyPr wrap="square" rtlCol="0">
+            <a:spAutoFit/>
+          </a:bodyPr>
+          <a:lstStyle/>
+          <a:p>
+            <a:pPr algn="ctr"/>
+            <a:r>
+              <a:rPr lang="fr-FR" dirty="0">
+                <a:solidFill>
+                  <a:schemeClr val="accent6"/>
+                </a:solidFill>
+              </a:rPr>
+              <a:t>1</a:t>
+            </a:r>
+          </a:p>
+        </p:txBody>
+      </p:sp>
+      <p:sp>
+        <p:nvSpPr>
+          <p:cNvPr id="45" name="ZoneTexte 44">
+            <a:extLst>
+              <a:ext uri="{FF2B5EF4-FFF2-40B4-BE49-F238E27FC236}">
+                <a16:creationId xmlns:a16="http://schemas.microsoft.com/office/drawing/2014/main" id="{76BBFE76-6F0E-C0CB-CA1A-8E9C666D7ABF}"/>
+              </a:ext>
+            </a:extLst>
+          </p:cNvPr>
+          <p:cNvSpPr txBox="1"/>
+          <p:nvPr/>
+        </p:nvSpPr>
+        <p:spPr>
+          <a:xfrm>
+            <a:off x="4435997" y="5994465"/>
+            <a:ext cx="734993" cy="369332"/>
+          </a:xfrm>
+          <a:prstGeom prst="rect">
+            <a:avLst/>
+          </a:prstGeom>
+          <a:noFill/>
+        </p:spPr>
+        <p:txBody>
+          <a:bodyPr wrap="square" rtlCol="0">
+            <a:spAutoFit/>
+          </a:bodyPr>
+          <a:lstStyle/>
+          <a:p>
+            <a:pPr algn="ctr"/>
+            <a:r>
+              <a:rPr lang="fr-FR" dirty="0">
+                <a:solidFill>
+                  <a:schemeClr val="accent6"/>
+                </a:solidFill>
+              </a:rPr>
+              <a:t>1</a:t>
+            </a:r>
+          </a:p>
+        </p:txBody>
+      </p:sp>
+      <p:sp>
+        <p:nvSpPr>
+          <p:cNvPr id="46" name="ZoneTexte 45">
+            <a:extLst>
+              <a:ext uri="{FF2B5EF4-FFF2-40B4-BE49-F238E27FC236}">
+                <a16:creationId xmlns:a16="http://schemas.microsoft.com/office/drawing/2014/main" id="{FF15760C-96E7-FF9E-30E0-492762209212}"/>
+              </a:ext>
+            </a:extLst>
+          </p:cNvPr>
+          <p:cNvSpPr txBox="1"/>
+          <p:nvPr/>
+        </p:nvSpPr>
+        <p:spPr>
+          <a:xfrm>
+            <a:off x="5338008" y="5994465"/>
+            <a:ext cx="734993" cy="369332"/>
+          </a:xfrm>
+          <a:prstGeom prst="rect">
+            <a:avLst/>
+          </a:prstGeom>
+          <a:noFill/>
+        </p:spPr>
+        <p:txBody>
+          <a:bodyPr wrap="square" rtlCol="0">
+            <a:spAutoFit/>
+          </a:bodyPr>
+          <a:lstStyle/>
+          <a:p>
+            <a:pPr algn="ctr"/>
+            <a:r>
+              <a:rPr lang="fr-FR" dirty="0">
+                <a:solidFill>
+                  <a:schemeClr val="accent6"/>
+                </a:solidFill>
+              </a:rPr>
+              <a:t>1</a:t>
+            </a:r>
+          </a:p>
+        </p:txBody>
+      </p:sp>
+      <p:sp>
+        <p:nvSpPr>
+          <p:cNvPr id="47" name="ZoneTexte 46">
+            <a:extLst>
+              <a:ext uri="{FF2B5EF4-FFF2-40B4-BE49-F238E27FC236}">
+                <a16:creationId xmlns:a16="http://schemas.microsoft.com/office/drawing/2014/main" id="{B1EA235E-44CA-FF64-AEBD-6CA804E7AB3A}"/>
+              </a:ext>
+            </a:extLst>
+          </p:cNvPr>
+          <p:cNvSpPr txBox="1"/>
+          <p:nvPr/>
+        </p:nvSpPr>
+        <p:spPr>
+          <a:xfrm>
+            <a:off x="6165326" y="5994465"/>
+            <a:ext cx="734993" cy="369332"/>
+          </a:xfrm>
+          <a:prstGeom prst="rect">
+            <a:avLst/>
+          </a:prstGeom>
+          <a:noFill/>
+        </p:spPr>
+        <p:txBody>
+          <a:bodyPr wrap="square" rtlCol="0">
+            <a:spAutoFit/>
+          </a:bodyPr>
+          <a:lstStyle/>
+          <a:p>
+            <a:pPr algn="ctr"/>
+            <a:r>
+              <a:rPr lang="fr-FR" dirty="0">
+                <a:solidFill>
+                  <a:schemeClr val="accent6"/>
+                </a:solidFill>
+              </a:rPr>
+              <a:t>1</a:t>
+            </a:r>
+          </a:p>
+        </p:txBody>
+      </p:sp>
+      <p:sp>
+        <p:nvSpPr>
+          <p:cNvPr id="48" name="ZoneTexte 47">
+            <a:extLst>
+              <a:ext uri="{FF2B5EF4-FFF2-40B4-BE49-F238E27FC236}">
+                <a16:creationId xmlns:a16="http://schemas.microsoft.com/office/drawing/2014/main" id="{CFD3F53B-EBDD-5C93-C50E-A1628160A286}"/>
+              </a:ext>
+            </a:extLst>
+          </p:cNvPr>
+          <p:cNvSpPr txBox="1"/>
+          <p:nvPr/>
+        </p:nvSpPr>
+        <p:spPr>
+          <a:xfrm>
+            <a:off x="7021008" y="5994465"/>
+            <a:ext cx="734993" cy="369332"/>
+          </a:xfrm>
+          <a:prstGeom prst="rect">
+            <a:avLst/>
+          </a:prstGeom>
+          <a:noFill/>
+        </p:spPr>
+        <p:txBody>
+          <a:bodyPr wrap="square" rtlCol="0">
+            <a:spAutoFit/>
+          </a:bodyPr>
+          <a:lstStyle/>
+          <a:p>
+            <a:pPr algn="ctr"/>
+            <a:r>
+              <a:rPr lang="fr-FR" dirty="0">
+                <a:solidFill>
+                  <a:schemeClr val="accent6"/>
+                </a:solidFill>
+              </a:rPr>
+              <a:t>1</a:t>
+            </a:r>
+          </a:p>
+        </p:txBody>
+      </p:sp>
+      <p:sp>
+        <p:nvSpPr>
+          <p:cNvPr id="49" name="ZoneTexte 48">
+            <a:extLst>
+              <a:ext uri="{FF2B5EF4-FFF2-40B4-BE49-F238E27FC236}">
+                <a16:creationId xmlns:a16="http://schemas.microsoft.com/office/drawing/2014/main" id="{7E88DC73-E5B8-5796-A961-E6C2E50FDE66}"/>
+              </a:ext>
+            </a:extLst>
+          </p:cNvPr>
+          <p:cNvSpPr txBox="1"/>
+          <p:nvPr/>
+        </p:nvSpPr>
+        <p:spPr>
+          <a:xfrm>
+            <a:off x="7876690" y="5994465"/>
+            <a:ext cx="734993" cy="369332"/>
+          </a:xfrm>
+          <a:prstGeom prst="rect">
+            <a:avLst/>
+          </a:prstGeom>
+          <a:noFill/>
+        </p:spPr>
+        <p:txBody>
+          <a:bodyPr wrap="square" rtlCol="0">
+            <a:spAutoFit/>
+          </a:bodyPr>
+          <a:lstStyle/>
+          <a:p>
+            <a:pPr algn="ctr"/>
+            <a:r>
+              <a:rPr lang="fr-FR" dirty="0">
+                <a:solidFill>
+                  <a:schemeClr val="accent6"/>
+                </a:solidFill>
+              </a:rPr>
+              <a:t>1</a:t>
+            </a:r>
+          </a:p>
+        </p:txBody>
+      </p:sp>
+      <p:sp>
+        <p:nvSpPr>
+          <p:cNvPr id="50" name="ZoneTexte 49">
+            <a:extLst>
+              <a:ext uri="{FF2B5EF4-FFF2-40B4-BE49-F238E27FC236}">
+                <a16:creationId xmlns:a16="http://schemas.microsoft.com/office/drawing/2014/main" id="{CEB0440B-CF08-A150-4563-261183974088}"/>
+              </a:ext>
+            </a:extLst>
+          </p:cNvPr>
+          <p:cNvSpPr txBox="1"/>
+          <p:nvPr/>
+        </p:nvSpPr>
+        <p:spPr>
+          <a:xfrm>
+            <a:off x="8754438" y="6022801"/>
+            <a:ext cx="734993" cy="369332"/>
+          </a:xfrm>
+          <a:prstGeom prst="rect">
+            <a:avLst/>
+          </a:prstGeom>
+          <a:noFill/>
+        </p:spPr>
+        <p:txBody>
+          <a:bodyPr wrap="square" rtlCol="0">
+            <a:spAutoFit/>
+          </a:bodyPr>
+          <a:lstStyle/>
+          <a:p>
+            <a:pPr algn="ctr"/>
+            <a:r>
+              <a:rPr lang="fr-FR" dirty="0">
+                <a:solidFill>
+                  <a:schemeClr val="accent6"/>
+                </a:solidFill>
+              </a:rPr>
+              <a:t>1</a:t>
+            </a:r>
+          </a:p>
+        </p:txBody>
+      </p:sp>
+      <p:sp>
+        <p:nvSpPr>
+          <p:cNvPr id="51" name="ZoneTexte 50">
+            <a:extLst>
+              <a:ext uri="{FF2B5EF4-FFF2-40B4-BE49-F238E27FC236}">
+                <a16:creationId xmlns:a16="http://schemas.microsoft.com/office/drawing/2014/main" id="{8CAA27E7-6150-3971-CFF7-E0594DE07A75}"/>
+              </a:ext>
+            </a:extLst>
+          </p:cNvPr>
+          <p:cNvSpPr txBox="1"/>
+          <p:nvPr/>
+        </p:nvSpPr>
+        <p:spPr>
+          <a:xfrm>
+            <a:off x="9610120" y="5994465"/>
+            <a:ext cx="734993" cy="369332"/>
+          </a:xfrm>
+          <a:prstGeom prst="rect">
+            <a:avLst/>
+          </a:prstGeom>
+          <a:noFill/>
+        </p:spPr>
+        <p:txBody>
+          <a:bodyPr wrap="square" rtlCol="0">
+            <a:spAutoFit/>
+          </a:bodyPr>
+          <a:lstStyle/>
+          <a:p>
+            <a:pPr algn="ctr"/>
+            <a:r>
+              <a:rPr lang="fr-FR" dirty="0">
+                <a:solidFill>
+                  <a:schemeClr val="accent6"/>
+                </a:solidFill>
+              </a:rPr>
+              <a:t>1</a:t>
+            </a:r>
+          </a:p>
+        </p:txBody>
+      </p:sp>
+      <p:cxnSp>
+        <p:nvCxnSpPr>
+          <p:cNvPr id="54" name="Connecteur droit avec flèche 53">
+            <a:extLst>
+              <a:ext uri="{FF2B5EF4-FFF2-40B4-BE49-F238E27FC236}">
+                <a16:creationId xmlns:a16="http://schemas.microsoft.com/office/drawing/2014/main" id="{E73643F2-9295-819C-8446-AADE62E9B33E}"/>
+              </a:ext>
+            </a:extLst>
+          </p:cNvPr>
+          <p:cNvCxnSpPr>
+            <a:stCxn id="30" idx="2"/>
+            <a:endCxn id="42" idx="0"/>
+          </p:cNvCxnSpPr>
+          <p:nvPr/>
+        </p:nvCxnSpPr>
+        <p:spPr>
+          <a:xfrm>
+            <a:off x="2233914" y="4496804"/>
+            <a:ext cx="0" cy="1497661"/>
+          </a:xfrm>
+          <a:prstGeom prst="straightConnector1">
+            <a:avLst/>
+          </a:prstGeom>
+          <a:ln>
+            <a:tailEnd type="triangle"/>
+          </a:ln>
+        </p:spPr>
+        <p:style>
+          <a:lnRef idx="2">
+            <a:schemeClr val="accent1"/>
+          </a:lnRef>
+          <a:fillRef idx="0">
+            <a:schemeClr val="accent1"/>
+          </a:fillRef>
+          <a:effectRef idx="1">
+            <a:schemeClr val="accent1"/>
+          </a:effectRef>
+          <a:fontRef idx="minor">
+            <a:schemeClr val="tx1"/>
+          </a:fontRef>
+        </p:style>
+      </p:cxnSp>
+      <p:cxnSp>
+        <p:nvCxnSpPr>
+          <p:cNvPr id="55" name="Connecteur droit avec flèche 54">
+            <a:extLst>
+              <a:ext uri="{FF2B5EF4-FFF2-40B4-BE49-F238E27FC236}">
+                <a16:creationId xmlns:a16="http://schemas.microsoft.com/office/drawing/2014/main" id="{BEF93171-DE5C-6277-A34D-2D839079E4D4}"/>
+              </a:ext>
+            </a:extLst>
+          </p:cNvPr>
+          <p:cNvCxnSpPr/>
+          <p:nvPr/>
+        </p:nvCxnSpPr>
+        <p:spPr>
+          <a:xfrm>
+            <a:off x="3034497" y="4477390"/>
+            <a:ext cx="0" cy="1497661"/>
+          </a:xfrm>
+          <a:prstGeom prst="straightConnector1">
+            <a:avLst/>
+          </a:prstGeom>
+          <a:ln>
+            <a:tailEnd type="triangle"/>
+          </a:ln>
+        </p:spPr>
+        <p:style>
+          <a:lnRef idx="2">
+            <a:schemeClr val="accent1"/>
+          </a:lnRef>
+          <a:fillRef idx="0">
+            <a:schemeClr val="accent1"/>
+          </a:fillRef>
+          <a:effectRef idx="1">
+            <a:schemeClr val="accent1"/>
+          </a:effectRef>
+          <a:fontRef idx="minor">
+            <a:schemeClr val="tx1"/>
+          </a:fontRef>
+        </p:style>
+      </p:cxnSp>
+      <p:cxnSp>
+        <p:nvCxnSpPr>
+          <p:cNvPr id="56" name="Connecteur droit avec flèche 55">
+            <a:extLst>
+              <a:ext uri="{FF2B5EF4-FFF2-40B4-BE49-F238E27FC236}">
+                <a16:creationId xmlns:a16="http://schemas.microsoft.com/office/drawing/2014/main" id="{21FCC6AF-B2EA-988C-CBE0-6D8EC352126E}"/>
+              </a:ext>
+            </a:extLst>
+          </p:cNvPr>
+          <p:cNvCxnSpPr/>
+          <p:nvPr/>
+        </p:nvCxnSpPr>
+        <p:spPr>
+          <a:xfrm>
+            <a:off x="3946967" y="4507986"/>
+            <a:ext cx="0" cy="1497661"/>
+          </a:xfrm>
+          <a:prstGeom prst="straightConnector1">
+            <a:avLst/>
+          </a:prstGeom>
+          <a:ln>
+            <a:tailEnd type="triangle"/>
+          </a:ln>
+        </p:spPr>
+        <p:style>
+          <a:lnRef idx="2">
+            <a:schemeClr val="accent1"/>
+          </a:lnRef>
+          <a:fillRef idx="0">
+            <a:schemeClr val="accent1"/>
+          </a:fillRef>
+          <a:effectRef idx="1">
+            <a:schemeClr val="accent1"/>
+          </a:effectRef>
+          <a:fontRef idx="minor">
+            <a:schemeClr val="tx1"/>
+          </a:fontRef>
+        </p:style>
+      </p:cxnSp>
+      <p:cxnSp>
+        <p:nvCxnSpPr>
+          <p:cNvPr id="57" name="Connecteur droit avec flèche 56">
+            <a:extLst>
+              <a:ext uri="{FF2B5EF4-FFF2-40B4-BE49-F238E27FC236}">
+                <a16:creationId xmlns:a16="http://schemas.microsoft.com/office/drawing/2014/main" id="{BF1700C1-FD40-142A-2F9D-2B6C40B8CFCA}"/>
+              </a:ext>
+            </a:extLst>
+          </p:cNvPr>
+          <p:cNvCxnSpPr/>
+          <p:nvPr/>
+        </p:nvCxnSpPr>
+        <p:spPr>
+          <a:xfrm>
+            <a:off x="4803494" y="4477390"/>
+            <a:ext cx="0" cy="1497661"/>
+          </a:xfrm>
+          <a:prstGeom prst="straightConnector1">
+            <a:avLst/>
+          </a:prstGeom>
+          <a:ln>
+            <a:tailEnd type="triangle"/>
+          </a:ln>
+        </p:spPr>
+        <p:style>
+          <a:lnRef idx="2">
+            <a:schemeClr val="accent1"/>
+          </a:lnRef>
+          <a:fillRef idx="0">
+            <a:schemeClr val="accent1"/>
+          </a:fillRef>
+          <a:effectRef idx="1">
+            <a:schemeClr val="accent1"/>
+          </a:effectRef>
+          <a:fontRef idx="minor">
+            <a:schemeClr val="tx1"/>
+          </a:fontRef>
+        </p:style>
+      </p:cxnSp>
+      <p:cxnSp>
+        <p:nvCxnSpPr>
+          <p:cNvPr id="58" name="Connecteur droit avec flèche 57">
+            <a:extLst>
+              <a:ext uri="{FF2B5EF4-FFF2-40B4-BE49-F238E27FC236}">
+                <a16:creationId xmlns:a16="http://schemas.microsoft.com/office/drawing/2014/main" id="{0401B290-E847-8E67-B688-CC599D83EC6B}"/>
+              </a:ext>
+            </a:extLst>
+          </p:cNvPr>
+          <p:cNvCxnSpPr/>
+          <p:nvPr/>
+        </p:nvCxnSpPr>
+        <p:spPr>
+          <a:xfrm>
+            <a:off x="5677925" y="4477390"/>
+            <a:ext cx="0" cy="1497661"/>
+          </a:xfrm>
+          <a:prstGeom prst="straightConnector1">
+            <a:avLst/>
+          </a:prstGeom>
+          <a:ln>
+            <a:tailEnd type="triangle"/>
+          </a:ln>
+        </p:spPr>
+        <p:style>
+          <a:lnRef idx="2">
+            <a:schemeClr val="accent1"/>
+          </a:lnRef>
+          <a:fillRef idx="0">
+            <a:schemeClr val="accent1"/>
+          </a:fillRef>
+          <a:effectRef idx="1">
+            <a:schemeClr val="accent1"/>
+          </a:effectRef>
+          <a:fontRef idx="minor">
+            <a:schemeClr val="tx1"/>
+          </a:fontRef>
+        </p:style>
+      </p:cxnSp>
+      <p:cxnSp>
+        <p:nvCxnSpPr>
+          <p:cNvPr id="59" name="Connecteur droit avec flèche 58">
+            <a:extLst>
+              <a:ext uri="{FF2B5EF4-FFF2-40B4-BE49-F238E27FC236}">
+                <a16:creationId xmlns:a16="http://schemas.microsoft.com/office/drawing/2014/main" id="{DF75A1D3-0BC4-FDC0-CCF6-1DC839FAFC6D}"/>
+              </a:ext>
+            </a:extLst>
+          </p:cNvPr>
+          <p:cNvCxnSpPr/>
+          <p:nvPr/>
+        </p:nvCxnSpPr>
+        <p:spPr>
+          <a:xfrm>
+            <a:off x="6532823" y="4477390"/>
+            <a:ext cx="0" cy="1497661"/>
+          </a:xfrm>
+          <a:prstGeom prst="straightConnector1">
+            <a:avLst/>
+          </a:prstGeom>
+          <a:ln>
+            <a:tailEnd type="triangle"/>
+          </a:ln>
+        </p:spPr>
+        <p:style>
+          <a:lnRef idx="2">
+            <a:schemeClr val="accent1"/>
+          </a:lnRef>
+          <a:fillRef idx="0">
+            <a:schemeClr val="accent1"/>
+          </a:fillRef>
+          <a:effectRef idx="1">
+            <a:schemeClr val="accent1"/>
+          </a:effectRef>
+          <a:fontRef idx="minor">
+            <a:schemeClr val="tx1"/>
+          </a:fontRef>
+        </p:style>
+      </p:cxnSp>
+      <p:cxnSp>
+        <p:nvCxnSpPr>
+          <p:cNvPr id="60" name="Connecteur droit avec flèche 59">
+            <a:extLst>
+              <a:ext uri="{FF2B5EF4-FFF2-40B4-BE49-F238E27FC236}">
+                <a16:creationId xmlns:a16="http://schemas.microsoft.com/office/drawing/2014/main" id="{DA3C8296-DA2D-EF81-DE83-5298AE88E096}"/>
+              </a:ext>
+            </a:extLst>
+          </p:cNvPr>
+          <p:cNvCxnSpPr/>
+          <p:nvPr/>
+        </p:nvCxnSpPr>
+        <p:spPr>
+          <a:xfrm>
+            <a:off x="7388505" y="4507986"/>
+            <a:ext cx="0" cy="1497661"/>
+          </a:xfrm>
+          <a:prstGeom prst="straightConnector1">
+            <a:avLst/>
+          </a:prstGeom>
+          <a:ln>
+            <a:tailEnd type="triangle"/>
+          </a:ln>
+        </p:spPr>
+        <p:style>
+          <a:lnRef idx="2">
+            <a:schemeClr val="accent1"/>
+          </a:lnRef>
+          <a:fillRef idx="0">
+            <a:schemeClr val="accent1"/>
+          </a:fillRef>
+          <a:effectRef idx="1">
+            <a:schemeClr val="accent1"/>
+          </a:effectRef>
+          <a:fontRef idx="minor">
+            <a:schemeClr val="tx1"/>
+          </a:fontRef>
+        </p:style>
+      </p:cxnSp>
+      <p:cxnSp>
+        <p:nvCxnSpPr>
+          <p:cNvPr id="61" name="Connecteur droit avec flèche 60">
+            <a:extLst>
+              <a:ext uri="{FF2B5EF4-FFF2-40B4-BE49-F238E27FC236}">
+                <a16:creationId xmlns:a16="http://schemas.microsoft.com/office/drawing/2014/main" id="{F3F8243C-B9C7-4177-01CD-1E3B15B6AEA3}"/>
+              </a:ext>
+            </a:extLst>
+          </p:cNvPr>
+          <p:cNvCxnSpPr/>
+          <p:nvPr/>
+        </p:nvCxnSpPr>
+        <p:spPr>
+          <a:xfrm>
+            <a:off x="8245032" y="4477390"/>
+            <a:ext cx="0" cy="1497661"/>
+          </a:xfrm>
+          <a:prstGeom prst="straightConnector1">
+            <a:avLst/>
+          </a:prstGeom>
+          <a:ln>
+            <a:tailEnd type="triangle"/>
+          </a:ln>
+        </p:spPr>
+        <p:style>
+          <a:lnRef idx="2">
+            <a:schemeClr val="accent1"/>
+          </a:lnRef>
+          <a:fillRef idx="0">
+            <a:schemeClr val="accent1"/>
+          </a:fillRef>
+          <a:effectRef idx="1">
+            <a:schemeClr val="accent1"/>
+          </a:effectRef>
+          <a:fontRef idx="minor">
+            <a:schemeClr val="tx1"/>
+          </a:fontRef>
+        </p:style>
+      </p:cxnSp>
+      <p:cxnSp>
+        <p:nvCxnSpPr>
+          <p:cNvPr id="62" name="Connecteur droit avec flèche 61">
+            <a:extLst>
+              <a:ext uri="{FF2B5EF4-FFF2-40B4-BE49-F238E27FC236}">
+                <a16:creationId xmlns:a16="http://schemas.microsoft.com/office/drawing/2014/main" id="{3E039677-86A5-D29B-A67E-8C1BBAC576BE}"/>
+              </a:ext>
+            </a:extLst>
+          </p:cNvPr>
+          <p:cNvCxnSpPr/>
+          <p:nvPr/>
+        </p:nvCxnSpPr>
+        <p:spPr>
+          <a:xfrm>
+            <a:off x="9138211" y="4507986"/>
+            <a:ext cx="0" cy="1497661"/>
+          </a:xfrm>
+          <a:prstGeom prst="straightConnector1">
+            <a:avLst/>
+          </a:prstGeom>
+          <a:ln>
+            <a:tailEnd type="triangle"/>
+          </a:ln>
+        </p:spPr>
+        <p:style>
+          <a:lnRef idx="2">
+            <a:schemeClr val="accent1"/>
+          </a:lnRef>
+          <a:fillRef idx="0">
+            <a:schemeClr val="accent1"/>
+          </a:fillRef>
+          <a:effectRef idx="1">
+            <a:schemeClr val="accent1"/>
+          </a:effectRef>
+          <a:fontRef idx="minor">
+            <a:schemeClr val="tx1"/>
+          </a:fontRef>
+        </p:style>
+      </p:cxnSp>
+      <p:cxnSp>
+        <p:nvCxnSpPr>
+          <p:cNvPr id="63" name="Connecteur droit avec flèche 62">
+            <a:extLst>
+              <a:ext uri="{FF2B5EF4-FFF2-40B4-BE49-F238E27FC236}">
+                <a16:creationId xmlns:a16="http://schemas.microsoft.com/office/drawing/2014/main" id="{BB94454D-68A3-F268-7B55-52593E3A6D13}"/>
+              </a:ext>
+            </a:extLst>
+          </p:cNvPr>
+          <p:cNvCxnSpPr/>
+          <p:nvPr/>
+        </p:nvCxnSpPr>
+        <p:spPr>
+          <a:xfrm>
+            <a:off x="9977374" y="4477390"/>
+            <a:ext cx="0" cy="1497661"/>
+          </a:xfrm>
+          <a:prstGeom prst="straightConnector1">
+            <a:avLst/>
+          </a:prstGeom>
+          <a:ln>
+            <a:tailEnd type="triangle"/>
+          </a:ln>
+        </p:spPr>
+        <p:style>
+          <a:lnRef idx="2">
+            <a:schemeClr val="accent1"/>
+          </a:lnRef>
+          <a:fillRef idx="0">
+            <a:schemeClr val="accent1"/>
+          </a:fillRef>
+          <a:effectRef idx="1">
+            <a:schemeClr val="accent1"/>
+          </a:effectRef>
+          <a:fontRef idx="minor">
+            <a:schemeClr val="tx1"/>
+          </a:fontRef>
+        </p:style>
+      </p:cxnSp>
+      <p:sp>
+        <p:nvSpPr>
+          <p:cNvPr id="52" name="Organigramme : Opération manuelle 51">
+            <a:extLst>
+              <a:ext uri="{FF2B5EF4-FFF2-40B4-BE49-F238E27FC236}">
+                <a16:creationId xmlns:a16="http://schemas.microsoft.com/office/drawing/2014/main" id="{79AB59C4-7C45-51EA-6D14-FEEA5EB17ED0}"/>
+              </a:ext>
+            </a:extLst>
+          </p:cNvPr>
+          <p:cNvSpPr/>
+          <p:nvPr/>
+        </p:nvSpPr>
+        <p:spPr>
+          <a:xfrm>
+            <a:off x="1866417" y="4847841"/>
+            <a:ext cx="8528491" cy="532449"/>
+          </a:xfrm>
+          <a:prstGeom prst="flowChartManualOperation">
+            <a:avLst/>
+          </a:prstGeom>
+        </p:spPr>
+        <p:style>
+          <a:lnRef idx="2">
+            <a:schemeClr val="accent1">
+              <a:shade val="15000"/>
+            </a:schemeClr>
+          </a:lnRef>
+          <a:fillRef idx="1">
+            <a:schemeClr val="accent1"/>
+          </a:fillRef>
+          <a:effectRef idx="0">
+            <a:schemeClr val="accent1"/>
+          </a:effectRef>
+          <a:fontRef idx="minor">
+            <a:schemeClr val="lt1"/>
+          </a:fontRef>
+        </p:style>
+        <p:txBody>
+          <a:bodyPr rtlCol="0" anchor="ctr"/>
+          <a:lstStyle/>
+          <a:p>
+            <a:pPr algn="ctr"/>
+            <a:r>
+              <a:rPr lang="fr-FR" dirty="0"/>
+              <a:t>Classifieur</a:t>
+            </a:r>
+          </a:p>
+        </p:txBody>
+      </p:sp>
+      <p:pic>
+        <p:nvPicPr>
+          <p:cNvPr id="64" name="Image 63">
+            <a:extLst>
+              <a:ext uri="{FF2B5EF4-FFF2-40B4-BE49-F238E27FC236}">
+                <a16:creationId xmlns:a16="http://schemas.microsoft.com/office/drawing/2014/main" id="{4EE0A8A8-C895-3E52-233B-934E1312FC6C}"/>
+              </a:ext>
+            </a:extLst>
+          </p:cNvPr>
+          <p:cNvPicPr>
+            <a:picLocks noChangeAspect="1"/>
+          </p:cNvPicPr>
+          <p:nvPr/>
+        </p:nvPicPr>
+        <p:blipFill>
+          <a:blip r:embed="rId2"/>
+          <a:srcRect l="90268" r="7" b="-1"/>
+          <a:stretch/>
+        </p:blipFill>
+        <p:spPr>
+          <a:xfrm>
+            <a:off x="7337926" y="1937318"/>
+            <a:ext cx="836149" cy="844175"/>
+          </a:xfrm>
+          <a:prstGeom prst="rect">
+            <a:avLst/>
+          </a:prstGeom>
+        </p:spPr>
+      </p:pic>
+      <p:sp>
+        <p:nvSpPr>
+          <p:cNvPr id="65" name="ZoneTexte 64">
+            <a:extLst>
+              <a:ext uri="{FF2B5EF4-FFF2-40B4-BE49-F238E27FC236}">
+                <a16:creationId xmlns:a16="http://schemas.microsoft.com/office/drawing/2014/main" id="{B93F3B83-70E3-48A6-31E6-2C8CF7B81A11}"/>
+              </a:ext>
+            </a:extLst>
+          </p:cNvPr>
+          <p:cNvSpPr txBox="1"/>
+          <p:nvPr/>
+        </p:nvSpPr>
+        <p:spPr>
+          <a:xfrm>
+            <a:off x="6386418" y="1800402"/>
+            <a:ext cx="1113221" cy="830997"/>
+          </a:xfrm>
+          <a:prstGeom prst="rect">
+            <a:avLst/>
+          </a:prstGeom>
+          <a:noFill/>
+        </p:spPr>
+        <p:txBody>
+          <a:bodyPr wrap="square" rtlCol="0">
+            <a:spAutoFit/>
+          </a:bodyPr>
+          <a:lstStyle/>
+          <a:p>
+            <a:pPr algn="ctr"/>
+            <a:r>
+              <a:rPr lang="fr-FR" sz="4800" dirty="0">
+                <a:solidFill>
+                  <a:schemeClr val="bg1">
+                    <a:lumMod val="65000"/>
+                  </a:schemeClr>
+                </a:solidFill>
+              </a:rPr>
+              <a:t>…</a:t>
+            </a:r>
+          </a:p>
+        </p:txBody>
+      </p:sp>
+    </p:spTree>
+    <p:extLst>
+      <p:ext uri="{BB962C8B-B14F-4D97-AF65-F5344CB8AC3E}">
+        <p14:creationId xmlns:p14="http://schemas.microsoft.com/office/powerpoint/2010/main" val="1869407847"/>
+      </p:ext>
+    </p:extLst>
+  </p:cSld>
+  <p:clrMapOvr>
+    <a:masterClrMapping/>
+  </p:clrMapOvr>
+</p:sld>
+</file>
+
+<file path=ppt/slides/slide23.xml><?xml version="1.0" encoding="utf-8"?>
+<p:sld xmlns:a="http://schemas.openxmlformats.org/drawingml/2006/main" xmlns:r="http://schemas.openxmlformats.org/officeDocument/2006/relationships" xmlns:p="http://schemas.openxmlformats.org/presentationml/2006/main">
+  <p:cSld>
+    <p:spTree>
+      <p:nvGrpSpPr>
+        <p:cNvPr id="1" name="">
+          <a:extLst>
+            <a:ext uri="{FF2B5EF4-FFF2-40B4-BE49-F238E27FC236}">
+              <a16:creationId xmlns:a16="http://schemas.microsoft.com/office/drawing/2014/main" id="{500FD388-D1AC-01C0-47BF-42C13F12918A}"/>
+            </a:ext>
+          </a:extLst>
+        </p:cNvPr>
+        <p:cNvGrpSpPr/>
+        <p:nvPr/>
+      </p:nvGrpSpPr>
+      <p:grpSpPr>
+        <a:xfrm>
+          <a:off x="0" y="0"/>
+          <a:ext cx="0" cy="0"/>
+          <a:chOff x="0" y="0"/>
+          <a:chExt cx="0" cy="0"/>
+        </a:xfrm>
+      </p:grpSpPr>
+      <p:sp>
+        <p:nvSpPr>
+          <p:cNvPr id="4" name="Titre 3">
+            <a:extLst>
+              <a:ext uri="{FF2B5EF4-FFF2-40B4-BE49-F238E27FC236}">
+                <a16:creationId xmlns:a16="http://schemas.microsoft.com/office/drawing/2014/main" id="{39859665-9CE0-5B56-A9E3-3FA81685AC09}"/>
+              </a:ext>
+            </a:extLst>
+          </p:cNvPr>
+          <p:cNvSpPr>
+            <a:spLocks noGrp="1"/>
+          </p:cNvSpPr>
+          <p:nvPr>
+            <p:ph type="title"/>
+          </p:nvPr>
+        </p:nvSpPr>
+        <p:spPr/>
+        <p:txBody>
+          <a:bodyPr/>
+          <a:lstStyle/>
+          <a:p>
+            <a:r>
+              <a:rPr lang="fr-FR" dirty="0"/>
+              <a:t>Reconnaissance de la classe source</a:t>
+            </a:r>
+            <a:br>
+              <a:rPr lang="fr-FR" dirty="0"/>
+            </a:br>
+            <a:r>
+              <a:rPr lang="fr-FR" sz="2400" dirty="0">
+                <a:solidFill>
+                  <a:schemeClr val="tx1">
+                    <a:lumMod val="65000"/>
+                    <a:lumOff val="35000"/>
+                  </a:schemeClr>
+                </a:solidFill>
+              </a:rPr>
+              <a:t>Fonctionnement</a:t>
+            </a:r>
+            <a:endParaRPr lang="fr-FR" dirty="0"/>
+          </a:p>
+        </p:txBody>
+      </p:sp>
+      <p:pic>
+        <p:nvPicPr>
+          <p:cNvPr id="2" name="Espace réservé du contenu 6" descr="Une image contenant noir, noir et blanc, capture d’écran, Graphique&#10;&#10;Le contenu généré par l’IA peut être incorrect.">
+            <a:extLst>
+              <a:ext uri="{FF2B5EF4-FFF2-40B4-BE49-F238E27FC236}">
+                <a16:creationId xmlns:a16="http://schemas.microsoft.com/office/drawing/2014/main" id="{F3C2298F-FB33-A832-E80A-A876AC504D25}"/>
+              </a:ext>
+            </a:extLst>
+          </p:cNvPr>
+          <p:cNvPicPr>
+            <a:picLocks noGrp="1" noChangeAspect="1"/>
+          </p:cNvPicPr>
+          <p:nvPr>
+            <p:ph idx="1"/>
+          </p:nvPr>
+        </p:nvPicPr>
+        <p:blipFill>
+          <a:blip r:embed="rId2">
+            <a:extLst>
+              <a:ext uri="{28A0092B-C50C-407E-A947-70E740481C1C}">
+                <a14:useLocalDpi xmlns:a14="http://schemas.microsoft.com/office/drawing/2010/main" val="0"/>
+              </a:ext>
+            </a:extLst>
+          </a:blip>
+          <a:stretch>
+            <a:fillRect/>
+          </a:stretch>
+        </p:blipFill>
+        <p:spPr>
+          <a:xfrm>
+            <a:off x="2478284" y="2431467"/>
+            <a:ext cx="3111201" cy="1817779"/>
+          </a:xfrm>
+        </p:spPr>
+      </p:pic>
+      <p:pic>
+        <p:nvPicPr>
+          <p:cNvPr id="5" name="Image 4" descr="Une image contenant symbole, noir, noir et blanc, obscurité&#10;&#10;Le contenu généré par l’IA peut être incorrect.">
+            <a:extLst>
+              <a:ext uri="{FF2B5EF4-FFF2-40B4-BE49-F238E27FC236}">
+                <a16:creationId xmlns:a16="http://schemas.microsoft.com/office/drawing/2014/main" id="{A19A651F-8DB9-0CE4-2EE9-1A50FCA7AF4F}"/>
+              </a:ext>
+            </a:extLst>
+          </p:cNvPr>
+          <p:cNvPicPr>
+            <a:picLocks noChangeAspect="1"/>
+          </p:cNvPicPr>
+          <p:nvPr/>
+        </p:nvPicPr>
+        <p:blipFill>
+          <a:blip r:embed="rId3">
+            <a:extLst>
+              <a:ext uri="{28A0092B-C50C-407E-A947-70E740481C1C}">
+                <a14:useLocalDpi xmlns:a14="http://schemas.microsoft.com/office/drawing/2010/main" val="0"/>
+              </a:ext>
+            </a:extLst>
+          </a:blip>
+          <a:stretch>
+            <a:fillRect/>
+          </a:stretch>
+        </p:blipFill>
+        <p:spPr>
+          <a:xfrm>
+            <a:off x="6681718" y="2431465"/>
+            <a:ext cx="3111201" cy="1817780"/>
+          </a:xfrm>
+          <a:prstGeom prst="rect">
+            <a:avLst/>
+          </a:prstGeom>
+        </p:spPr>
+      </p:pic>
+      <p:cxnSp>
+        <p:nvCxnSpPr>
+          <p:cNvPr id="7" name="Connecteur droit avec flèche 6">
+            <a:extLst>
+              <a:ext uri="{FF2B5EF4-FFF2-40B4-BE49-F238E27FC236}">
+                <a16:creationId xmlns:a16="http://schemas.microsoft.com/office/drawing/2014/main" id="{BA5DE551-0FCF-D9DB-3738-315869B2A677}"/>
+              </a:ext>
+            </a:extLst>
+          </p:cNvPr>
+          <p:cNvCxnSpPr>
+            <a:cxnSpLocks/>
+            <a:stCxn id="2" idx="3"/>
+            <a:endCxn id="5" idx="1"/>
+          </p:cNvCxnSpPr>
+          <p:nvPr/>
+        </p:nvCxnSpPr>
+        <p:spPr>
+          <a:xfrm flipV="1">
+            <a:off x="5589485" y="3340355"/>
+            <a:ext cx="1092233" cy="2"/>
+          </a:xfrm>
+          <a:prstGeom prst="straightConnector1">
+            <a:avLst/>
+          </a:prstGeom>
+          <a:ln w="76200">
+            <a:solidFill>
+              <a:schemeClr val="bg2">
+                <a:lumMod val="50000"/>
+              </a:schemeClr>
+            </a:solidFill>
+            <a:tailEnd type="triangle"/>
+          </a:ln>
+        </p:spPr>
+        <p:style>
+          <a:lnRef idx="2">
+            <a:schemeClr val="accent1"/>
+          </a:lnRef>
+          <a:fillRef idx="0">
+            <a:schemeClr val="accent1"/>
+          </a:fillRef>
+          <a:effectRef idx="1">
+            <a:schemeClr val="accent1"/>
+          </a:effectRef>
+          <a:fontRef idx="minor">
+            <a:schemeClr val="tx1"/>
+          </a:fontRef>
+        </p:style>
+      </p:cxnSp>
+      <p:sp>
+        <p:nvSpPr>
+          <p:cNvPr id="21" name="Organigramme : Opération manuelle 20">
+            <a:extLst>
+              <a:ext uri="{FF2B5EF4-FFF2-40B4-BE49-F238E27FC236}">
+                <a16:creationId xmlns:a16="http://schemas.microsoft.com/office/drawing/2014/main" id="{58980EDF-053E-A098-10D1-97DDC63BF8C5}"/>
+              </a:ext>
+            </a:extLst>
+          </p:cNvPr>
+          <p:cNvSpPr/>
+          <p:nvPr/>
+        </p:nvSpPr>
+        <p:spPr>
+          <a:xfrm>
+            <a:off x="2478283" y="4515331"/>
+            <a:ext cx="3111201" cy="532449"/>
+          </a:xfrm>
+          <a:prstGeom prst="flowChartManualOperation">
+            <a:avLst/>
+          </a:prstGeom>
+        </p:spPr>
+        <p:style>
+          <a:lnRef idx="2">
+            <a:schemeClr val="accent1">
+              <a:shade val="15000"/>
+            </a:schemeClr>
+          </a:lnRef>
+          <a:fillRef idx="1">
+            <a:schemeClr val="accent1"/>
+          </a:fillRef>
+          <a:effectRef idx="0">
+            <a:schemeClr val="accent1"/>
+          </a:effectRef>
+          <a:fontRef idx="minor">
+            <a:schemeClr val="lt1"/>
+          </a:fontRef>
+        </p:style>
+        <p:txBody>
+          <a:bodyPr rtlCol="0" anchor="ctr"/>
+          <a:lstStyle/>
+          <a:p>
+            <a:pPr algn="ctr"/>
+            <a:r>
+              <a:rPr lang="fr-FR" dirty="0"/>
+              <a:t>Classifieur</a:t>
+            </a:r>
+          </a:p>
+        </p:txBody>
+      </p:sp>
+      <p:sp>
+        <p:nvSpPr>
+          <p:cNvPr id="22" name="Organigramme : Opération manuelle 21">
+            <a:extLst>
+              <a:ext uri="{FF2B5EF4-FFF2-40B4-BE49-F238E27FC236}">
+                <a16:creationId xmlns:a16="http://schemas.microsoft.com/office/drawing/2014/main" id="{19399A36-8FB2-70C8-0496-BA7BD8D1A599}"/>
+              </a:ext>
+            </a:extLst>
+          </p:cNvPr>
+          <p:cNvSpPr/>
+          <p:nvPr/>
+        </p:nvSpPr>
+        <p:spPr>
+          <a:xfrm>
+            <a:off x="6681718" y="4515331"/>
+            <a:ext cx="3111201" cy="532449"/>
+          </a:xfrm>
+          <a:prstGeom prst="flowChartManualOperation">
+            <a:avLst/>
+          </a:prstGeom>
+        </p:spPr>
+        <p:style>
+          <a:lnRef idx="2">
+            <a:schemeClr val="accent1">
+              <a:shade val="15000"/>
+            </a:schemeClr>
+          </a:lnRef>
+          <a:fillRef idx="1">
+            <a:schemeClr val="accent1"/>
+          </a:fillRef>
+          <a:effectRef idx="0">
+            <a:schemeClr val="accent1"/>
+          </a:effectRef>
+          <a:fontRef idx="minor">
+            <a:schemeClr val="lt1"/>
+          </a:fontRef>
+        </p:style>
+        <p:txBody>
+          <a:bodyPr rtlCol="0" anchor="ctr"/>
+          <a:lstStyle/>
+          <a:p>
+            <a:pPr algn="ctr"/>
+            <a:r>
+              <a:rPr lang="fr-FR" dirty="0"/>
+              <a:t>Classifieur</a:t>
+            </a:r>
+          </a:p>
+        </p:txBody>
+      </p:sp>
+      <p:sp>
+        <p:nvSpPr>
+          <p:cNvPr id="24" name="ZoneTexte 23">
+            <a:extLst>
+              <a:ext uri="{FF2B5EF4-FFF2-40B4-BE49-F238E27FC236}">
+                <a16:creationId xmlns:a16="http://schemas.microsoft.com/office/drawing/2014/main" id="{210BDF56-09CA-051A-33A4-368B62C17C4F}"/>
+              </a:ext>
+            </a:extLst>
+          </p:cNvPr>
+          <p:cNvSpPr txBox="1"/>
+          <p:nvPr/>
+        </p:nvSpPr>
+        <p:spPr>
+          <a:xfrm>
+            <a:off x="2651253" y="5141289"/>
+            <a:ext cx="2765259" cy="646331"/>
+          </a:xfrm>
+          <a:prstGeom prst="rect">
+            <a:avLst/>
+          </a:prstGeom>
+          <a:noFill/>
+        </p:spPr>
+        <p:txBody>
+          <a:bodyPr wrap="square" rtlCol="0">
+            <a:spAutoFit/>
+          </a:bodyPr>
+          <a:lstStyle/>
+          <a:p>
+            <a:pPr algn="ctr"/>
+            <a:r>
+              <a:rPr lang="fr-FR" sz="3600" dirty="0"/>
+              <a:t>3	6	2</a:t>
+            </a:r>
+            <a:endParaRPr lang="fr-FR" sz="3600" u="sng" dirty="0">
+              <a:latin typeface="Arial" panose="020B0604020202020204" pitchFamily="34" charset="0"/>
+            </a:endParaRPr>
+          </a:p>
+        </p:txBody>
+      </p:sp>
+      <p:sp>
+        <p:nvSpPr>
+          <p:cNvPr id="26" name="ZoneTexte 25">
+            <a:extLst>
+              <a:ext uri="{FF2B5EF4-FFF2-40B4-BE49-F238E27FC236}">
+                <a16:creationId xmlns:a16="http://schemas.microsoft.com/office/drawing/2014/main" id="{27072C15-C84F-CDAF-6370-215D39DE81BC}"/>
+              </a:ext>
+            </a:extLst>
+          </p:cNvPr>
+          <p:cNvSpPr txBox="1"/>
+          <p:nvPr/>
+        </p:nvSpPr>
+        <p:spPr>
+          <a:xfrm>
+            <a:off x="6854688" y="5141289"/>
+            <a:ext cx="2765259" cy="646331"/>
+          </a:xfrm>
+          <a:prstGeom prst="rect">
+            <a:avLst/>
+          </a:prstGeom>
+          <a:noFill/>
+        </p:spPr>
+        <p:txBody>
+          <a:bodyPr wrap="square" rtlCol="0">
+            <a:spAutoFit/>
+          </a:bodyPr>
+          <a:lstStyle/>
+          <a:p>
+            <a:pPr algn="ctr"/>
+            <a:r>
+              <a:rPr lang="fr-FR" sz="3600" dirty="0"/>
+              <a:t>3	6	2</a:t>
+            </a:r>
+            <a:endParaRPr lang="fr-FR" sz="3600" u="sng" dirty="0">
+              <a:latin typeface="Arial" panose="020B0604020202020204" pitchFamily="34" charset="0"/>
+            </a:endParaRPr>
+          </a:p>
+        </p:txBody>
+      </p:sp>
+    </p:spTree>
+    <p:extLst>
+      <p:ext uri="{BB962C8B-B14F-4D97-AF65-F5344CB8AC3E}">
+        <p14:creationId xmlns:p14="http://schemas.microsoft.com/office/powerpoint/2010/main" val="2408417489"/>
+      </p:ext>
+    </p:extLst>
+  </p:cSld>
+  <p:clrMapOvr>
+    <a:masterClrMapping/>
+  </p:clrMapOvr>
+</p:sld>
+</file>
+
+<file path=ppt/slides/slide24.xml><?xml version="1.0" encoding="utf-8"?>
+<p:sld xmlns:a="http://schemas.openxmlformats.org/drawingml/2006/main" xmlns:r="http://schemas.openxmlformats.org/officeDocument/2006/relationships" xmlns:p="http://schemas.openxmlformats.org/presentationml/2006/main">
+  <p:cSld>
+    <p:spTree>
+      <p:nvGrpSpPr>
+        <p:cNvPr id="1" name="">
+          <a:extLst>
+            <a:ext uri="{FF2B5EF4-FFF2-40B4-BE49-F238E27FC236}">
+              <a16:creationId xmlns:a16="http://schemas.microsoft.com/office/drawing/2014/main" id="{1B4D1DE7-1A59-74E9-CEA0-9A45704B9B88}"/>
+            </a:ext>
+          </a:extLst>
+        </p:cNvPr>
+        <p:cNvGrpSpPr/>
+        <p:nvPr/>
+      </p:nvGrpSpPr>
+      <p:grpSpPr>
+        <a:xfrm>
+          <a:off x="0" y="0"/>
+          <a:ext cx="0" cy="0"/>
+          <a:chOff x="0" y="0"/>
+          <a:chExt cx="0" cy="0"/>
+        </a:xfrm>
+      </p:grpSpPr>
+      <p:sp>
+        <p:nvSpPr>
+          <p:cNvPr id="4" name="Titre 3">
+            <a:extLst>
+              <a:ext uri="{FF2B5EF4-FFF2-40B4-BE49-F238E27FC236}">
+                <a16:creationId xmlns:a16="http://schemas.microsoft.com/office/drawing/2014/main" id="{2237D654-2A5B-0D39-8DC6-9D4A767105B3}"/>
+              </a:ext>
+            </a:extLst>
+          </p:cNvPr>
+          <p:cNvSpPr>
+            <a:spLocks noGrp="1"/>
+          </p:cNvSpPr>
+          <p:nvPr>
+            <p:ph type="title"/>
+          </p:nvPr>
+        </p:nvSpPr>
+        <p:spPr/>
+        <p:txBody>
+          <a:bodyPr>
+            <a:normAutofit/>
+          </a:bodyPr>
+          <a:lstStyle/>
+          <a:p>
+            <a:r>
+              <a:rPr lang="fr-FR" dirty="0"/>
+              <a:t>Reconnaissance de la classe source</a:t>
+            </a:r>
+            <a:br>
+              <a:rPr lang="fr-FR" sz="2400" dirty="0"/>
+            </a:br>
+            <a:r>
+              <a:rPr lang="fr-FR" sz="2400" dirty="0">
+                <a:solidFill>
+                  <a:schemeClr val="tx1">
+                    <a:lumMod val="65000"/>
+                    <a:lumOff val="35000"/>
+                  </a:schemeClr>
+                </a:solidFill>
+              </a:rPr>
+              <a:t>Entraînement du classifieur</a:t>
+            </a:r>
+            <a:endParaRPr lang="fr-FR" sz="2400" dirty="0"/>
+          </a:p>
+        </p:txBody>
+      </p:sp>
+      <p:pic>
+        <p:nvPicPr>
+          <p:cNvPr id="3" name="Image 2">
+            <a:extLst>
+              <a:ext uri="{FF2B5EF4-FFF2-40B4-BE49-F238E27FC236}">
+                <a16:creationId xmlns:a16="http://schemas.microsoft.com/office/drawing/2014/main" id="{C8BF3C09-6F96-8981-A516-9FAD66F99559}"/>
+              </a:ext>
+            </a:extLst>
+          </p:cNvPr>
+          <p:cNvPicPr>
+            <a:picLocks noChangeAspect="1"/>
+          </p:cNvPicPr>
+          <p:nvPr/>
+        </p:nvPicPr>
+        <p:blipFill>
+          <a:blip r:embed="rId2"/>
+          <a:srcRect r="90275"/>
+          <a:stretch/>
+        </p:blipFill>
+        <p:spPr>
+          <a:xfrm>
+            <a:off x="4728801" y="1827605"/>
+            <a:ext cx="836149" cy="844175"/>
+          </a:xfrm>
+          <a:prstGeom prst="rect">
+            <a:avLst/>
+          </a:prstGeom>
+        </p:spPr>
+      </p:pic>
+      <p:pic>
+        <p:nvPicPr>
+          <p:cNvPr id="64" name="Image 63">
+            <a:extLst>
+              <a:ext uri="{FF2B5EF4-FFF2-40B4-BE49-F238E27FC236}">
+                <a16:creationId xmlns:a16="http://schemas.microsoft.com/office/drawing/2014/main" id="{8D22439E-BED2-C348-6C60-41B0A9962A62}"/>
+              </a:ext>
+            </a:extLst>
+          </p:cNvPr>
+          <p:cNvPicPr>
+            <a:picLocks noChangeAspect="1"/>
+          </p:cNvPicPr>
+          <p:nvPr/>
+        </p:nvPicPr>
+        <p:blipFill>
+          <a:blip r:embed="rId2"/>
+          <a:srcRect l="90268" r="7" b="-1"/>
+          <a:stretch/>
+        </p:blipFill>
+        <p:spPr>
+          <a:xfrm>
+            <a:off x="6388802" y="1827604"/>
+            <a:ext cx="836149" cy="844175"/>
+          </a:xfrm>
+          <a:prstGeom prst="rect">
+            <a:avLst/>
+          </a:prstGeom>
+        </p:spPr>
+      </p:pic>
+      <p:sp>
+        <p:nvSpPr>
+          <p:cNvPr id="65" name="ZoneTexte 64">
+            <a:extLst>
+              <a:ext uri="{FF2B5EF4-FFF2-40B4-BE49-F238E27FC236}">
+                <a16:creationId xmlns:a16="http://schemas.microsoft.com/office/drawing/2014/main" id="{13B1D176-D176-8D25-1438-4D85788E82F3}"/>
+              </a:ext>
+            </a:extLst>
+          </p:cNvPr>
+          <p:cNvSpPr txBox="1"/>
+          <p:nvPr/>
+        </p:nvSpPr>
+        <p:spPr>
+          <a:xfrm>
+            <a:off x="5437294" y="1690688"/>
+            <a:ext cx="1113221" cy="830997"/>
+          </a:xfrm>
+          <a:prstGeom prst="rect">
+            <a:avLst/>
+          </a:prstGeom>
+          <a:noFill/>
+        </p:spPr>
+        <p:txBody>
+          <a:bodyPr wrap="square" rtlCol="0">
+            <a:spAutoFit/>
+          </a:bodyPr>
+          <a:lstStyle/>
+          <a:p>
+            <a:pPr algn="ctr"/>
+            <a:r>
+              <a:rPr lang="fr-FR" sz="4800" dirty="0">
+                <a:solidFill>
+                  <a:schemeClr val="bg1">
+                    <a:lumMod val="65000"/>
+                  </a:schemeClr>
+                </a:solidFill>
+              </a:rPr>
+              <a:t>…</a:t>
+            </a:r>
+          </a:p>
+        </p:txBody>
+      </p:sp>
+      <p:pic>
+        <p:nvPicPr>
+          <p:cNvPr id="5" name="Image 4">
+            <a:extLst>
+              <a:ext uri="{FF2B5EF4-FFF2-40B4-BE49-F238E27FC236}">
+                <a16:creationId xmlns:a16="http://schemas.microsoft.com/office/drawing/2014/main" id="{257E7A7C-43E3-FE36-BB64-0392F08CAA71}"/>
+              </a:ext>
+            </a:extLst>
+          </p:cNvPr>
+          <p:cNvPicPr>
+            <a:picLocks noChangeAspect="1"/>
+          </p:cNvPicPr>
+          <p:nvPr/>
+        </p:nvPicPr>
+        <p:blipFill>
+          <a:blip r:embed="rId2"/>
+          <a:srcRect r="90275"/>
+          <a:stretch/>
+        </p:blipFill>
+        <p:spPr>
+          <a:xfrm>
+            <a:off x="2232651" y="3429001"/>
+            <a:ext cx="836149" cy="844175"/>
+          </a:xfrm>
+          <a:prstGeom prst="rect">
+            <a:avLst/>
+          </a:prstGeom>
+        </p:spPr>
+      </p:pic>
+      <p:pic>
+        <p:nvPicPr>
+          <p:cNvPr id="8" name="Image 7">
+            <a:extLst>
+              <a:ext uri="{FF2B5EF4-FFF2-40B4-BE49-F238E27FC236}">
+                <a16:creationId xmlns:a16="http://schemas.microsoft.com/office/drawing/2014/main" id="{8370016C-6414-F631-9C9B-8376FCE5BD87}"/>
+              </a:ext>
+            </a:extLst>
+          </p:cNvPr>
+          <p:cNvPicPr>
+            <a:picLocks noChangeAspect="1"/>
+          </p:cNvPicPr>
+          <p:nvPr/>
+        </p:nvPicPr>
+        <p:blipFill>
+          <a:blip r:embed="rId2"/>
+          <a:srcRect l="90268" r="7" b="-1"/>
+          <a:stretch/>
+        </p:blipFill>
+        <p:spPr>
+          <a:xfrm>
+            <a:off x="3892652" y="3429000"/>
+            <a:ext cx="836149" cy="844175"/>
+          </a:xfrm>
+          <a:prstGeom prst="rect">
+            <a:avLst/>
+          </a:prstGeom>
+        </p:spPr>
+      </p:pic>
+      <p:sp>
+        <p:nvSpPr>
+          <p:cNvPr id="10" name="ZoneTexte 9">
+            <a:extLst>
+              <a:ext uri="{FF2B5EF4-FFF2-40B4-BE49-F238E27FC236}">
+                <a16:creationId xmlns:a16="http://schemas.microsoft.com/office/drawing/2014/main" id="{846154B5-F395-2317-D78C-1ABE6B105EAC}"/>
+              </a:ext>
+            </a:extLst>
+          </p:cNvPr>
+          <p:cNvSpPr txBox="1"/>
+          <p:nvPr/>
+        </p:nvSpPr>
+        <p:spPr>
+          <a:xfrm>
+            <a:off x="2941144" y="3292084"/>
+            <a:ext cx="1113221" cy="830997"/>
+          </a:xfrm>
+          <a:prstGeom prst="rect">
+            <a:avLst/>
+          </a:prstGeom>
+          <a:noFill/>
+        </p:spPr>
+        <p:txBody>
+          <a:bodyPr wrap="square" rtlCol="0">
+            <a:spAutoFit/>
+          </a:bodyPr>
+          <a:lstStyle/>
+          <a:p>
+            <a:pPr algn="ctr"/>
+            <a:r>
+              <a:rPr lang="fr-FR" sz="4800" dirty="0">
+                <a:solidFill>
+                  <a:schemeClr val="bg1">
+                    <a:lumMod val="65000"/>
+                  </a:schemeClr>
+                </a:solidFill>
+              </a:rPr>
+              <a:t>…</a:t>
+            </a:r>
+          </a:p>
+        </p:txBody>
+      </p:sp>
+      <p:pic>
+        <p:nvPicPr>
+          <p:cNvPr id="11" name="Image 10">
+            <a:extLst>
+              <a:ext uri="{FF2B5EF4-FFF2-40B4-BE49-F238E27FC236}">
+                <a16:creationId xmlns:a16="http://schemas.microsoft.com/office/drawing/2014/main" id="{883D710A-2A37-3A41-0440-60A5C14C7F06}"/>
+              </a:ext>
+            </a:extLst>
+          </p:cNvPr>
+          <p:cNvPicPr>
+            <a:picLocks noChangeAspect="1"/>
+          </p:cNvPicPr>
+          <p:nvPr/>
+        </p:nvPicPr>
+        <p:blipFill>
+          <a:blip r:embed="rId2"/>
+          <a:srcRect r="90275"/>
+          <a:stretch/>
+        </p:blipFill>
+        <p:spPr>
+          <a:xfrm>
+            <a:off x="7224951" y="3429000"/>
+            <a:ext cx="836149" cy="844175"/>
+          </a:xfrm>
+          <a:prstGeom prst="rect">
+            <a:avLst/>
+          </a:prstGeom>
+        </p:spPr>
+      </p:pic>
+      <p:pic>
+        <p:nvPicPr>
+          <p:cNvPr id="12" name="Image 11">
+            <a:extLst>
+              <a:ext uri="{FF2B5EF4-FFF2-40B4-BE49-F238E27FC236}">
+                <a16:creationId xmlns:a16="http://schemas.microsoft.com/office/drawing/2014/main" id="{0794FC37-3BDA-36B6-70F3-FAD83EBF802E}"/>
+              </a:ext>
+            </a:extLst>
+          </p:cNvPr>
+          <p:cNvPicPr>
+            <a:picLocks noChangeAspect="1"/>
+          </p:cNvPicPr>
+          <p:nvPr/>
+        </p:nvPicPr>
+        <p:blipFill>
+          <a:blip r:embed="rId2"/>
+          <a:srcRect l="90268" r="7" b="-1"/>
+          <a:stretch/>
+        </p:blipFill>
+        <p:spPr>
+          <a:xfrm>
+            <a:off x="8884952" y="3428999"/>
+            <a:ext cx="836149" cy="844175"/>
+          </a:xfrm>
+          <a:prstGeom prst="rect">
+            <a:avLst/>
+          </a:prstGeom>
+        </p:spPr>
+      </p:pic>
+      <p:sp>
+        <p:nvSpPr>
+          <p:cNvPr id="14" name="ZoneTexte 13">
+            <a:extLst>
+              <a:ext uri="{FF2B5EF4-FFF2-40B4-BE49-F238E27FC236}">
+                <a16:creationId xmlns:a16="http://schemas.microsoft.com/office/drawing/2014/main" id="{1E3DFD00-FA80-037E-C471-BEAB45010FC7}"/>
+              </a:ext>
+            </a:extLst>
+          </p:cNvPr>
+          <p:cNvSpPr txBox="1"/>
+          <p:nvPr/>
+        </p:nvSpPr>
+        <p:spPr>
+          <a:xfrm>
+            <a:off x="7933444" y="3292083"/>
+            <a:ext cx="1113221" cy="830997"/>
+          </a:xfrm>
+          <a:prstGeom prst="rect">
+            <a:avLst/>
+          </a:prstGeom>
+          <a:noFill/>
+        </p:spPr>
+        <p:txBody>
+          <a:bodyPr wrap="square" rtlCol="0">
+            <a:spAutoFit/>
+          </a:bodyPr>
+          <a:lstStyle/>
+          <a:p>
+            <a:pPr algn="ctr"/>
+            <a:r>
+              <a:rPr lang="fr-FR" sz="4800" dirty="0">
+                <a:solidFill>
+                  <a:schemeClr val="bg1">
+                    <a:lumMod val="65000"/>
+                  </a:schemeClr>
+                </a:solidFill>
+              </a:rPr>
+              <a:t>…</a:t>
+            </a:r>
+          </a:p>
+        </p:txBody>
+      </p:sp>
+      <p:cxnSp>
+        <p:nvCxnSpPr>
+          <p:cNvPr id="15" name="Connecteur droit avec flèche 14">
+            <a:extLst>
+              <a:ext uri="{FF2B5EF4-FFF2-40B4-BE49-F238E27FC236}">
+                <a16:creationId xmlns:a16="http://schemas.microsoft.com/office/drawing/2014/main" id="{C0D14780-2469-D713-FF96-BA8881B7521F}"/>
+              </a:ext>
+            </a:extLst>
+          </p:cNvPr>
+          <p:cNvCxnSpPr>
+            <a:cxnSpLocks/>
+            <a:stCxn id="3" idx="2"/>
+            <a:endCxn id="5" idx="0"/>
+          </p:cNvCxnSpPr>
+          <p:nvPr/>
+        </p:nvCxnSpPr>
+        <p:spPr>
+          <a:xfrm flipH="1">
+            <a:off x="2650726" y="2671780"/>
+            <a:ext cx="2496150" cy="757221"/>
+          </a:xfrm>
+          <a:prstGeom prst="straightConnector1">
+            <a:avLst/>
+          </a:prstGeom>
+          <a:ln>
+            <a:tailEnd type="triangle"/>
+          </a:ln>
+        </p:spPr>
+        <p:style>
+          <a:lnRef idx="2">
+            <a:schemeClr val="accent1"/>
+          </a:lnRef>
+          <a:fillRef idx="0">
+            <a:schemeClr val="accent1"/>
+          </a:fillRef>
+          <a:effectRef idx="1">
+            <a:schemeClr val="accent1"/>
+          </a:effectRef>
+          <a:fontRef idx="minor">
+            <a:schemeClr val="tx1"/>
+          </a:fontRef>
+        </p:style>
+      </p:cxnSp>
+      <p:cxnSp>
+        <p:nvCxnSpPr>
+          <p:cNvPr id="20" name="Connecteur droit avec flèche 19">
+            <a:extLst>
+              <a:ext uri="{FF2B5EF4-FFF2-40B4-BE49-F238E27FC236}">
+                <a16:creationId xmlns:a16="http://schemas.microsoft.com/office/drawing/2014/main" id="{DE9D0B71-2516-4F7F-C3EF-70C3BAD63739}"/>
+              </a:ext>
+            </a:extLst>
+          </p:cNvPr>
+          <p:cNvCxnSpPr>
+            <a:cxnSpLocks/>
+            <a:stCxn id="3" idx="2"/>
+            <a:endCxn id="8" idx="0"/>
+          </p:cNvCxnSpPr>
+          <p:nvPr/>
+        </p:nvCxnSpPr>
+        <p:spPr>
+          <a:xfrm flipH="1">
+            <a:off x="4310727" y="2671780"/>
+            <a:ext cx="836149" cy="757220"/>
+          </a:xfrm>
+          <a:prstGeom prst="straightConnector1">
+            <a:avLst/>
+          </a:prstGeom>
+          <a:ln>
+            <a:tailEnd type="triangle"/>
+          </a:ln>
+        </p:spPr>
+        <p:style>
+          <a:lnRef idx="2">
+            <a:schemeClr val="accent1"/>
+          </a:lnRef>
+          <a:fillRef idx="0">
+            <a:schemeClr val="accent1"/>
+          </a:fillRef>
+          <a:effectRef idx="1">
+            <a:schemeClr val="accent1"/>
+          </a:effectRef>
+          <a:fontRef idx="minor">
+            <a:schemeClr val="tx1"/>
+          </a:fontRef>
+        </p:style>
+      </p:cxnSp>
+      <p:cxnSp>
+        <p:nvCxnSpPr>
+          <p:cNvPr id="25" name="Connecteur droit avec flèche 24">
+            <a:extLst>
+              <a:ext uri="{FF2B5EF4-FFF2-40B4-BE49-F238E27FC236}">
+                <a16:creationId xmlns:a16="http://schemas.microsoft.com/office/drawing/2014/main" id="{74D2D05B-A24B-B161-7623-270855532249}"/>
+              </a:ext>
+            </a:extLst>
+          </p:cNvPr>
+          <p:cNvCxnSpPr>
+            <a:cxnSpLocks/>
+            <a:endCxn id="11" idx="0"/>
+          </p:cNvCxnSpPr>
+          <p:nvPr/>
+        </p:nvCxnSpPr>
+        <p:spPr>
+          <a:xfrm>
+            <a:off x="6819173" y="2658601"/>
+            <a:ext cx="823853" cy="770399"/>
+          </a:xfrm>
+          <a:prstGeom prst="straightConnector1">
+            <a:avLst/>
+          </a:prstGeom>
+          <a:ln>
+            <a:tailEnd type="triangle"/>
+          </a:ln>
+        </p:spPr>
+        <p:style>
+          <a:lnRef idx="2">
+            <a:schemeClr val="accent1"/>
+          </a:lnRef>
+          <a:fillRef idx="0">
+            <a:schemeClr val="accent1"/>
+          </a:fillRef>
+          <a:effectRef idx="1">
+            <a:schemeClr val="accent1"/>
+          </a:effectRef>
+          <a:fontRef idx="minor">
+            <a:schemeClr val="tx1"/>
+          </a:fontRef>
+        </p:style>
+      </p:cxnSp>
+      <p:cxnSp>
+        <p:nvCxnSpPr>
+          <p:cNvPr id="29" name="Connecteur droit avec flèche 28">
+            <a:extLst>
+              <a:ext uri="{FF2B5EF4-FFF2-40B4-BE49-F238E27FC236}">
+                <a16:creationId xmlns:a16="http://schemas.microsoft.com/office/drawing/2014/main" id="{FEC80921-839A-3332-52F7-BDCDBABF9C77}"/>
+              </a:ext>
+            </a:extLst>
+          </p:cNvPr>
+          <p:cNvCxnSpPr>
+            <a:cxnSpLocks/>
+            <a:stCxn id="64" idx="2"/>
+            <a:endCxn id="12" idx="0"/>
+          </p:cNvCxnSpPr>
+          <p:nvPr/>
+        </p:nvCxnSpPr>
+        <p:spPr>
+          <a:xfrm>
+            <a:off x="6806877" y="2671779"/>
+            <a:ext cx="2496150" cy="757220"/>
+          </a:xfrm>
+          <a:prstGeom prst="straightConnector1">
+            <a:avLst/>
+          </a:prstGeom>
+          <a:ln>
+            <a:tailEnd type="triangle"/>
+          </a:ln>
+        </p:spPr>
+        <p:style>
+          <a:lnRef idx="2">
+            <a:schemeClr val="accent1"/>
+          </a:lnRef>
+          <a:fillRef idx="0">
+            <a:schemeClr val="accent1"/>
+          </a:fillRef>
+          <a:effectRef idx="1">
+            <a:schemeClr val="accent1"/>
+          </a:effectRef>
+          <a:fontRef idx="minor">
+            <a:schemeClr val="tx1"/>
+          </a:fontRef>
+        </p:style>
+      </p:cxnSp>
+      <p:sp>
+        <p:nvSpPr>
+          <p:cNvPr id="53" name="Organigramme : Opération manuelle 52">
+            <a:extLst>
+              <a:ext uri="{FF2B5EF4-FFF2-40B4-BE49-F238E27FC236}">
+                <a16:creationId xmlns:a16="http://schemas.microsoft.com/office/drawing/2014/main" id="{8495F66E-259C-02C8-E868-589514E7CF24}"/>
+              </a:ext>
+            </a:extLst>
+          </p:cNvPr>
+          <p:cNvSpPr/>
+          <p:nvPr/>
+        </p:nvSpPr>
+        <p:spPr>
+          <a:xfrm>
+            <a:off x="2232650" y="4847841"/>
+            <a:ext cx="2496151" cy="532449"/>
+          </a:xfrm>
+          <a:prstGeom prst="flowChartManualOperation">
+            <a:avLst/>
+          </a:prstGeom>
+        </p:spPr>
+        <p:style>
+          <a:lnRef idx="2">
+            <a:schemeClr val="accent1">
+              <a:shade val="15000"/>
+            </a:schemeClr>
+          </a:lnRef>
+          <a:fillRef idx="1">
+            <a:schemeClr val="accent1"/>
+          </a:fillRef>
+          <a:effectRef idx="0">
+            <a:schemeClr val="accent1"/>
+          </a:effectRef>
+          <a:fontRef idx="minor">
+            <a:schemeClr val="lt1"/>
+          </a:fontRef>
+        </p:style>
+        <p:txBody>
+          <a:bodyPr rtlCol="0" anchor="ctr"/>
+          <a:lstStyle/>
+          <a:p>
+            <a:pPr algn="ctr"/>
+            <a:r>
+              <a:rPr lang="fr-FR" dirty="0"/>
+              <a:t>Classifieur</a:t>
+            </a:r>
+          </a:p>
+        </p:txBody>
+      </p:sp>
+      <p:sp>
+        <p:nvSpPr>
+          <p:cNvPr id="66" name="Organigramme : Opération manuelle 65">
+            <a:extLst>
+              <a:ext uri="{FF2B5EF4-FFF2-40B4-BE49-F238E27FC236}">
+                <a16:creationId xmlns:a16="http://schemas.microsoft.com/office/drawing/2014/main" id="{3E415B51-9A33-F199-F8F1-84E064974FCB}"/>
+              </a:ext>
+            </a:extLst>
+          </p:cNvPr>
+          <p:cNvSpPr/>
+          <p:nvPr/>
+        </p:nvSpPr>
+        <p:spPr>
+          <a:xfrm>
+            <a:off x="7241978" y="4847841"/>
+            <a:ext cx="2496151" cy="532449"/>
+          </a:xfrm>
+          <a:prstGeom prst="flowChartManualOperation">
+            <a:avLst/>
+          </a:prstGeom>
+        </p:spPr>
+        <p:style>
+          <a:lnRef idx="2">
+            <a:schemeClr val="accent1">
+              <a:shade val="15000"/>
+            </a:schemeClr>
+          </a:lnRef>
+          <a:fillRef idx="1">
+            <a:schemeClr val="accent1"/>
+          </a:fillRef>
+          <a:effectRef idx="0">
+            <a:schemeClr val="accent1"/>
+          </a:effectRef>
+          <a:fontRef idx="minor">
+            <a:schemeClr val="lt1"/>
+          </a:fontRef>
+        </p:style>
+        <p:txBody>
+          <a:bodyPr rtlCol="0" anchor="ctr"/>
+          <a:lstStyle/>
+          <a:p>
+            <a:pPr algn="ctr"/>
+            <a:r>
+              <a:rPr lang="fr-FR" dirty="0"/>
+              <a:t>Classifieur</a:t>
+            </a:r>
+          </a:p>
+        </p:txBody>
+      </p:sp>
+      <p:sp>
+        <p:nvSpPr>
+          <p:cNvPr id="67" name="ZoneTexte 66">
+            <a:extLst>
+              <a:ext uri="{FF2B5EF4-FFF2-40B4-BE49-F238E27FC236}">
+                <a16:creationId xmlns:a16="http://schemas.microsoft.com/office/drawing/2014/main" id="{CBD773E3-4459-CAA5-0387-970D8C528C2E}"/>
+              </a:ext>
+            </a:extLst>
+          </p:cNvPr>
+          <p:cNvSpPr txBox="1"/>
+          <p:nvPr/>
+        </p:nvSpPr>
+        <p:spPr>
+          <a:xfrm>
+            <a:off x="2290525" y="5734603"/>
+            <a:ext cx="734993" cy="369332"/>
+          </a:xfrm>
+          <a:prstGeom prst="rect">
+            <a:avLst/>
+          </a:prstGeom>
+          <a:noFill/>
+        </p:spPr>
+        <p:txBody>
+          <a:bodyPr wrap="square" rtlCol="0">
+            <a:spAutoFit/>
+          </a:bodyPr>
+          <a:lstStyle/>
+          <a:p>
+            <a:pPr algn="ctr"/>
+            <a:r>
+              <a:rPr lang="fr-FR" dirty="0"/>
+              <a:t>0</a:t>
+            </a:r>
+          </a:p>
+        </p:txBody>
+      </p:sp>
+      <p:sp>
+        <p:nvSpPr>
+          <p:cNvPr id="68" name="ZoneTexte 67">
+            <a:extLst>
+              <a:ext uri="{FF2B5EF4-FFF2-40B4-BE49-F238E27FC236}">
+                <a16:creationId xmlns:a16="http://schemas.microsoft.com/office/drawing/2014/main" id="{35B0E362-C395-6090-666D-23B5D88CFD1C}"/>
+              </a:ext>
+            </a:extLst>
+          </p:cNvPr>
+          <p:cNvSpPr txBox="1"/>
+          <p:nvPr/>
+        </p:nvSpPr>
+        <p:spPr>
+          <a:xfrm>
+            <a:off x="4001104" y="5738831"/>
+            <a:ext cx="734993" cy="369332"/>
+          </a:xfrm>
+          <a:prstGeom prst="rect">
+            <a:avLst/>
+          </a:prstGeom>
+          <a:noFill/>
+        </p:spPr>
+        <p:txBody>
+          <a:bodyPr wrap="square" rtlCol="0">
+            <a:spAutoFit/>
+          </a:bodyPr>
+          <a:lstStyle/>
+          <a:p>
+            <a:pPr algn="ctr"/>
+            <a:r>
+              <a:rPr lang="fr-FR" dirty="0"/>
+              <a:t>0</a:t>
+            </a:r>
+          </a:p>
+        </p:txBody>
+      </p:sp>
+      <p:sp>
+        <p:nvSpPr>
+          <p:cNvPr id="69" name="ZoneTexte 68">
+            <a:extLst>
+              <a:ext uri="{FF2B5EF4-FFF2-40B4-BE49-F238E27FC236}">
+                <a16:creationId xmlns:a16="http://schemas.microsoft.com/office/drawing/2014/main" id="{0CA21A84-29AB-E882-7F40-6E4DC5B788EF}"/>
+              </a:ext>
+            </a:extLst>
+          </p:cNvPr>
+          <p:cNvSpPr txBox="1"/>
+          <p:nvPr/>
+        </p:nvSpPr>
+        <p:spPr>
+          <a:xfrm>
+            <a:off x="7275530" y="5734603"/>
+            <a:ext cx="734993" cy="369332"/>
+          </a:xfrm>
+          <a:prstGeom prst="rect">
+            <a:avLst/>
+          </a:prstGeom>
+          <a:noFill/>
+        </p:spPr>
+        <p:txBody>
+          <a:bodyPr wrap="square" rtlCol="0">
+            <a:spAutoFit/>
+          </a:bodyPr>
+          <a:lstStyle/>
+          <a:p>
+            <a:pPr algn="ctr"/>
+            <a:r>
+              <a:rPr lang="fr-FR" dirty="0"/>
+              <a:t>9</a:t>
+            </a:r>
+          </a:p>
+        </p:txBody>
+      </p:sp>
+      <p:sp>
+        <p:nvSpPr>
+          <p:cNvPr id="70" name="ZoneTexte 69">
+            <a:extLst>
+              <a:ext uri="{FF2B5EF4-FFF2-40B4-BE49-F238E27FC236}">
+                <a16:creationId xmlns:a16="http://schemas.microsoft.com/office/drawing/2014/main" id="{32C22206-4A5E-39A6-74A6-0E3AFE639E03}"/>
+              </a:ext>
+            </a:extLst>
+          </p:cNvPr>
+          <p:cNvSpPr txBox="1"/>
+          <p:nvPr/>
+        </p:nvSpPr>
+        <p:spPr>
+          <a:xfrm>
+            <a:off x="8927208" y="5750253"/>
+            <a:ext cx="734993" cy="369332"/>
+          </a:xfrm>
+          <a:prstGeom prst="rect">
+            <a:avLst/>
+          </a:prstGeom>
+          <a:noFill/>
+        </p:spPr>
+        <p:txBody>
+          <a:bodyPr wrap="square" rtlCol="0">
+            <a:spAutoFit/>
+          </a:bodyPr>
+          <a:lstStyle/>
+          <a:p>
+            <a:pPr algn="ctr"/>
+            <a:r>
+              <a:rPr lang="fr-FR" dirty="0"/>
+              <a:t>9</a:t>
+            </a:r>
+          </a:p>
+        </p:txBody>
+      </p:sp>
+      <p:cxnSp>
+        <p:nvCxnSpPr>
+          <p:cNvPr id="71" name="Connecteur droit avec flèche 70">
+            <a:extLst>
+              <a:ext uri="{FF2B5EF4-FFF2-40B4-BE49-F238E27FC236}">
+                <a16:creationId xmlns:a16="http://schemas.microsoft.com/office/drawing/2014/main" id="{C84C8896-FB4D-E93F-E005-1D33309699E4}"/>
+              </a:ext>
+            </a:extLst>
+          </p:cNvPr>
+          <p:cNvCxnSpPr/>
+          <p:nvPr/>
+        </p:nvCxnSpPr>
+        <p:spPr>
+          <a:xfrm>
+            <a:off x="2650726" y="4241007"/>
+            <a:ext cx="0" cy="1497661"/>
+          </a:xfrm>
+          <a:prstGeom prst="straightConnector1">
+            <a:avLst/>
+          </a:prstGeom>
+          <a:ln>
+            <a:tailEnd type="triangle"/>
+          </a:ln>
+        </p:spPr>
+        <p:style>
+          <a:lnRef idx="2">
+            <a:schemeClr val="accent1"/>
+          </a:lnRef>
+          <a:fillRef idx="0">
+            <a:schemeClr val="accent1"/>
+          </a:fillRef>
+          <a:effectRef idx="1">
+            <a:schemeClr val="accent1"/>
+          </a:effectRef>
+          <a:fontRef idx="minor">
+            <a:schemeClr val="tx1"/>
+          </a:fontRef>
+        </p:style>
+      </p:cxnSp>
+      <p:cxnSp>
+        <p:nvCxnSpPr>
+          <p:cNvPr id="72" name="Connecteur droit avec flèche 71">
+            <a:extLst>
+              <a:ext uri="{FF2B5EF4-FFF2-40B4-BE49-F238E27FC236}">
+                <a16:creationId xmlns:a16="http://schemas.microsoft.com/office/drawing/2014/main" id="{F6F35E19-8CE9-79C8-0824-3BDF25B305B6}"/>
+              </a:ext>
+            </a:extLst>
+          </p:cNvPr>
+          <p:cNvCxnSpPr/>
+          <p:nvPr/>
+        </p:nvCxnSpPr>
+        <p:spPr>
+          <a:xfrm>
+            <a:off x="4347504" y="4241007"/>
+            <a:ext cx="0" cy="1497661"/>
+          </a:xfrm>
+          <a:prstGeom prst="straightConnector1">
+            <a:avLst/>
+          </a:prstGeom>
+          <a:ln>
+            <a:tailEnd type="triangle"/>
+          </a:ln>
+        </p:spPr>
+        <p:style>
+          <a:lnRef idx="2">
+            <a:schemeClr val="accent1"/>
+          </a:lnRef>
+          <a:fillRef idx="0">
+            <a:schemeClr val="accent1"/>
+          </a:fillRef>
+          <a:effectRef idx="1">
+            <a:schemeClr val="accent1"/>
+          </a:effectRef>
+          <a:fontRef idx="minor">
+            <a:schemeClr val="tx1"/>
+          </a:fontRef>
+        </p:style>
+      </p:cxnSp>
+      <p:cxnSp>
+        <p:nvCxnSpPr>
+          <p:cNvPr id="73" name="Connecteur droit avec flèche 72">
+            <a:extLst>
+              <a:ext uri="{FF2B5EF4-FFF2-40B4-BE49-F238E27FC236}">
+                <a16:creationId xmlns:a16="http://schemas.microsoft.com/office/drawing/2014/main" id="{A9E0C565-53F0-6F5C-BE67-4D1960705522}"/>
+              </a:ext>
+            </a:extLst>
+          </p:cNvPr>
+          <p:cNvCxnSpPr/>
+          <p:nvPr/>
+        </p:nvCxnSpPr>
+        <p:spPr>
+          <a:xfrm>
+            <a:off x="7643026" y="4241007"/>
+            <a:ext cx="0" cy="1497661"/>
+          </a:xfrm>
+          <a:prstGeom prst="straightConnector1">
+            <a:avLst/>
+          </a:prstGeom>
+          <a:ln>
+            <a:tailEnd type="triangle"/>
+          </a:ln>
+        </p:spPr>
+        <p:style>
+          <a:lnRef idx="2">
+            <a:schemeClr val="accent1"/>
+          </a:lnRef>
+          <a:fillRef idx="0">
+            <a:schemeClr val="accent1"/>
+          </a:fillRef>
+          <a:effectRef idx="1">
+            <a:schemeClr val="accent1"/>
+          </a:effectRef>
+          <a:fontRef idx="minor">
+            <a:schemeClr val="tx1"/>
+          </a:fontRef>
+        </p:style>
+      </p:cxnSp>
+      <p:cxnSp>
+        <p:nvCxnSpPr>
+          <p:cNvPr id="74" name="Connecteur droit avec flèche 73">
+            <a:extLst>
+              <a:ext uri="{FF2B5EF4-FFF2-40B4-BE49-F238E27FC236}">
+                <a16:creationId xmlns:a16="http://schemas.microsoft.com/office/drawing/2014/main" id="{9E2D0394-7BF6-BECA-2572-7906F2506C12}"/>
+              </a:ext>
+            </a:extLst>
+          </p:cNvPr>
+          <p:cNvCxnSpPr/>
+          <p:nvPr/>
+        </p:nvCxnSpPr>
+        <p:spPr>
+          <a:xfrm>
+            <a:off x="9303027" y="4241007"/>
+            <a:ext cx="0" cy="1497661"/>
+          </a:xfrm>
+          <a:prstGeom prst="straightConnector1">
+            <a:avLst/>
+          </a:prstGeom>
+          <a:ln>
+            <a:tailEnd type="triangle"/>
+          </a:ln>
+        </p:spPr>
+        <p:style>
+          <a:lnRef idx="2">
+            <a:schemeClr val="accent1"/>
+          </a:lnRef>
+          <a:fillRef idx="0">
+            <a:schemeClr val="accent1"/>
+          </a:fillRef>
+          <a:effectRef idx="1">
+            <a:schemeClr val="accent1"/>
+          </a:effectRef>
+          <a:fontRef idx="minor">
+            <a:schemeClr val="tx1"/>
+          </a:fontRef>
+        </p:style>
+      </p:cxnSp>
+    </p:spTree>
+    <p:extLst>
+      <p:ext uri="{BB962C8B-B14F-4D97-AF65-F5344CB8AC3E}">
+        <p14:creationId xmlns:p14="http://schemas.microsoft.com/office/powerpoint/2010/main" val="460335407"/>
+      </p:ext>
+    </p:extLst>
+  </p:cSld>
+  <p:clrMapOvr>
+    <a:masterClrMapping/>
+  </p:clrMapOvr>
+</p:sld>
+</file>
+
+<file path=ppt/slides/slide25.xml><?xml version="1.0" encoding="utf-8"?>
+<p:sld xmlns:a="http://schemas.openxmlformats.org/drawingml/2006/main" xmlns:r="http://schemas.openxmlformats.org/officeDocument/2006/relationships" xmlns:p="http://schemas.openxmlformats.org/presentationml/2006/main">
+  <p:cSld>
+    <p:spTree>
+      <p:nvGrpSpPr>
+        <p:cNvPr id="1" name="">
+          <a:extLst>
+            <a:ext uri="{FF2B5EF4-FFF2-40B4-BE49-F238E27FC236}">
+              <a16:creationId xmlns:a16="http://schemas.microsoft.com/office/drawing/2014/main" id="{1521B1C2-639D-3C8E-D1A8-3F79E589293C}"/>
+            </a:ext>
+          </a:extLst>
+        </p:cNvPr>
+        <p:cNvGrpSpPr/>
+        <p:nvPr/>
+      </p:nvGrpSpPr>
+      <p:grpSpPr>
+        <a:xfrm>
+          <a:off x="0" y="0"/>
+          <a:ext cx="0" cy="0"/>
+          <a:chOff x="0" y="0"/>
+          <a:chExt cx="0" cy="0"/>
+        </a:xfrm>
+      </p:grpSpPr>
+      <p:sp>
+        <p:nvSpPr>
+          <p:cNvPr id="4" name="Titre 3">
+            <a:extLst>
+              <a:ext uri="{FF2B5EF4-FFF2-40B4-BE49-F238E27FC236}">
+                <a16:creationId xmlns:a16="http://schemas.microsoft.com/office/drawing/2014/main" id="{5E698441-28D0-7C64-AC4E-698BA9CCB60C}"/>
+              </a:ext>
+            </a:extLst>
+          </p:cNvPr>
+          <p:cNvSpPr>
+            <a:spLocks noGrp="1"/>
+          </p:cNvSpPr>
+          <p:nvPr>
+            <p:ph type="title"/>
+          </p:nvPr>
+        </p:nvSpPr>
+        <p:spPr/>
+        <p:txBody>
+          <a:bodyPr/>
+          <a:lstStyle/>
+          <a:p>
+            <a:r>
+              <a:rPr lang="fr-FR" dirty="0"/>
+              <a:t>Résultats expérimentaux</a:t>
+            </a:r>
+          </a:p>
+        </p:txBody>
+      </p:sp>
+      <p:sp>
+        <p:nvSpPr>
+          <p:cNvPr id="3" name="Espace réservé du texte 2">
+            <a:extLst>
+              <a:ext uri="{FF2B5EF4-FFF2-40B4-BE49-F238E27FC236}">
+                <a16:creationId xmlns:a16="http://schemas.microsoft.com/office/drawing/2014/main" id="{5A8FC807-E4D0-96C1-F7FF-208BF7FA5264}"/>
+              </a:ext>
+            </a:extLst>
+          </p:cNvPr>
+          <p:cNvSpPr>
+            <a:spLocks noGrp="1"/>
+          </p:cNvSpPr>
+          <p:nvPr>
+            <p:ph type="body" idx="1"/>
+          </p:nvPr>
+        </p:nvSpPr>
+        <p:spPr/>
+        <p:txBody>
+          <a:bodyPr/>
+          <a:lstStyle/>
+          <a:p>
+            <a:endParaRPr lang="fr-FR"/>
+          </a:p>
+        </p:txBody>
+      </p:sp>
+    </p:spTree>
+    <p:extLst>
+      <p:ext uri="{BB962C8B-B14F-4D97-AF65-F5344CB8AC3E}">
+        <p14:creationId xmlns:p14="http://schemas.microsoft.com/office/powerpoint/2010/main" val="3851953468"/>
+      </p:ext>
+    </p:extLst>
+  </p:cSld>
+  <p:clrMapOvr>
+    <a:masterClrMapping/>
+  </p:clrMapOvr>
+</p:sld>
+</file>
+
+<file path=ppt/slides/slide26.xml><?xml version="1.0" encoding="utf-8"?>
+<p:sld xmlns:a="http://schemas.openxmlformats.org/drawingml/2006/main" xmlns:r="http://schemas.openxmlformats.org/officeDocument/2006/relationships" xmlns:p="http://schemas.openxmlformats.org/presentationml/2006/main">
+  <p:cSld>
+    <p:spTree>
+      <p:nvGrpSpPr>
+        <p:cNvPr id="1" name="">
+          <a:extLst>
+            <a:ext uri="{FF2B5EF4-FFF2-40B4-BE49-F238E27FC236}">
+              <a16:creationId xmlns:a16="http://schemas.microsoft.com/office/drawing/2014/main" id="{094866A7-8450-103C-0D3C-61722B59E960}"/>
+            </a:ext>
+          </a:extLst>
+        </p:cNvPr>
+        <p:cNvGrpSpPr/>
+        <p:nvPr/>
+      </p:nvGrpSpPr>
+      <p:grpSpPr>
+        <a:xfrm>
+          <a:off x="0" y="0"/>
+          <a:ext cx="0" cy="0"/>
+          <a:chOff x="0" y="0"/>
+          <a:chExt cx="0" cy="0"/>
+        </a:xfrm>
+      </p:grpSpPr>
+      <p:sp>
+        <p:nvSpPr>
+          <p:cNvPr id="4" name="Titre 3">
+            <a:extLst>
+              <a:ext uri="{FF2B5EF4-FFF2-40B4-BE49-F238E27FC236}">
+                <a16:creationId xmlns:a16="http://schemas.microsoft.com/office/drawing/2014/main" id="{33DEFD9E-3A54-4A41-5E4D-D8882A45FAF9}"/>
+              </a:ext>
+            </a:extLst>
+          </p:cNvPr>
+          <p:cNvSpPr>
+            <a:spLocks noGrp="1"/>
+          </p:cNvSpPr>
+          <p:nvPr>
+            <p:ph type="title"/>
+          </p:nvPr>
+        </p:nvSpPr>
+        <p:spPr/>
+        <p:txBody>
+          <a:bodyPr>
+            <a:normAutofit/>
+          </a:bodyPr>
+          <a:lstStyle/>
+          <a:p>
+            <a:r>
+              <a:rPr lang="fr-FR" dirty="0"/>
+              <a:t>Résultats expérimentaux</a:t>
+            </a:r>
+            <a:br>
+              <a:rPr lang="fr-FR" sz="2400" dirty="0"/>
+            </a:br>
+            <a:r>
+              <a:rPr lang="fr-FR" sz="2400" dirty="0">
+                <a:solidFill>
+                  <a:schemeClr val="tx1">
+                    <a:lumMod val="65000"/>
+                    <a:lumOff val="35000"/>
+                  </a:schemeClr>
+                </a:solidFill>
+              </a:rPr>
+              <a:t>Détection de l’obscuration</a:t>
+            </a:r>
+            <a:endParaRPr lang="fr-FR" sz="2400" dirty="0"/>
+          </a:p>
+        </p:txBody>
+      </p:sp>
+      <p:pic>
+        <p:nvPicPr>
+          <p:cNvPr id="6" name="Image 5">
+            <a:extLst>
+              <a:ext uri="{FF2B5EF4-FFF2-40B4-BE49-F238E27FC236}">
+                <a16:creationId xmlns:a16="http://schemas.microsoft.com/office/drawing/2014/main" id="{997CD9AA-2C61-C6D8-B98C-A3047AD84D58}"/>
+              </a:ext>
+            </a:extLst>
+          </p:cNvPr>
+          <p:cNvPicPr>
+            <a:picLocks noChangeAspect="1"/>
+          </p:cNvPicPr>
+          <p:nvPr/>
+        </p:nvPicPr>
+        <p:blipFill>
+          <a:blip r:embed="rId2"/>
+          <a:stretch>
+            <a:fillRect/>
+          </a:stretch>
+        </p:blipFill>
+        <p:spPr>
+          <a:xfrm>
+            <a:off x="3051072" y="1620991"/>
+            <a:ext cx="6089855" cy="4871884"/>
+          </a:xfrm>
+          <a:prstGeom prst="rect">
+            <a:avLst/>
+          </a:prstGeom>
+        </p:spPr>
+      </p:pic>
+    </p:spTree>
+    <p:extLst>
+      <p:ext uri="{BB962C8B-B14F-4D97-AF65-F5344CB8AC3E}">
+        <p14:creationId xmlns:p14="http://schemas.microsoft.com/office/powerpoint/2010/main" val="275169876"/>
+      </p:ext>
+    </p:extLst>
+  </p:cSld>
+  <p:clrMapOvr>
+    <a:masterClrMapping/>
+  </p:clrMapOvr>
+</p:sld>
+</file>
+
+<file path=ppt/slides/slide27.xml><?xml version="1.0" encoding="utf-8"?>
+<p:sld xmlns:a="http://schemas.openxmlformats.org/drawingml/2006/main" xmlns:r="http://schemas.openxmlformats.org/officeDocument/2006/relationships" xmlns:p="http://schemas.openxmlformats.org/presentationml/2006/main">
+  <p:cSld>
+    <p:spTree>
+      <p:nvGrpSpPr>
+        <p:cNvPr id="1" name="">
+          <a:extLst>
+            <a:ext uri="{FF2B5EF4-FFF2-40B4-BE49-F238E27FC236}">
+              <a16:creationId xmlns:a16="http://schemas.microsoft.com/office/drawing/2014/main" id="{0F7ED6FE-C2C4-77C4-CF26-5497D4CBF904}"/>
+            </a:ext>
+          </a:extLst>
+        </p:cNvPr>
+        <p:cNvGrpSpPr/>
+        <p:nvPr/>
+      </p:nvGrpSpPr>
+      <p:grpSpPr>
+        <a:xfrm>
+          <a:off x="0" y="0"/>
+          <a:ext cx="0" cy="0"/>
+          <a:chOff x="0" y="0"/>
+          <a:chExt cx="0" cy="0"/>
+        </a:xfrm>
+      </p:grpSpPr>
+      <p:sp>
+        <p:nvSpPr>
+          <p:cNvPr id="4" name="Titre 3">
+            <a:extLst>
+              <a:ext uri="{FF2B5EF4-FFF2-40B4-BE49-F238E27FC236}">
+                <a16:creationId xmlns:a16="http://schemas.microsoft.com/office/drawing/2014/main" id="{AD4324FB-DF1E-8F23-BEF6-D17492A11206}"/>
+              </a:ext>
+            </a:extLst>
+          </p:cNvPr>
+          <p:cNvSpPr>
+            <a:spLocks noGrp="1"/>
+          </p:cNvSpPr>
+          <p:nvPr>
+            <p:ph type="title"/>
+          </p:nvPr>
+        </p:nvSpPr>
+        <p:spPr/>
+        <p:txBody>
+          <a:bodyPr>
+            <a:normAutofit/>
+          </a:bodyPr>
+          <a:lstStyle/>
+          <a:p>
+            <a:r>
+              <a:rPr lang="fr-FR" dirty="0"/>
+              <a:t>Résultats expérimentaux</a:t>
+            </a:r>
+            <a:br>
+              <a:rPr lang="fr-FR" sz="2400" dirty="0"/>
+            </a:br>
+            <a:r>
+              <a:rPr lang="fr-FR" sz="2400" dirty="0">
+                <a:solidFill>
+                  <a:schemeClr val="tx1">
+                    <a:lumMod val="65000"/>
+                    <a:lumOff val="35000"/>
+                  </a:schemeClr>
+                </a:solidFill>
+              </a:rPr>
+              <a:t>Reconnaissance de la classe source</a:t>
+            </a:r>
+            <a:endParaRPr lang="fr-FR" sz="2400" dirty="0"/>
+          </a:p>
+        </p:txBody>
+      </p:sp>
+      <p:pic>
+        <p:nvPicPr>
+          <p:cNvPr id="3" name="Image 2">
+            <a:extLst>
+              <a:ext uri="{FF2B5EF4-FFF2-40B4-BE49-F238E27FC236}">
+                <a16:creationId xmlns:a16="http://schemas.microsoft.com/office/drawing/2014/main" id="{0F5D7D21-B7C0-694F-27EF-9558414BEC1A}"/>
+              </a:ext>
+            </a:extLst>
+          </p:cNvPr>
+          <p:cNvPicPr>
+            <a:picLocks noChangeAspect="1"/>
+          </p:cNvPicPr>
+          <p:nvPr/>
+        </p:nvPicPr>
+        <p:blipFill>
+          <a:blip r:embed="rId2"/>
+          <a:stretch>
+            <a:fillRect/>
+          </a:stretch>
+        </p:blipFill>
+        <p:spPr>
+          <a:xfrm>
+            <a:off x="3051072" y="1620991"/>
+            <a:ext cx="6089855" cy="4871884"/>
+          </a:xfrm>
+          <a:prstGeom prst="rect">
+            <a:avLst/>
+          </a:prstGeom>
+        </p:spPr>
+      </p:pic>
+    </p:spTree>
+    <p:extLst>
+      <p:ext uri="{BB962C8B-B14F-4D97-AF65-F5344CB8AC3E}">
+        <p14:creationId xmlns:p14="http://schemas.microsoft.com/office/powerpoint/2010/main" val="2697467602"/>
+      </p:ext>
+    </p:extLst>
+  </p:cSld>
+  <p:clrMapOvr>
+    <a:masterClrMapping/>
+  </p:clrMapOvr>
+</p:sld>
+</file>
+
+<file path=ppt/slides/slide28.xml><?xml version="1.0" encoding="utf-8"?>
+<p:sld xmlns:a="http://schemas.openxmlformats.org/drawingml/2006/main" xmlns:r="http://schemas.openxmlformats.org/officeDocument/2006/relationships" xmlns:p="http://schemas.openxmlformats.org/presentationml/2006/main">
+  <p:cSld>
+    <p:spTree>
+      <p:nvGrpSpPr>
+        <p:cNvPr id="1" name="">
+          <a:extLst>
+            <a:ext uri="{FF2B5EF4-FFF2-40B4-BE49-F238E27FC236}">
+              <a16:creationId xmlns:a16="http://schemas.microsoft.com/office/drawing/2014/main" id="{6D5B0FF0-D8F9-C769-7A64-6AD0A50C921F}"/>
+            </a:ext>
+          </a:extLst>
+        </p:cNvPr>
+        <p:cNvGrpSpPr/>
+        <p:nvPr/>
+      </p:nvGrpSpPr>
+      <p:grpSpPr>
+        <a:xfrm>
+          <a:off x="0" y="0"/>
+          <a:ext cx="0" cy="0"/>
+          <a:chOff x="0" y="0"/>
+          <a:chExt cx="0" cy="0"/>
+        </a:xfrm>
+      </p:grpSpPr>
+      <p:sp>
+        <p:nvSpPr>
+          <p:cNvPr id="4" name="Titre 3">
+            <a:extLst>
+              <a:ext uri="{FF2B5EF4-FFF2-40B4-BE49-F238E27FC236}">
+                <a16:creationId xmlns:a16="http://schemas.microsoft.com/office/drawing/2014/main" id="{F1C0F03A-00C9-4C00-9802-C712BFF0FE98}"/>
+              </a:ext>
+            </a:extLst>
+          </p:cNvPr>
+          <p:cNvSpPr>
+            <a:spLocks noGrp="1"/>
+          </p:cNvSpPr>
+          <p:nvPr>
+            <p:ph type="title"/>
+          </p:nvPr>
+        </p:nvSpPr>
+        <p:spPr/>
+        <p:txBody>
+          <a:bodyPr/>
+          <a:lstStyle/>
+          <a:p>
+            <a:r>
+              <a:rPr lang="fr-FR" dirty="0"/>
+              <a:t>Conclusion</a:t>
+            </a:r>
+          </a:p>
+        </p:txBody>
+      </p:sp>
+      <p:sp>
+        <p:nvSpPr>
+          <p:cNvPr id="2" name="Espace réservé du texte 1">
+            <a:extLst>
+              <a:ext uri="{FF2B5EF4-FFF2-40B4-BE49-F238E27FC236}">
+                <a16:creationId xmlns:a16="http://schemas.microsoft.com/office/drawing/2014/main" id="{7B4AEEAB-3777-F2BC-884D-17E2D71E6971}"/>
+              </a:ext>
+            </a:extLst>
+          </p:cNvPr>
+          <p:cNvSpPr>
+            <a:spLocks noGrp="1"/>
+          </p:cNvSpPr>
+          <p:nvPr>
+            <p:ph type="body" idx="1"/>
+          </p:nvPr>
+        </p:nvSpPr>
+        <p:spPr/>
+        <p:txBody>
+          <a:bodyPr/>
+          <a:lstStyle/>
+          <a:p>
+            <a:endParaRPr lang="fr-FR" dirty="0"/>
+          </a:p>
+        </p:txBody>
+      </p:sp>
+    </p:spTree>
+    <p:extLst>
+      <p:ext uri="{BB962C8B-B14F-4D97-AF65-F5344CB8AC3E}">
+        <p14:creationId xmlns:p14="http://schemas.microsoft.com/office/powerpoint/2010/main" val="2394037337"/>
       </p:ext>
     </p:extLst>
   </p:cSld>
@@ -5131,7 +10258,7 @@
         <p:cNvPr id="1" name="">
           <a:extLst>
             <a:ext uri="{FF2B5EF4-FFF2-40B4-BE49-F238E27FC236}">
-              <a16:creationId xmlns:a16="http://schemas.microsoft.com/office/drawing/2014/main" id="{C17B8F47-BCE2-68CB-F800-09787E329657}"/>
+              <a16:creationId xmlns:a16="http://schemas.microsoft.com/office/drawing/2014/main" id="{76759C39-9BC5-BE51-A987-864709510B8D}"/>
             </a:ext>
           </a:extLst>
         </p:cNvPr>
@@ -5151,7 +10278,7 @@
           <p:cNvPr id="4" name="Titre 3">
             <a:extLst>
               <a:ext uri="{FF2B5EF4-FFF2-40B4-BE49-F238E27FC236}">
-                <a16:creationId xmlns:a16="http://schemas.microsoft.com/office/drawing/2014/main" id="{CBD479F2-727F-3E4F-7BFF-C6357A508FE2}"/>
+                <a16:creationId xmlns:a16="http://schemas.microsoft.com/office/drawing/2014/main" id="{F455AE13-BA44-7E91-AAA0-EEB8193AEFFF}"/>
               </a:ext>
             </a:extLst>
           </p:cNvPr>
@@ -5167,6 +10294,7 @@
           <a:bodyPr/>
           <a:lstStyle/>
           <a:p>
+            <a:pPr algn="l"/>
             <a:r>
               <a:rPr lang="fr-FR" dirty="0"/>
               <a:t>Méthode d’obscuration</a:t>
@@ -5176,10 +10304,10 @@
       </p:sp>
       <p:sp>
         <p:nvSpPr>
-          <p:cNvPr id="2" name="Espace réservé du texte 1">
-            <a:extLst>
-              <a:ext uri="{FF2B5EF4-FFF2-40B4-BE49-F238E27FC236}">
-                <a16:creationId xmlns:a16="http://schemas.microsoft.com/office/drawing/2014/main" id="{CBC79F00-BB2A-7AC2-883A-C7311A049D72}"/>
+          <p:cNvPr id="5" name="Espace réservé du texte 4">
+            <a:extLst>
+              <a:ext uri="{FF2B5EF4-FFF2-40B4-BE49-F238E27FC236}">
+                <a16:creationId xmlns:a16="http://schemas.microsoft.com/office/drawing/2014/main" id="{4CE98A7F-01DE-2A4D-66CB-0D04F63E11FC}"/>
               </a:ext>
             </a:extLst>
           </p:cNvPr>
@@ -5202,7 +10330,7 @@
     </p:spTree>
     <p:extLst>
       <p:ext uri="{BB962C8B-B14F-4D97-AF65-F5344CB8AC3E}">
-        <p14:creationId xmlns:p14="http://schemas.microsoft.com/office/powerpoint/2010/main" val="63802432"/>
+        <p14:creationId xmlns:p14="http://schemas.microsoft.com/office/powerpoint/2010/main" val="1303210412"/>
       </p:ext>
     </p:extLst>
   </p:cSld>
@@ -5258,8 +10386,30 @@
           <a:p>
             <a:r>
               <a:rPr lang="fr-FR" dirty="0"/>
+              <a:t>Méthode d’obscuration</a:t>
+            </a:r>
+            <a:br>
+              <a:rPr lang="fr-FR" dirty="0"/>
+            </a:br>
+            <a:r>
+              <a:rPr lang="fr-FR" sz="2400" dirty="0">
+                <a:solidFill>
+                  <a:schemeClr val="tx1">
+                    <a:lumMod val="65000"/>
+                    <a:lumOff val="35000"/>
+                  </a:schemeClr>
+                </a:solidFill>
+              </a:rPr>
               <a:t>Pipeline</a:t>
             </a:r>
+            <a:endParaRPr lang="fr-FR" dirty="0">
+              <a:solidFill>
+                <a:schemeClr val="tx1">
+                  <a:lumMod val="65000"/>
+                  <a:lumOff val="35000"/>
+                </a:schemeClr>
+              </a:solidFill>
+            </a:endParaRPr>
           </a:p>
         </p:txBody>
       </p:sp>
@@ -5291,7 +10441,7 @@
         </p:blipFill>
         <p:spPr>
           <a:xfrm>
-            <a:off x="1797091" y="1544062"/>
+            <a:off x="1797091" y="1721043"/>
             <a:ext cx="8597817" cy="4948813"/>
           </a:xfrm>
           <a:prstGeom prst="rect">
@@ -5327,7 +10477,7 @@
         </p:blipFill>
         <p:spPr>
           <a:xfrm>
-            <a:off x="8471336" y="2969596"/>
+            <a:off x="8471336" y="3146577"/>
             <a:ext cx="346795" cy="346795"/>
           </a:xfrm>
           <a:prstGeom prst="rect">
@@ -5363,7 +10513,7 @@
         </p:blipFill>
         <p:spPr>
           <a:xfrm>
-            <a:off x="3337033" y="4667017"/>
+            <a:off x="3337033" y="4843998"/>
             <a:ext cx="346795" cy="346795"/>
           </a:xfrm>
           <a:prstGeom prst="rect">
@@ -5385,7 +10535,7 @@
         </p:nvSpPr>
         <p:spPr>
           <a:xfrm>
-            <a:off x="2245489" y="1435261"/>
+            <a:off x="2245489" y="1612242"/>
             <a:ext cx="8241174" cy="3472405"/>
           </a:xfrm>
           <a:custGeom>
@@ -5504,7 +10654,7 @@
         </p:nvSpPr>
         <p:spPr>
           <a:xfrm>
-            <a:off x="1562582" y="3345084"/>
+            <a:off x="1562582" y="3522065"/>
             <a:ext cx="5220183" cy="3183038"/>
           </a:xfrm>
           <a:custGeom>
@@ -5626,7 +10776,7 @@
         </p:nvSpPr>
         <p:spPr>
           <a:xfrm>
-            <a:off x="1562581" y="6032794"/>
+            <a:off x="1562581" y="6209775"/>
             <a:ext cx="3935392" cy="523220"/>
           </a:xfrm>
           <a:prstGeom prst="rect">
@@ -5676,7 +10826,7 @@
         </p:nvSpPr>
         <p:spPr>
           <a:xfrm>
-            <a:off x="7017275" y="4343851"/>
+            <a:off x="7017275" y="4520832"/>
             <a:ext cx="3377634" cy="523220"/>
           </a:xfrm>
           <a:prstGeom prst="rect">
@@ -5766,8 +10916,23 @@
           <a:p>
             <a:r>
               <a:rPr lang="fr-FR" dirty="0"/>
+              <a:t>Méthode d’obscuration</a:t>
+            </a:r>
+            <a:br>
+              <a:rPr lang="fr-FR" dirty="0"/>
+            </a:br>
+            <a:r>
+              <a:rPr lang="fr-FR" sz="2400" dirty="0">
+                <a:solidFill>
+                  <a:schemeClr val="tx1">
+                    <a:lumMod val="65000"/>
+                    <a:lumOff val="35000"/>
+                  </a:schemeClr>
+                </a:solidFill>
+              </a:rPr>
               <a:t>Obscuration</a:t>
             </a:r>
+            <a:endParaRPr lang="fr-FR" dirty="0"/>
           </a:p>
         </p:txBody>
       </p:sp>
@@ -5799,7 +10964,7 @@
         </p:blipFill>
         <p:spPr>
           <a:xfrm>
-            <a:off x="1797091" y="1544062"/>
+            <a:off x="1797091" y="1662050"/>
             <a:ext cx="8597817" cy="4948813"/>
           </a:xfrm>
           <a:prstGeom prst="rect">
@@ -5823,7 +10988,7 @@
         </p:nvCxnSpPr>
         <p:spPr>
           <a:xfrm flipH="1">
-            <a:off x="6319777" y="2245489"/>
+            <a:off x="6319777" y="2363477"/>
             <a:ext cx="1053297" cy="0"/>
           </a:xfrm>
           <a:prstGeom prst="straightConnector1">
@@ -5864,7 +11029,7 @@
         </p:nvCxnSpPr>
         <p:spPr>
           <a:xfrm flipH="1">
-            <a:off x="6319777" y="4041494"/>
+            <a:off x="6319777" y="4159482"/>
             <a:ext cx="829520" cy="0"/>
           </a:xfrm>
           <a:prstGeom prst="straightConnector1">
@@ -5911,7 +11076,7 @@
         </p:blipFill>
         <p:spPr>
           <a:xfrm>
-            <a:off x="1465162" y="1690688"/>
+            <a:off x="1465162" y="1808676"/>
             <a:ext cx="1102006" cy="1102006"/>
           </a:xfrm>
           <a:prstGeom prst="rect">
@@ -5941,7 +11106,7 @@
         </p:blipFill>
         <p:spPr>
           <a:xfrm>
-            <a:off x="1465162" y="3514304"/>
+            <a:off x="1465162" y="3632292"/>
             <a:ext cx="1102006" cy="1102006"/>
           </a:xfrm>
           <a:prstGeom prst="rect">
@@ -5971,7 +11136,7 @@
         </p:blipFill>
         <p:spPr>
           <a:xfrm>
-            <a:off x="2567168" y="1702264"/>
+            <a:off x="2567168" y="1820252"/>
             <a:ext cx="3677878" cy="1102005"/>
           </a:xfrm>
           <a:prstGeom prst="rect">
@@ -6001,7 +11166,7 @@
         </p:blipFill>
         <p:spPr>
           <a:xfrm>
-            <a:off x="2567168" y="3514304"/>
+            <a:off x="2567168" y="3632292"/>
             <a:ext cx="3677878" cy="1098205"/>
           </a:xfrm>
           <a:prstGeom prst="rect">
@@ -6068,8 +11233,23 @@
           <a:p>
             <a:r>
               <a:rPr lang="fr-FR" dirty="0"/>
+              <a:t>Méthode d’obscuration</a:t>
+            </a:r>
+            <a:br>
+              <a:rPr lang="fr-FR" dirty="0"/>
+            </a:br>
+            <a:r>
+              <a:rPr lang="fr-FR" sz="2400" dirty="0">
+                <a:solidFill>
+                  <a:schemeClr val="tx1">
+                    <a:lumMod val="65000"/>
+                    <a:lumOff val="35000"/>
+                  </a:schemeClr>
+                </a:solidFill>
+              </a:rPr>
               <a:t>Obscuration</a:t>
             </a:r>
+            <a:endParaRPr lang="fr-FR" dirty="0"/>
           </a:p>
         </p:txBody>
       </p:sp>
@@ -6095,7 +11275,7 @@
         </p:blipFill>
         <p:spPr>
           <a:xfrm>
-            <a:off x="838200" y="1347666"/>
+            <a:off x="838200" y="1504984"/>
             <a:ext cx="5342681" cy="5342681"/>
           </a:xfrm>
           <a:prstGeom prst="rect">
@@ -6200,7 +11380,7 @@
         </p:nvCxnSpPr>
         <p:spPr>
           <a:xfrm flipH="1" flipV="1">
-            <a:off x="3877519" y="2314937"/>
+            <a:off x="3900669" y="2483306"/>
             <a:ext cx="1388962" cy="833377"/>
           </a:xfrm>
           <a:prstGeom prst="straightConnector1">
@@ -6329,8 +11509,23 @@
           <a:p>
             <a:r>
               <a:rPr lang="fr-FR" dirty="0"/>
+              <a:t>Méthode d’obscuration</a:t>
+            </a:r>
+            <a:br>
+              <a:rPr lang="fr-FR" dirty="0"/>
+            </a:br>
+            <a:r>
+              <a:rPr lang="fr-FR" sz="2400" dirty="0">
+                <a:solidFill>
+                  <a:schemeClr val="tx1">
+                    <a:lumMod val="65000"/>
+                    <a:lumOff val="35000"/>
+                  </a:schemeClr>
+                </a:solidFill>
+              </a:rPr>
               <a:t>Obscuration</a:t>
             </a:r>
+            <a:endParaRPr lang="fr-FR" dirty="0"/>
           </a:p>
         </p:txBody>
       </p:sp>
@@ -6583,7 +11778,7 @@
         <p:cNvPr id="1" name="">
           <a:extLst>
             <a:ext uri="{FF2B5EF4-FFF2-40B4-BE49-F238E27FC236}">
-              <a16:creationId xmlns:a16="http://schemas.microsoft.com/office/drawing/2014/main" id="{1AD88587-B02D-FF18-21ED-05A9EE58204D}"/>
+              <a16:creationId xmlns:a16="http://schemas.microsoft.com/office/drawing/2014/main" id="{70508F36-BC55-34B3-A072-9134FE16A842}"/>
             </a:ext>
           </a:extLst>
         </p:cNvPr>
@@ -6603,7 +11798,7 @@
           <p:cNvPr id="4" name="Titre 3">
             <a:extLst>
               <a:ext uri="{FF2B5EF4-FFF2-40B4-BE49-F238E27FC236}">
-                <a16:creationId xmlns:a16="http://schemas.microsoft.com/office/drawing/2014/main" id="{238B2FF5-8768-6A3B-C884-FCE422AB9C7B}"/>
+                <a16:creationId xmlns:a16="http://schemas.microsoft.com/office/drawing/2014/main" id="{E8938516-FD4D-C93C-B0C3-0A03FFCD2568}"/>
               </a:ext>
             </a:extLst>
           </p:cNvPr>
@@ -6620,42 +11815,192 @@
           <a:lstStyle/>
           <a:p>
             <a:r>
-              <a:rPr lang="fr-FR" dirty="0" err="1"/>
-              <a:t>Désobscuration</a:t>
-            </a:r>
-            <a:endParaRPr lang="fr-FR" dirty="0"/>
-          </a:p>
-        </p:txBody>
-      </p:sp>
-      <p:sp>
-        <p:nvSpPr>
-          <p:cNvPr id="3" name="Espace réservé du contenu 2">
-            <a:extLst>
-              <a:ext uri="{FF2B5EF4-FFF2-40B4-BE49-F238E27FC236}">
-                <a16:creationId xmlns:a16="http://schemas.microsoft.com/office/drawing/2014/main" id="{DFC75D1C-D7DF-C95F-9B03-A4F9D59A8F35}"/>
-              </a:ext>
-            </a:extLst>
-          </p:cNvPr>
-          <p:cNvSpPr>
-            <a:spLocks noGrp="1"/>
-          </p:cNvSpPr>
-          <p:nvPr>
-            <p:ph idx="1"/>
-          </p:nvPr>
-        </p:nvSpPr>
-        <p:spPr/>
-        <p:txBody>
-          <a:bodyPr/>
-          <a:lstStyle/>
-          <a:p>
-            <a:endParaRPr lang="fr-FR"/>
+              <a:rPr lang="fr-FR" dirty="0"/>
+              <a:t>Méthode d’obscuration</a:t>
+            </a:r>
+            <a:br>
+              <a:rPr lang="fr-FR" dirty="0"/>
+            </a:br>
+            <a:r>
+              <a:rPr lang="fr-FR" sz="2400" dirty="0" err="1">
+                <a:solidFill>
+                  <a:schemeClr val="tx1">
+                    <a:lumMod val="65000"/>
+                    <a:lumOff val="35000"/>
+                  </a:schemeClr>
+                </a:solidFill>
+              </a:rPr>
+              <a:t>Déobscuration</a:t>
+            </a:r>
+            <a:endParaRPr lang="fr-FR" dirty="0">
+              <a:solidFill>
+                <a:schemeClr val="tx1">
+                  <a:lumMod val="65000"/>
+                  <a:lumOff val="35000"/>
+                </a:schemeClr>
+              </a:solidFill>
+            </a:endParaRPr>
+          </a:p>
+        </p:txBody>
+      </p:sp>
+      <p:pic>
+        <p:nvPicPr>
+          <p:cNvPr id="6" name="Image 5" descr="Une image contenant texte, tableau blanc, écriture manuscrite, dessin&#10;&#10;Le contenu généré par l’IA peut être incorrect.">
+            <a:extLst>
+              <a:ext uri="{FF2B5EF4-FFF2-40B4-BE49-F238E27FC236}">
+                <a16:creationId xmlns:a16="http://schemas.microsoft.com/office/drawing/2014/main" id="{0202E56A-A538-BF2B-1CCC-4EF29D521EC8}"/>
+              </a:ext>
+            </a:extLst>
+          </p:cNvPr>
+          <p:cNvPicPr>
+            <a:picLocks noChangeAspect="1"/>
+          </p:cNvPicPr>
+          <p:nvPr/>
+        </p:nvPicPr>
+        <p:blipFill>
+          <a:blip r:embed="rId2">
+            <a:extLst>
+              <a:ext uri="{28A0092B-C50C-407E-A947-70E740481C1C}">
+                <a14:useLocalDpi xmlns:a14="http://schemas.microsoft.com/office/drawing/2010/main" val="0"/>
+              </a:ext>
+            </a:extLst>
+          </a:blip>
+          <a:srcRect t="36392" r="42012"/>
+          <a:stretch/>
+        </p:blipFill>
+        <p:spPr>
+          <a:xfrm>
+            <a:off x="838200" y="2268059"/>
+            <a:ext cx="4985674" cy="3147791"/>
+          </a:xfrm>
+          <a:prstGeom prst="rect">
+            <a:avLst/>
+          </a:prstGeom>
+        </p:spPr>
+      </p:pic>
+      <p:pic>
+        <p:nvPicPr>
+          <p:cNvPr id="12" name="Image 11" descr="Une image contenant objets en métal, clé&#10;&#10;Le contenu généré par l’IA peut être incorrect.">
+            <a:extLst>
+              <a:ext uri="{FF2B5EF4-FFF2-40B4-BE49-F238E27FC236}">
+                <a16:creationId xmlns:a16="http://schemas.microsoft.com/office/drawing/2014/main" id="{B741C0A1-6D97-55A2-051B-95174123745D}"/>
+              </a:ext>
+            </a:extLst>
+          </p:cNvPr>
+          <p:cNvPicPr>
+            <a:picLocks noChangeAspect="1"/>
+          </p:cNvPicPr>
+          <p:nvPr/>
+        </p:nvPicPr>
+        <p:blipFill>
+          <a:blip r:embed="rId3">
+            <a:extLst>
+              <a:ext uri="{28A0092B-C50C-407E-A947-70E740481C1C}">
+                <a14:useLocalDpi xmlns:a14="http://schemas.microsoft.com/office/drawing/2010/main" val="0"/>
+              </a:ext>
+            </a:extLst>
+          </a:blip>
+          <a:stretch>
+            <a:fillRect/>
+          </a:stretch>
+        </p:blipFill>
+        <p:spPr>
+          <a:xfrm>
+            <a:off x="2378141" y="3589992"/>
+            <a:ext cx="346795" cy="346795"/>
+          </a:xfrm>
+          <a:prstGeom prst="rect">
+            <a:avLst/>
+          </a:prstGeom>
+        </p:spPr>
+      </p:pic>
+      <p:sp>
+        <p:nvSpPr>
+          <p:cNvPr id="2" name="ZoneTexte 1">
+            <a:extLst>
+              <a:ext uri="{FF2B5EF4-FFF2-40B4-BE49-F238E27FC236}">
+                <a16:creationId xmlns:a16="http://schemas.microsoft.com/office/drawing/2014/main" id="{459F8C4A-D4B4-844F-FF2E-F1F177249B74}"/>
+              </a:ext>
+            </a:extLst>
+          </p:cNvPr>
+          <p:cNvSpPr txBox="1"/>
+          <p:nvPr/>
+        </p:nvSpPr>
+        <p:spPr>
+          <a:xfrm>
+            <a:off x="6631671" y="3488011"/>
+            <a:ext cx="4964575" cy="707886"/>
+          </a:xfrm>
+          <a:prstGeom prst="rect">
+            <a:avLst/>
+          </a:prstGeom>
+          <a:noFill/>
+        </p:spPr>
+        <p:txBody>
+          <a:bodyPr wrap="square" rtlCol="0">
+            <a:spAutoFit/>
+          </a:bodyPr>
+          <a:lstStyle/>
+          <a:p>
+            <a:r>
+              <a:rPr lang="fr-FR" sz="4000" dirty="0"/>
+              <a:t>V</a:t>
+            </a:r>
+            <a:r>
+              <a:rPr lang="fr-FR" sz="2400" dirty="0"/>
+              <a:t>Î</a:t>
+            </a:r>
+            <a:r>
+              <a:rPr lang="fr-FR" sz="4000" dirty="0"/>
+              <a:t> = V</a:t>
+            </a:r>
+            <a:r>
+              <a:rPr lang="fr-FR" sz="2400" dirty="0"/>
+              <a:t>T’</a:t>
+            </a:r>
+            <a:r>
+              <a:rPr lang="fr-FR" sz="4000" dirty="0"/>
+              <a:t> + </a:t>
+            </a:r>
+            <a:r>
+              <a:rPr lang="fr-FR" sz="4000" dirty="0" err="1"/>
+              <a:t>V</a:t>
+            </a:r>
+            <a:r>
+              <a:rPr lang="fr-FR" sz="2400" dirty="0" err="1"/>
+              <a:t>p</a:t>
+            </a:r>
+            <a:r>
+              <a:rPr lang="fr-FR" sz="1600" dirty="0" err="1"/>
+              <a:t>source</a:t>
+            </a:r>
+            <a:r>
+              <a:rPr lang="fr-FR" sz="4000" dirty="0"/>
+              <a:t> – </a:t>
+            </a:r>
+            <a:r>
+              <a:rPr lang="fr-FR" sz="4000" dirty="0" err="1"/>
+              <a:t>V</a:t>
+            </a:r>
+            <a:r>
+              <a:rPr lang="fr-FR" sz="2400" dirty="0" err="1"/>
+              <a:t>p</a:t>
+            </a:r>
+            <a:r>
+              <a:rPr lang="fr-FR" sz="1600" dirty="0" err="1"/>
+              <a:t>dest</a:t>
+            </a:r>
+            <a:r>
+              <a:rPr lang="fr-FR" sz="4000" dirty="0"/>
+              <a:t> </a:t>
+            </a:r>
           </a:p>
         </p:txBody>
       </p:sp>
     </p:spTree>
     <p:extLst>
       <p:ext uri="{BB962C8B-B14F-4D97-AF65-F5344CB8AC3E}">
-        <p14:creationId xmlns:p14="http://schemas.microsoft.com/office/powerpoint/2010/main" val="3690449062"/>
+        <p14:creationId xmlns:p14="http://schemas.microsoft.com/office/powerpoint/2010/main" val="1278659547"/>
       </p:ext>
     </p:extLst>
   </p:cSld>
